--- a/Mid_Sem_Report/Group18_Project20_MidSem_PPT_DIP_2026.pptx
+++ b/Mid_Sem_Report/Group18_Project20_MidSem_PPT_DIP_2026.pptx
@@ -1,34 +1,31 @@
 
 <file path=ppt/presentation.xml><?xml version="1.0" encoding="utf-8"?>
-<p:presentation xmlns:a="http://schemas.openxmlformats.org/drawingml/2006/main" xmlns:r="http://schemas.openxmlformats.org/officeDocument/2006/relationships" xmlns:p="http://schemas.openxmlformats.org/presentationml/2006/main" saveSubsetFonts="1" embedTrueTypeFonts="true">
+<p:presentation xmlns:a="http://schemas.openxmlformats.org/drawingml/2006/main" xmlns:r="http://schemas.openxmlformats.org/officeDocument/2006/relationships" xmlns:p="http://schemas.openxmlformats.org/presentationml/2006/main" embedTrueTypeFonts="1" saveSubsetFonts="1">
   <p:sldMasterIdLst>
     <p:sldMasterId id="2147483648" r:id="rId1"/>
   </p:sldMasterIdLst>
   <p:sldIdLst>
-    <p:sldId id="256" r:id="rId6"/>
-    <p:sldId id="257" r:id="rId7"/>
-    <p:sldId id="258" r:id="rId8"/>
-    <p:sldId id="259" r:id="rId9"/>
-    <p:sldId id="260" r:id="rId10"/>
-    <p:sldId id="261" r:id="rId11"/>
-    <p:sldId id="262" r:id="rId12"/>
-    <p:sldId id="263" r:id="rId13"/>
-    <p:sldId id="264" r:id="rId14"/>
+    <p:sldId id="256" r:id="rId2"/>
+    <p:sldId id="257" r:id="rId3"/>
+    <p:sldId id="258" r:id="rId4"/>
+    <p:sldId id="259" r:id="rId5"/>
+    <p:sldId id="260" r:id="rId6"/>
+    <p:sldId id="261" r:id="rId7"/>
+    <p:sldId id="262" r:id="rId8"/>
+    <p:sldId id="263" r:id="rId9"/>
+    <p:sldId id="264" r:id="rId10"/>
+    <p:sldId id="266" r:id="rId11"/>
   </p:sldIdLst>
   <p:sldSz cx="18288000" cy="10287000"/>
   <p:notesSz cx="6858000" cy="9144000"/>
   <p:embeddedFontLst>
     <p:embeddedFont>
-      <p:font typeface="IBM Plex Sans Bold" charset="1" panose="020B0803050203000203"/>
-      <p:regular r:id="rId15"/>
+      <p:font typeface="Arial Bold" panose="020B0704020202020204" pitchFamily="34" charset="0"/>
+      <p:bold r:id="rId12"/>
     </p:embeddedFont>
     <p:embeddedFont>
-      <p:font typeface="Arial" charset="1" panose="020B0604020202020204"/>
-      <p:regular r:id="rId16"/>
-    </p:embeddedFont>
-    <p:embeddedFont>
-      <p:font typeface="Arial Bold" charset="1" panose="020B0704020202020204"/>
-      <p:regular r:id="rId17"/>
+      <p:font typeface="IBM Plex Sans Bold" panose="020B0604020202020204" charset="0"/>
+      <p:regular r:id="rId13"/>
     </p:embeddedFont>
   </p:embeddedFontLst>
   <p:defaultTextStyle>
@@ -126,6 +123,22 @@
       </a:defRPr>
     </a:lvl9pPr>
   </p:defaultTextStyle>
+  <p:extLst>
+    <p:ext uri="{EFAFB233-063F-42B5-8137-9DF3F51BA10A}">
+      <p15:sldGuideLst xmlns:p15="http://schemas.microsoft.com/office/powerpoint/2012/main">
+        <p15:guide id="1" orient="horz" pos="2160">
+          <p15:clr>
+            <a:srgbClr val="A4A3A4"/>
+          </p15:clr>
+        </p15:guide>
+        <p15:guide id="2" pos="2880">
+          <p15:clr>
+            <a:srgbClr val="A4A3A4"/>
+          </p15:clr>
+        </p15:guide>
+      </p15:sldGuideLst>
+    </p:ext>
+  </p:extLst>
 </p:presentation>
 </file>
 
@@ -167,10 +180,9 @@
           <a:lstStyle/>
           <a:p>
             <a:r>
-              <a:rPr lang="en-US" smtClean="0"/>
+              <a:rPr lang="en-US"/>
               <a:t>Click to edit Master title style</a:t>
             </a:r>
-            <a:endParaRPr lang="en-US"/>
           </a:p>
         </p:txBody>
       </p:sp>
@@ -286,10 +298,9 @@
           </a:lstStyle>
           <a:p>
             <a:r>
-              <a:rPr lang="en-US" smtClean="0"/>
+              <a:rPr lang="en-US"/>
               <a:t>Click to edit Master subtitle style</a:t>
             </a:r>
-            <a:endParaRPr lang="en-US"/>
           </a:p>
         </p:txBody>
       </p:sp>
@@ -311,7 +322,7 @@
             <a:fld id="{1D8BD707-D9CF-40AE-B4C6-C98DA3205C09}" type="datetimeFigureOut">
               <a:rPr lang="en-US" smtClean="0"/>
               <a:pPr/>
-              <a:t>8/1/2011</a:t>
+              <a:t>10/12/2026</a:t>
             </a:fld>
             <a:endParaRPr lang="en-US"/>
           </a:p>
@@ -401,10 +412,9 @@
           <a:lstStyle/>
           <a:p>
             <a:r>
-              <a:rPr lang="en-US" smtClean="0"/>
+              <a:rPr lang="en-US"/>
               <a:t>Click to edit Master title style</a:t>
             </a:r>
-            <a:endParaRPr lang="en-US"/>
           </a:p>
         </p:txBody>
       </p:sp>
@@ -425,38 +435,37 @@
           <a:p>
             <a:pPr lvl="0"/>
             <a:r>
-              <a:rPr lang="en-US" smtClean="0"/>
+              <a:rPr lang="en-US"/>
               <a:t>Click to edit Master text styles</a:t>
             </a:r>
           </a:p>
           <a:p>
             <a:pPr lvl="1"/>
             <a:r>
-              <a:rPr lang="en-US" smtClean="0"/>
+              <a:rPr lang="en-US"/>
               <a:t>Second level</a:t>
             </a:r>
           </a:p>
           <a:p>
             <a:pPr lvl="2"/>
             <a:r>
-              <a:rPr lang="en-US" smtClean="0"/>
+              <a:rPr lang="en-US"/>
               <a:t>Third level</a:t>
             </a:r>
           </a:p>
           <a:p>
             <a:pPr lvl="3"/>
             <a:r>
-              <a:rPr lang="en-US" smtClean="0"/>
+              <a:rPr lang="en-US"/>
               <a:t>Fourth level</a:t>
             </a:r>
           </a:p>
           <a:p>
             <a:pPr lvl="4"/>
             <a:r>
-              <a:rPr lang="en-US" smtClean="0"/>
+              <a:rPr lang="en-US"/>
               <a:t>Fifth level</a:t>
             </a:r>
-            <a:endParaRPr lang="en-US"/>
           </a:p>
         </p:txBody>
       </p:sp>
@@ -478,7 +487,7 @@
             <a:fld id="{1D8BD707-D9CF-40AE-B4C6-C98DA3205C09}" type="datetimeFigureOut">
               <a:rPr lang="en-US" smtClean="0"/>
               <a:pPr/>
-              <a:t>8/1/2011</a:t>
+              <a:t>10/12/2026</a:t>
             </a:fld>
             <a:endParaRPr lang="en-US"/>
           </a:p>
@@ -573,10 +582,9 @@
           <a:lstStyle/>
           <a:p>
             <a:r>
-              <a:rPr lang="en-US" smtClean="0"/>
+              <a:rPr lang="en-US"/>
               <a:t>Click to edit Master title style</a:t>
             </a:r>
-            <a:endParaRPr lang="en-US"/>
           </a:p>
         </p:txBody>
       </p:sp>
@@ -602,38 +610,37 @@
           <a:p>
             <a:pPr lvl="0"/>
             <a:r>
-              <a:rPr lang="en-US" smtClean="0"/>
+              <a:rPr lang="en-US"/>
               <a:t>Click to edit Master text styles</a:t>
             </a:r>
           </a:p>
           <a:p>
             <a:pPr lvl="1"/>
             <a:r>
-              <a:rPr lang="en-US" smtClean="0"/>
+              <a:rPr lang="en-US"/>
               <a:t>Second level</a:t>
             </a:r>
           </a:p>
           <a:p>
             <a:pPr lvl="2"/>
             <a:r>
-              <a:rPr lang="en-US" smtClean="0"/>
+              <a:rPr lang="en-US"/>
               <a:t>Third level</a:t>
             </a:r>
           </a:p>
           <a:p>
             <a:pPr lvl="3"/>
             <a:r>
-              <a:rPr lang="en-US" smtClean="0"/>
+              <a:rPr lang="en-US"/>
               <a:t>Fourth level</a:t>
             </a:r>
           </a:p>
           <a:p>
             <a:pPr lvl="4"/>
             <a:r>
-              <a:rPr lang="en-US" smtClean="0"/>
+              <a:rPr lang="en-US"/>
               <a:t>Fifth level</a:t>
             </a:r>
-            <a:endParaRPr lang="en-US"/>
           </a:p>
         </p:txBody>
       </p:sp>
@@ -655,7 +662,7 @@
             <a:fld id="{1D8BD707-D9CF-40AE-B4C6-C98DA3205C09}" type="datetimeFigureOut">
               <a:rPr lang="en-US" smtClean="0"/>
               <a:pPr/>
-              <a:t>8/1/2011</a:t>
+              <a:t>10/12/2026</a:t>
             </a:fld>
             <a:endParaRPr lang="en-US"/>
           </a:p>
@@ -745,10 +752,9 @@
           <a:lstStyle/>
           <a:p>
             <a:r>
-              <a:rPr lang="en-US" smtClean="0"/>
+              <a:rPr lang="en-US"/>
               <a:t>Click to edit Master title style</a:t>
             </a:r>
-            <a:endParaRPr lang="en-US"/>
           </a:p>
         </p:txBody>
       </p:sp>
@@ -769,38 +775,37 @@
           <a:p>
             <a:pPr lvl="0"/>
             <a:r>
-              <a:rPr lang="en-US" smtClean="0"/>
+              <a:rPr lang="en-US"/>
               <a:t>Click to edit Master text styles</a:t>
             </a:r>
           </a:p>
           <a:p>
             <a:pPr lvl="1"/>
             <a:r>
-              <a:rPr lang="en-US" smtClean="0"/>
+              <a:rPr lang="en-US"/>
               <a:t>Second level</a:t>
             </a:r>
           </a:p>
           <a:p>
             <a:pPr lvl="2"/>
             <a:r>
-              <a:rPr lang="en-US" smtClean="0"/>
+              <a:rPr lang="en-US"/>
               <a:t>Third level</a:t>
             </a:r>
           </a:p>
           <a:p>
             <a:pPr lvl="3"/>
             <a:r>
-              <a:rPr lang="en-US" smtClean="0"/>
+              <a:rPr lang="en-US"/>
               <a:t>Fourth level</a:t>
             </a:r>
           </a:p>
           <a:p>
             <a:pPr lvl="4"/>
             <a:r>
-              <a:rPr lang="en-US" smtClean="0"/>
+              <a:rPr lang="en-US"/>
               <a:t>Fifth level</a:t>
             </a:r>
-            <a:endParaRPr lang="en-US"/>
           </a:p>
         </p:txBody>
       </p:sp>
@@ -822,7 +827,7 @@
             <a:fld id="{1D8BD707-D9CF-40AE-B4C6-C98DA3205C09}" type="datetimeFigureOut">
               <a:rPr lang="en-US" smtClean="0"/>
               <a:pPr/>
-              <a:t>8/1/2011</a:t>
+              <a:t>10/12/2026</a:t>
             </a:fld>
             <a:endParaRPr lang="en-US"/>
           </a:p>
@@ -921,10 +926,9 @@
           </a:lstStyle>
           <a:p>
             <a:r>
-              <a:rPr lang="en-US" smtClean="0"/>
+              <a:rPr lang="en-US"/>
               <a:t>Click to edit Master title style</a:t>
             </a:r>
-            <a:endParaRPr lang="en-US"/>
           </a:p>
         </p:txBody>
       </p:sp>
@@ -1041,7 +1045,7 @@
           <a:p>
             <a:pPr lvl="0"/>
             <a:r>
-              <a:rPr lang="en-US" smtClean="0"/>
+              <a:rPr lang="en-US"/>
               <a:t>Click to edit Master text styles</a:t>
             </a:r>
           </a:p>
@@ -1065,7 +1069,7 @@
             <a:fld id="{1D8BD707-D9CF-40AE-B4C6-C98DA3205C09}" type="datetimeFigureOut">
               <a:rPr lang="en-US" smtClean="0"/>
               <a:pPr/>
-              <a:t>8/1/2011</a:t>
+              <a:t>10/12/2026</a:t>
             </a:fld>
             <a:endParaRPr lang="en-US"/>
           </a:p>
@@ -1155,10 +1159,9 @@
           <a:lstStyle/>
           <a:p>
             <a:r>
-              <a:rPr lang="en-US" smtClean="0"/>
+              <a:rPr lang="en-US"/>
               <a:t>Click to edit Master title style</a:t>
             </a:r>
-            <a:endParaRPr lang="en-US"/>
           </a:p>
         </p:txBody>
       </p:sp>
@@ -1212,38 +1215,37 @@
           <a:p>
             <a:pPr lvl="0"/>
             <a:r>
-              <a:rPr lang="en-US" smtClean="0"/>
+              <a:rPr lang="en-US"/>
               <a:t>Click to edit Master text styles</a:t>
             </a:r>
           </a:p>
           <a:p>
             <a:pPr lvl="1"/>
             <a:r>
-              <a:rPr lang="en-US" smtClean="0"/>
+              <a:rPr lang="en-US"/>
               <a:t>Second level</a:t>
             </a:r>
           </a:p>
           <a:p>
             <a:pPr lvl="2"/>
             <a:r>
-              <a:rPr lang="en-US" smtClean="0"/>
+              <a:rPr lang="en-US"/>
               <a:t>Third level</a:t>
             </a:r>
           </a:p>
           <a:p>
             <a:pPr lvl="3"/>
             <a:r>
-              <a:rPr lang="en-US" smtClean="0"/>
+              <a:rPr lang="en-US"/>
               <a:t>Fourth level</a:t>
             </a:r>
           </a:p>
           <a:p>
             <a:pPr lvl="4"/>
             <a:r>
-              <a:rPr lang="en-US" smtClean="0"/>
+              <a:rPr lang="en-US"/>
               <a:t>Fifth level</a:t>
             </a:r>
-            <a:endParaRPr lang="en-US"/>
           </a:p>
         </p:txBody>
       </p:sp>
@@ -1297,38 +1299,37 @@
           <a:p>
             <a:pPr lvl="0"/>
             <a:r>
-              <a:rPr lang="en-US" smtClean="0"/>
+              <a:rPr lang="en-US"/>
               <a:t>Click to edit Master text styles</a:t>
             </a:r>
           </a:p>
           <a:p>
             <a:pPr lvl="1"/>
             <a:r>
-              <a:rPr lang="en-US" smtClean="0"/>
+              <a:rPr lang="en-US"/>
               <a:t>Second level</a:t>
             </a:r>
           </a:p>
           <a:p>
             <a:pPr lvl="2"/>
             <a:r>
-              <a:rPr lang="en-US" smtClean="0"/>
+              <a:rPr lang="en-US"/>
               <a:t>Third level</a:t>
             </a:r>
           </a:p>
           <a:p>
             <a:pPr lvl="3"/>
             <a:r>
-              <a:rPr lang="en-US" smtClean="0"/>
+              <a:rPr lang="en-US"/>
               <a:t>Fourth level</a:t>
             </a:r>
           </a:p>
           <a:p>
             <a:pPr lvl="4"/>
             <a:r>
-              <a:rPr lang="en-US" smtClean="0"/>
+              <a:rPr lang="en-US"/>
               <a:t>Fifth level</a:t>
             </a:r>
-            <a:endParaRPr lang="en-US"/>
           </a:p>
         </p:txBody>
       </p:sp>
@@ -1350,7 +1351,7 @@
             <a:fld id="{1D8BD707-D9CF-40AE-B4C6-C98DA3205C09}" type="datetimeFigureOut">
               <a:rPr lang="en-US" smtClean="0"/>
               <a:pPr/>
-              <a:t>8/1/2011</a:t>
+              <a:t>10/12/2026</a:t>
             </a:fld>
             <a:endParaRPr lang="en-US"/>
           </a:p>
@@ -1444,10 +1445,9 @@
           </a:lstStyle>
           <a:p>
             <a:r>
-              <a:rPr lang="en-US" smtClean="0"/>
+              <a:rPr lang="en-US"/>
               <a:t>Click to edit Master title style</a:t>
             </a:r>
-            <a:endParaRPr lang="en-US"/>
           </a:p>
         </p:txBody>
       </p:sp>
@@ -1510,7 +1510,7 @@
           <a:p>
             <a:pPr lvl="0"/>
             <a:r>
-              <a:rPr lang="en-US" smtClean="0"/>
+              <a:rPr lang="en-US"/>
               <a:t>Click to edit Master text styles</a:t>
             </a:r>
           </a:p>
@@ -1566,38 +1566,37 @@
           <a:p>
             <a:pPr lvl="0"/>
             <a:r>
-              <a:rPr lang="en-US" smtClean="0"/>
+              <a:rPr lang="en-US"/>
               <a:t>Click to edit Master text styles</a:t>
             </a:r>
           </a:p>
           <a:p>
             <a:pPr lvl="1"/>
             <a:r>
-              <a:rPr lang="en-US" smtClean="0"/>
+              <a:rPr lang="en-US"/>
               <a:t>Second level</a:t>
             </a:r>
           </a:p>
           <a:p>
             <a:pPr lvl="2"/>
             <a:r>
-              <a:rPr lang="en-US" smtClean="0"/>
+              <a:rPr lang="en-US"/>
               <a:t>Third level</a:t>
             </a:r>
           </a:p>
           <a:p>
             <a:pPr lvl="3"/>
             <a:r>
-              <a:rPr lang="en-US" smtClean="0"/>
+              <a:rPr lang="en-US"/>
               <a:t>Fourth level</a:t>
             </a:r>
           </a:p>
           <a:p>
             <a:pPr lvl="4"/>
             <a:r>
-              <a:rPr lang="en-US" smtClean="0"/>
+              <a:rPr lang="en-US"/>
               <a:t>Fifth level</a:t>
             </a:r>
-            <a:endParaRPr lang="en-US"/>
           </a:p>
         </p:txBody>
       </p:sp>
@@ -1660,7 +1659,7 @@
           <a:p>
             <a:pPr lvl="0"/>
             <a:r>
-              <a:rPr lang="en-US" smtClean="0"/>
+              <a:rPr lang="en-US"/>
               <a:t>Click to edit Master text styles</a:t>
             </a:r>
           </a:p>
@@ -1716,38 +1715,37 @@
           <a:p>
             <a:pPr lvl="0"/>
             <a:r>
-              <a:rPr lang="en-US" smtClean="0"/>
+              <a:rPr lang="en-US"/>
               <a:t>Click to edit Master text styles</a:t>
             </a:r>
           </a:p>
           <a:p>
             <a:pPr lvl="1"/>
             <a:r>
-              <a:rPr lang="en-US" smtClean="0"/>
+              <a:rPr lang="en-US"/>
               <a:t>Second level</a:t>
             </a:r>
           </a:p>
           <a:p>
             <a:pPr lvl="2"/>
             <a:r>
-              <a:rPr lang="en-US" smtClean="0"/>
+              <a:rPr lang="en-US"/>
               <a:t>Third level</a:t>
             </a:r>
           </a:p>
           <a:p>
             <a:pPr lvl="3"/>
             <a:r>
-              <a:rPr lang="en-US" smtClean="0"/>
+              <a:rPr lang="en-US"/>
               <a:t>Fourth level</a:t>
             </a:r>
           </a:p>
           <a:p>
             <a:pPr lvl="4"/>
             <a:r>
-              <a:rPr lang="en-US" smtClean="0"/>
+              <a:rPr lang="en-US"/>
               <a:t>Fifth level</a:t>
             </a:r>
-            <a:endParaRPr lang="en-US"/>
           </a:p>
         </p:txBody>
       </p:sp>
@@ -1769,7 +1767,7 @@
             <a:fld id="{1D8BD707-D9CF-40AE-B4C6-C98DA3205C09}" type="datetimeFigureOut">
               <a:rPr lang="en-US" smtClean="0"/>
               <a:pPr/>
-              <a:t>8/1/2011</a:t>
+              <a:t>10/12/2026</a:t>
             </a:fld>
             <a:endParaRPr lang="en-US"/>
           </a:p>
@@ -1859,10 +1857,9 @@
           <a:lstStyle/>
           <a:p>
             <a:r>
-              <a:rPr lang="en-US" smtClean="0"/>
+              <a:rPr lang="en-US"/>
               <a:t>Click to edit Master title style</a:t>
             </a:r>
-            <a:endParaRPr lang="en-US"/>
           </a:p>
         </p:txBody>
       </p:sp>
@@ -1884,7 +1881,7 @@
             <a:fld id="{1D8BD707-D9CF-40AE-B4C6-C98DA3205C09}" type="datetimeFigureOut">
               <a:rPr lang="en-US" smtClean="0"/>
               <a:pPr/>
-              <a:t>8/1/2011</a:t>
+              <a:t>10/12/2026</a:t>
             </a:fld>
             <a:endParaRPr lang="en-US"/>
           </a:p>
@@ -1976,7 +1973,7 @@
             <a:fld id="{1D8BD707-D9CF-40AE-B4C6-C98DA3205C09}" type="datetimeFigureOut">
               <a:rPr lang="en-US" smtClean="0"/>
               <a:pPr/>
-              <a:t>8/1/2011</a:t>
+              <a:t>10/12/2026</a:t>
             </a:fld>
             <a:endParaRPr lang="en-US"/>
           </a:p>
@@ -2075,10 +2072,9 @@
           </a:lstStyle>
           <a:p>
             <a:r>
-              <a:rPr lang="en-US" smtClean="0"/>
+              <a:rPr lang="en-US"/>
               <a:t>Click to edit Master title style</a:t>
             </a:r>
-            <a:endParaRPr lang="en-US"/>
           </a:p>
         </p:txBody>
       </p:sp>
@@ -2132,38 +2128,37 @@
           <a:p>
             <a:pPr lvl="0"/>
             <a:r>
-              <a:rPr lang="en-US" smtClean="0"/>
+              <a:rPr lang="en-US"/>
               <a:t>Click to edit Master text styles</a:t>
             </a:r>
           </a:p>
           <a:p>
             <a:pPr lvl="1"/>
             <a:r>
-              <a:rPr lang="en-US" smtClean="0"/>
+              <a:rPr lang="en-US"/>
               <a:t>Second level</a:t>
             </a:r>
           </a:p>
           <a:p>
             <a:pPr lvl="2"/>
             <a:r>
-              <a:rPr lang="en-US" smtClean="0"/>
+              <a:rPr lang="en-US"/>
               <a:t>Third level</a:t>
             </a:r>
           </a:p>
           <a:p>
             <a:pPr lvl="3"/>
             <a:r>
-              <a:rPr lang="en-US" smtClean="0"/>
+              <a:rPr lang="en-US"/>
               <a:t>Fourth level</a:t>
             </a:r>
           </a:p>
           <a:p>
             <a:pPr lvl="4"/>
             <a:r>
-              <a:rPr lang="en-US" smtClean="0"/>
+              <a:rPr lang="en-US"/>
               <a:t>Fifth level</a:t>
             </a:r>
-            <a:endParaRPr lang="en-US"/>
           </a:p>
         </p:txBody>
       </p:sp>
@@ -2226,7 +2221,7 @@
           <a:p>
             <a:pPr lvl="0"/>
             <a:r>
-              <a:rPr lang="en-US" smtClean="0"/>
+              <a:rPr lang="en-US"/>
               <a:t>Click to edit Master text styles</a:t>
             </a:r>
           </a:p>
@@ -2250,7 +2245,7 @@
             <a:fld id="{1D8BD707-D9CF-40AE-B4C6-C98DA3205C09}" type="datetimeFigureOut">
               <a:rPr lang="en-US" smtClean="0"/>
               <a:pPr/>
-              <a:t>8/1/2011</a:t>
+              <a:t>10/12/2026</a:t>
             </a:fld>
             <a:endParaRPr lang="en-US"/>
           </a:p>
@@ -2349,10 +2344,9 @@
           </a:lstStyle>
           <a:p>
             <a:r>
-              <a:rPr lang="en-US" smtClean="0"/>
+              <a:rPr lang="en-US"/>
               <a:t>Click to edit Master title style</a:t>
             </a:r>
-            <a:endParaRPr lang="en-US"/>
           </a:p>
         </p:txBody>
       </p:sp>
@@ -2476,7 +2470,7 @@
           <a:p>
             <a:pPr lvl="0"/>
             <a:r>
-              <a:rPr lang="en-US" smtClean="0"/>
+              <a:rPr lang="en-US"/>
               <a:t>Click to edit Master text styles</a:t>
             </a:r>
           </a:p>
@@ -2500,7 +2494,7 @@
             <a:fld id="{1D8BD707-D9CF-40AE-B4C6-C98DA3205C09}" type="datetimeFigureOut">
               <a:rPr lang="en-US" smtClean="0"/>
               <a:pPr/>
-              <a:t>8/1/2011</a:t>
+              <a:t>10/12/2026</a:t>
             </a:fld>
             <a:endParaRPr lang="en-US"/>
           </a:p>
@@ -2605,10 +2599,9 @@
           <a:lstStyle/>
           <a:p>
             <a:r>
-              <a:rPr lang="en-US" smtClean="0"/>
+              <a:rPr lang="en-US"/>
               <a:t>Click to edit Master title style</a:t>
             </a:r>
-            <a:endParaRPr lang="en-US"/>
           </a:p>
         </p:txBody>
       </p:sp>
@@ -2639,38 +2632,37 @@
           <a:p>
             <a:pPr lvl="0"/>
             <a:r>
-              <a:rPr lang="en-US" smtClean="0"/>
+              <a:rPr lang="en-US"/>
               <a:t>Click to edit Master text styles</a:t>
             </a:r>
           </a:p>
           <a:p>
             <a:pPr lvl="1"/>
             <a:r>
-              <a:rPr lang="en-US" smtClean="0"/>
+              <a:rPr lang="en-US"/>
               <a:t>Second level</a:t>
             </a:r>
           </a:p>
           <a:p>
             <a:pPr lvl="2"/>
             <a:r>
-              <a:rPr lang="en-US" smtClean="0"/>
+              <a:rPr lang="en-US"/>
               <a:t>Third level</a:t>
             </a:r>
           </a:p>
           <a:p>
             <a:pPr lvl="3"/>
             <a:r>
-              <a:rPr lang="en-US" smtClean="0"/>
+              <a:rPr lang="en-US"/>
               <a:t>Fourth level</a:t>
             </a:r>
           </a:p>
           <a:p>
             <a:pPr lvl="4"/>
             <a:r>
-              <a:rPr lang="en-US" smtClean="0"/>
+              <a:rPr lang="en-US"/>
               <a:t>Fifth level</a:t>
             </a:r>
-            <a:endParaRPr lang="en-US"/>
           </a:p>
         </p:txBody>
       </p:sp>
@@ -2710,7 +2702,7 @@
             <a:fld id="{1D8BD707-D9CF-40AE-B4C6-C98DA3205C09}" type="datetimeFigureOut">
               <a:rPr lang="en-US" smtClean="0"/>
               <a:pPr/>
-              <a:t>8/1/2011</a:t>
+              <a:t>10/12/2026</a:t>
             </a:fld>
             <a:endParaRPr lang="en-US"/>
           </a:p>
@@ -3065,13 +3057,14 @@
 </file>
 
 <file path=ppt/slides/slide1.xml><?xml version="1.0" encoding="utf-8"?>
-<p:sld xmlns:p="http://schemas.openxmlformats.org/presentationml/2006/main" xmlns:a="http://schemas.openxmlformats.org/drawingml/2006/main" xmlns:r="http://schemas.openxmlformats.org/officeDocument/2006/relationships">
+<p:sld xmlns:a="http://schemas.openxmlformats.org/drawingml/2006/main" xmlns:r="http://schemas.openxmlformats.org/officeDocument/2006/relationships" xmlns:p="http://schemas.openxmlformats.org/presentationml/2006/main">
   <p:cSld>
     <p:bg>
       <p:bgPr>
         <a:solidFill>
           <a:srgbClr val="801B19"/>
         </a:solidFill>
+        <a:effectLst/>
       </p:bgPr>
     </p:bg>
     <p:spTree>
@@ -3090,12 +3083,12 @@
       </p:grpSpPr>
       <p:sp>
         <p:nvSpPr>
-          <p:cNvPr name="Freeform 2" id="2"/>
+          <p:cNvPr id="2" name="Freeform 2"/>
           <p:cNvSpPr/>
           <p:nvPr/>
         </p:nvSpPr>
         <p:spPr>
-          <a:xfrm flipH="false" flipV="false" rot="0">
+          <a:xfrm>
             <a:off x="6064401" y="1109546"/>
             <a:ext cx="6159198" cy="2021581"/>
           </a:xfrm>
@@ -3104,9 +3097,9 @@
             <a:gdLst/>
             <a:ahLst/>
             <a:cxnLst/>
-            <a:rect r="r" b="b" t="t" l="l"/>
+            <a:rect l="l" t="t" r="r" b="b"/>
             <a:pathLst>
-              <a:path h="2021581" w="6159198">
+              <a:path w="6159198" h="2021581">
                 <a:moveTo>
                   <a:pt x="0" y="0"/>
                 </a:moveTo>
@@ -3127,27 +3120,34 @@
             </a:pathLst>
           </a:custGeom>
           <a:blipFill>
-            <a:blip r:embed="rId2">
+            <a:blip>
               <a:extLst>
                 <a:ext uri="{96DAC541-7B7A-43D3-8B79-37D633B846F1}">
-                  <asvg:svgBlip xmlns:asvg="http://schemas.microsoft.com/office/drawing/2016/SVG/main" r:embed="rId3"/>
+                  <asvg:svgBlip xmlns:asvg="http://schemas.microsoft.com/office/drawing/2016/SVG/main" r:embed="rId2"/>
                 </a:ext>
               </a:extLst>
             </a:blip>
             <a:stretch>
-              <a:fillRect l="0" t="0" r="0" b="0"/>
+              <a:fillRect/>
             </a:stretch>
           </a:blipFill>
         </p:spPr>
+        <p:txBody>
+          <a:bodyPr/>
+          <a:lstStyle/>
+          <a:p>
+            <a:endParaRPr lang="en-IN"/>
+          </a:p>
+        </p:txBody>
       </p:sp>
       <p:grpSp>
         <p:nvGrpSpPr>
-          <p:cNvPr name="Group 3" id="3"/>
+          <p:cNvPr id="3" name="Group 3"/>
           <p:cNvGrpSpPr/>
           <p:nvPr/>
         </p:nvGrpSpPr>
         <p:grpSpPr>
-          <a:xfrm rot="0">
+          <a:xfrm>
             <a:off x="6064401" y="781422"/>
             <a:ext cx="6159198" cy="2021581"/>
             <a:chOff x="0" y="0"/>
@@ -3156,12 +3156,12 @@
         </p:grpSpPr>
         <p:sp>
           <p:nvSpPr>
-            <p:cNvPr name="Freeform 4" id="4"/>
+            <p:cNvPr id="4" name="Freeform 4"/>
             <p:cNvSpPr/>
             <p:nvPr/>
           </p:nvSpPr>
           <p:spPr>
-            <a:xfrm flipH="false" flipV="false" rot="0">
+            <a:xfrm>
               <a:off x="0" y="0"/>
               <a:ext cx="5474843" cy="1796923"/>
             </a:xfrm>
@@ -3170,9 +3170,9 @@
               <a:gdLst/>
               <a:ahLst/>
               <a:cxnLst/>
-              <a:rect r="r" b="b" t="t" l="l"/>
+              <a:rect l="l" t="t" r="r" b="b"/>
               <a:pathLst>
-                <a:path h="1796923" w="5474843">
+                <a:path w="5474843" h="1796923">
                   <a:moveTo>
                     <a:pt x="0" y="0"/>
                   </a:moveTo>
@@ -3193,22 +3193,29 @@
               </a:pathLst>
             </a:custGeom>
             <a:blipFill>
-              <a:blip r:embed="rId4"/>
+              <a:blip r:embed="rId3"/>
               <a:stretch>
-                <a:fillRect l="0" t="0" r="0" b="-2"/>
+                <a:fillRect b="-2"/>
               </a:stretch>
             </a:blipFill>
           </p:spPr>
+          <p:txBody>
+            <a:bodyPr/>
+            <a:lstStyle/>
+            <a:p>
+              <a:endParaRPr lang="en-IN"/>
+            </a:p>
+          </p:txBody>
         </p:sp>
       </p:grpSp>
       <p:sp>
         <p:nvSpPr>
-          <p:cNvPr name="TextBox 5" id="5"/>
-          <p:cNvSpPr txBox="true"/>
+          <p:cNvPr id="5" name="TextBox 5"/>
+          <p:cNvSpPr txBox="1"/>
           <p:nvPr/>
         </p:nvSpPr>
         <p:spPr>
-          <a:xfrm rot="0">
+          <a:xfrm>
             <a:off x="2392288" y="7025617"/>
             <a:ext cx="5831562" cy="712470"/>
           </a:xfrm>
@@ -3217,7 +3224,7 @@
           </a:prstGeom>
         </p:spPr>
         <p:txBody>
-          <a:bodyPr anchor="t" rtlCol="false" tIns="0" lIns="0" bIns="0" rIns="0">
+          <a:bodyPr lIns="0" tIns="0" rIns="0" bIns="0" rtlCol="0" anchor="t">
             <a:spAutoFit/>
           </a:bodyPr>
           <a:lstStyle/>
@@ -3228,7 +3235,7 @@
               </a:lnSpc>
             </a:pPr>
             <a:r>
-              <a:rPr lang="en-US" b="true" sz="4199" spc="37">
+              <a:rPr lang="en-US" sz="4199" b="1" spc="37">
                 <a:solidFill>
                   <a:srgbClr val="FFFFFF"/>
                 </a:solidFill>
@@ -3244,21 +3251,21 @@
       </p:sp>
       <p:sp>
         <p:nvSpPr>
-          <p:cNvPr name="TextBox 6" id="6"/>
-          <p:cNvSpPr txBox="true"/>
+          <p:cNvPr id="6" name="TextBox 6"/>
+          <p:cNvSpPr txBox="1"/>
           <p:nvPr/>
         </p:nvSpPr>
         <p:spPr>
-          <a:xfrm rot="0">
-            <a:off x="101970" y="3756515"/>
-            <a:ext cx="18084060" cy="1882140"/>
+          <a:xfrm>
+            <a:off x="1651185" y="3807906"/>
+            <a:ext cx="14985630" cy="1882140"/>
           </a:xfrm>
           <a:prstGeom prst="rect">
             <a:avLst/>
           </a:prstGeom>
         </p:spPr>
         <p:txBody>
-          <a:bodyPr anchor="t" rtlCol="false" tIns="0" lIns="0" bIns="0" rIns="0">
+          <a:bodyPr wrap="square" lIns="0" tIns="0" rIns="0" bIns="0" rtlCol="0" anchor="t">
             <a:spAutoFit/>
           </a:bodyPr>
           <a:lstStyle/>
@@ -3269,7 +3276,7 @@
               </a:lnSpc>
             </a:pPr>
             <a:r>
-              <a:rPr lang="en-US" b="true" sz="5400" spc="48">
+              <a:rPr lang="en-US" sz="5400" b="1" spc="48" dirty="0">
                 <a:solidFill>
                   <a:srgbClr val="FFFFFF"/>
                 </a:solidFill>
@@ -3285,12 +3292,12 @@
       </p:sp>
       <p:sp>
         <p:nvSpPr>
-          <p:cNvPr name="TextBox 7" id="7"/>
-          <p:cNvSpPr txBox="true"/>
+          <p:cNvPr id="7" name="TextBox 7"/>
+          <p:cNvSpPr txBox="1"/>
           <p:nvPr/>
         </p:nvSpPr>
         <p:spPr>
-          <a:xfrm rot="0">
+          <a:xfrm>
             <a:off x="17259300" y="9210675"/>
             <a:ext cx="152400" cy="200025"/>
           </a:xfrm>
@@ -3299,7 +3306,7 @@
           </a:prstGeom>
         </p:spPr>
         <p:txBody>
-          <a:bodyPr anchor="t" rtlCol="false" tIns="0" lIns="0" bIns="0" rIns="0" wrap="none">
+          <a:bodyPr wrap="none" lIns="0" tIns="0" rIns="0" bIns="0" rtlCol="0" anchor="t">
             <a:spAutoFit/>
           </a:bodyPr>
           <a:lstStyle/>
@@ -3329,9 +3336,9 @@
       </p:sp>
       <p:graphicFrame>
         <p:nvGraphicFramePr>
-          <p:cNvPr name="Table 8" id="8"/>
+          <p:cNvPr id="8" name="Table 8"/>
           <p:cNvGraphicFramePr>
-            <a:graphicFrameLocks noGrp="true"/>
+            <a:graphicFrameLocks noGrp="1"/>
           </p:cNvGraphicFramePr>
           <p:nvPr/>
         </p:nvGraphicFramePr>
@@ -3344,13 +3351,25 @@
             <a:tbl>
               <a:tblPr/>
               <a:tblGrid>
-                <a:gridCol w="3116637"/>
-                <a:gridCol w="3105503"/>
+                <a:gridCol w="3116637">
+                  <a:extLst>
+                    <a:ext uri="{9D8B030D-6E8A-4147-A177-3AD203B41FA5}">
+                      <a16:colId xmlns:a16="http://schemas.microsoft.com/office/drawing/2014/main" val="20000"/>
+                    </a:ext>
+                  </a:extLst>
+                </a:gridCol>
+                <a:gridCol w="3105503">
+                  <a:extLst>
+                    <a:ext uri="{9D8B030D-6E8A-4147-A177-3AD203B41FA5}">
+                      <a16:colId xmlns:a16="http://schemas.microsoft.com/office/drawing/2014/main" val="20001"/>
+                    </a:ext>
+                  </a:extLst>
+                </a:gridCol>
               </a:tblGrid>
               <a:tr h="866775">
                 <a:tc>
                   <a:txBody>
-                    <a:bodyPr anchor="t" rtlCol="false"/>
+                    <a:bodyPr/>
                     <a:lstStyle/>
                     <a:p>
                       <a:pPr algn="ctr">
@@ -3360,7 +3379,7 @@
                         <a:defRPr/>
                       </a:pPr>
                       <a:r>
-                        <a:rPr lang="en-US" b="true" sz="2100">
+                        <a:rPr lang="en-US" sz="2100" b="1">
                           <a:solidFill>
                             <a:srgbClr val="F2F1EE"/>
                           </a:solidFill>
@@ -3375,7 +3394,7 @@
                     </a:p>
                   </a:txBody>
                   <a:tcPr marL="190500" marR="190500" marT="190500" marB="190500" anchor="ctr">
-                    <a:lnL cmpd="sng" algn="ctr" cap="flat" w="38100">
+                    <a:lnL w="38100" cap="flat" cmpd="sng" algn="ctr">
                       <a:solidFill>
                         <a:srgbClr val="FFFFFF"/>
                       </a:solidFill>
@@ -3384,7 +3403,7 @@
                       <a:headEnd type="none" w="med" len="med"/>
                       <a:tailEnd type="none" w="med" len="med"/>
                     </a:lnL>
-                    <a:lnR cmpd="sng" algn="ctr" cap="flat" w="38100">
+                    <a:lnR w="38100" cap="flat" cmpd="sng" algn="ctr">
                       <a:solidFill>
                         <a:srgbClr val="FFFFFF"/>
                       </a:solidFill>
@@ -3393,7 +3412,7 @@
                       <a:headEnd type="none" w="med" len="med"/>
                       <a:tailEnd type="none" w="med" len="med"/>
                     </a:lnR>
-                    <a:lnT cmpd="sng" algn="ctr" cap="flat" w="38100">
+                    <a:lnT w="38100" cap="flat" cmpd="sng" algn="ctr">
                       <a:solidFill>
                         <a:srgbClr val="FFFFFF"/>
                       </a:solidFill>
@@ -3402,7 +3421,7 @@
                       <a:headEnd type="none" w="med" len="med"/>
                       <a:tailEnd type="none" w="med" len="med"/>
                     </a:lnT>
-                    <a:lnB cmpd="sng" algn="ctr" cap="flat" w="38100">
+                    <a:lnB w="38100" cap="flat" cmpd="sng" algn="ctr">
                       <a:solidFill>
                         <a:srgbClr val="FFFFFF"/>
                       </a:solidFill>
@@ -3415,7 +3434,7 @@
                 </a:tc>
                 <a:tc>
                   <a:txBody>
-                    <a:bodyPr anchor="t" rtlCol="false"/>
+                    <a:bodyPr/>
                     <a:lstStyle/>
                     <a:p>
                       <a:pPr algn="ctr">
@@ -3425,7 +3444,7 @@
                         <a:defRPr/>
                       </a:pPr>
                       <a:r>
-                        <a:rPr lang="en-US" b="true" sz="2100">
+                        <a:rPr lang="en-US" sz="2100" b="1">
                           <a:solidFill>
                             <a:srgbClr val="F2F1EE"/>
                           </a:solidFill>
@@ -3440,7 +3459,7 @@
                     </a:p>
                   </a:txBody>
                   <a:tcPr marL="190500" marR="190500" marT="190500" marB="190500" anchor="ctr">
-                    <a:lnL cmpd="sng" algn="ctr" cap="flat" w="38100">
+                    <a:lnL w="38100" cap="flat" cmpd="sng" algn="ctr">
                       <a:solidFill>
                         <a:srgbClr val="FFFFFF"/>
                       </a:solidFill>
@@ -3449,7 +3468,7 @@
                       <a:headEnd type="none" w="med" len="med"/>
                       <a:tailEnd type="none" w="med" len="med"/>
                     </a:lnL>
-                    <a:lnR cmpd="sng" algn="ctr" cap="flat" w="38100">
+                    <a:lnR w="38100" cap="flat" cmpd="sng" algn="ctr">
                       <a:solidFill>
                         <a:srgbClr val="FFFFFF"/>
                       </a:solidFill>
@@ -3458,7 +3477,7 @@
                       <a:headEnd type="none" w="med" len="med"/>
                       <a:tailEnd type="none" w="med" len="med"/>
                     </a:lnR>
-                    <a:lnT cmpd="sng" algn="ctr" cap="flat" w="38100">
+                    <a:lnT w="38100" cap="flat" cmpd="sng" algn="ctr">
                       <a:solidFill>
                         <a:srgbClr val="FFFFFF"/>
                       </a:solidFill>
@@ -3467,7 +3486,7 @@
                       <a:headEnd type="none" w="med" len="med"/>
                       <a:tailEnd type="none" w="med" len="med"/>
                     </a:lnT>
-                    <a:lnB cmpd="sng" algn="ctr" cap="flat" w="38100">
+                    <a:lnB w="38100" cap="flat" cmpd="sng" algn="ctr">
                       <a:solidFill>
                         <a:srgbClr val="FFFFFF"/>
                       </a:solidFill>
@@ -3478,11 +3497,16 @@
                     </a:lnB>
                   </a:tcPr>
                 </a:tc>
+                <a:extLst>
+                  <a:ext uri="{0D108BD9-81ED-4DB2-BD59-A6C34878D82A}">
+                    <a16:rowId xmlns:a16="http://schemas.microsoft.com/office/drawing/2014/main" val="10000"/>
+                  </a:ext>
+                </a:extLst>
               </a:tr>
               <a:tr h="866775">
                 <a:tc>
                   <a:txBody>
-                    <a:bodyPr anchor="t" rtlCol="false"/>
+                    <a:bodyPr/>
                     <a:lstStyle/>
                     <a:p>
                       <a:pPr algn="ctr">
@@ -3492,7 +3516,7 @@
                         <a:defRPr/>
                       </a:pPr>
                       <a:r>
-                        <a:rPr lang="en-US" sz="2100" b="true">
+                        <a:rPr lang="en-US" sz="2100" b="1">
                           <a:solidFill>
                             <a:srgbClr val="F2F1EE"/>
                           </a:solidFill>
@@ -3507,7 +3531,7 @@
                     </a:p>
                   </a:txBody>
                   <a:tcPr marL="190500" marR="190500" marT="190500" marB="190500" anchor="ctr">
-                    <a:lnL cmpd="sng" algn="ctr" cap="flat" w="38100">
+                    <a:lnL w="38100" cap="flat" cmpd="sng" algn="ctr">
                       <a:solidFill>
                         <a:srgbClr val="FFFFFF"/>
                       </a:solidFill>
@@ -3516,7 +3540,7 @@
                       <a:headEnd type="none" w="med" len="med"/>
                       <a:tailEnd type="none" w="med" len="med"/>
                     </a:lnL>
-                    <a:lnR cmpd="sng" algn="ctr" cap="flat" w="38100">
+                    <a:lnR w="38100" cap="flat" cmpd="sng" algn="ctr">
                       <a:solidFill>
                         <a:srgbClr val="FFFFFF"/>
                       </a:solidFill>
@@ -3525,7 +3549,7 @@
                       <a:headEnd type="none" w="med" len="med"/>
                       <a:tailEnd type="none" w="med" len="med"/>
                     </a:lnR>
-                    <a:lnT cmpd="sng" algn="ctr" cap="flat" w="38100">
+                    <a:lnT w="38100" cap="flat" cmpd="sng" algn="ctr">
                       <a:solidFill>
                         <a:srgbClr val="FFFFFF"/>
                       </a:solidFill>
@@ -3534,7 +3558,7 @@
                       <a:headEnd type="none" w="med" len="med"/>
                       <a:tailEnd type="none" w="med" len="med"/>
                     </a:lnT>
-                    <a:lnB cmpd="sng" algn="ctr" cap="flat" w="38100">
+                    <a:lnB w="38100" cap="flat" cmpd="sng" algn="ctr">
                       <a:solidFill>
                         <a:srgbClr val="FFFFFF"/>
                       </a:solidFill>
@@ -3547,7 +3571,7 @@
                 </a:tc>
                 <a:tc>
                   <a:txBody>
-                    <a:bodyPr anchor="t" rtlCol="false"/>
+                    <a:bodyPr/>
                     <a:lstStyle/>
                     <a:p>
                       <a:pPr algn="ctr">
@@ -3557,7 +3581,7 @@
                         <a:defRPr/>
                       </a:pPr>
                       <a:r>
-                        <a:rPr lang="en-US" b="true" sz="2100">
+                        <a:rPr lang="en-US" sz="2100" b="1">
                           <a:solidFill>
                             <a:srgbClr val="F2F1EE"/>
                           </a:solidFill>
@@ -3572,7 +3596,7 @@
                     </a:p>
                   </a:txBody>
                   <a:tcPr marL="190500" marR="190500" marT="190500" marB="190500" anchor="ctr">
-                    <a:lnL cmpd="sng" algn="ctr" cap="flat" w="38100">
+                    <a:lnL w="38100" cap="flat" cmpd="sng" algn="ctr">
                       <a:solidFill>
                         <a:srgbClr val="FFFFFF"/>
                       </a:solidFill>
@@ -3581,7 +3605,7 @@
                       <a:headEnd type="none" w="med" len="med"/>
                       <a:tailEnd type="none" w="med" len="med"/>
                     </a:lnL>
-                    <a:lnR cmpd="sng" algn="ctr" cap="flat" w="38100">
+                    <a:lnR w="38100" cap="flat" cmpd="sng" algn="ctr">
                       <a:solidFill>
                         <a:srgbClr val="FFFFFF"/>
                       </a:solidFill>
@@ -3590,7 +3614,7 @@
                       <a:headEnd type="none" w="med" len="med"/>
                       <a:tailEnd type="none" w="med" len="med"/>
                     </a:lnR>
-                    <a:lnT cmpd="sng" algn="ctr" cap="flat" w="38100">
+                    <a:lnT w="38100" cap="flat" cmpd="sng" algn="ctr">
                       <a:solidFill>
                         <a:srgbClr val="FFFFFF"/>
                       </a:solidFill>
@@ -3599,7 +3623,7 @@
                       <a:headEnd type="none" w="med" len="med"/>
                       <a:tailEnd type="none" w="med" len="med"/>
                     </a:lnT>
-                    <a:lnB cmpd="sng" algn="ctr" cap="flat" w="38100">
+                    <a:lnB w="38100" cap="flat" cmpd="sng" algn="ctr">
                       <a:solidFill>
                         <a:srgbClr val="FFFFFF"/>
                       </a:solidFill>
@@ -3610,11 +3634,16 @@
                     </a:lnB>
                   </a:tcPr>
                 </a:tc>
+                <a:extLst>
+                  <a:ext uri="{0D108BD9-81ED-4DB2-BD59-A6C34878D82A}">
+                    <a16:rowId xmlns:a16="http://schemas.microsoft.com/office/drawing/2014/main" val="10001"/>
+                  </a:ext>
+                </a:extLst>
               </a:tr>
               <a:tr h="866775">
                 <a:tc>
                   <a:txBody>
-                    <a:bodyPr anchor="t" rtlCol="false"/>
+                    <a:bodyPr/>
                     <a:lstStyle/>
                     <a:p>
                       <a:pPr algn="ctr">
@@ -3624,7 +3653,7 @@
                         <a:defRPr/>
                       </a:pPr>
                       <a:r>
-                        <a:rPr lang="en-US" b="true" sz="2100">
+                        <a:rPr lang="en-US" sz="2100" b="1">
                           <a:solidFill>
                             <a:srgbClr val="F2F1EE"/>
                           </a:solidFill>
@@ -3639,7 +3668,7 @@
                     </a:p>
                   </a:txBody>
                   <a:tcPr marL="190500" marR="190500" marT="190500" marB="190500" anchor="ctr">
-                    <a:lnL cmpd="sng" algn="ctr" cap="flat" w="38100">
+                    <a:lnL w="38100" cap="flat" cmpd="sng" algn="ctr">
                       <a:solidFill>
                         <a:srgbClr val="FFFFFF"/>
                       </a:solidFill>
@@ -3648,7 +3677,7 @@
                       <a:headEnd type="none" w="med" len="med"/>
                       <a:tailEnd type="none" w="med" len="med"/>
                     </a:lnL>
-                    <a:lnR cmpd="sng" algn="ctr" cap="flat" w="38100">
+                    <a:lnR w="38100" cap="flat" cmpd="sng" algn="ctr">
                       <a:solidFill>
                         <a:srgbClr val="FFFFFF"/>
                       </a:solidFill>
@@ -3657,7 +3686,7 @@
                       <a:headEnd type="none" w="med" len="med"/>
                       <a:tailEnd type="none" w="med" len="med"/>
                     </a:lnR>
-                    <a:lnT cmpd="sng" algn="ctr" cap="flat" w="38100">
+                    <a:lnT w="38100" cap="flat" cmpd="sng" algn="ctr">
                       <a:solidFill>
                         <a:srgbClr val="FFFFFF"/>
                       </a:solidFill>
@@ -3666,7 +3695,7 @@
                       <a:headEnd type="none" w="med" len="med"/>
                       <a:tailEnd type="none" w="med" len="med"/>
                     </a:lnT>
-                    <a:lnB cmpd="sng" algn="ctr" cap="flat" w="38100">
+                    <a:lnB w="38100" cap="flat" cmpd="sng" algn="ctr">
                       <a:solidFill>
                         <a:srgbClr val="FFFFFF"/>
                       </a:solidFill>
@@ -3679,7 +3708,7 @@
                 </a:tc>
                 <a:tc>
                   <a:txBody>
-                    <a:bodyPr anchor="t" rtlCol="false"/>
+                    <a:bodyPr/>
                     <a:lstStyle/>
                     <a:p>
                       <a:pPr algn="ctr">
@@ -3689,7 +3718,7 @@
                         <a:defRPr/>
                       </a:pPr>
                       <a:r>
-                        <a:rPr lang="en-US" b="true" sz="2100">
+                        <a:rPr lang="en-US" sz="2100" b="1">
                           <a:solidFill>
                             <a:srgbClr val="F2F1EE"/>
                           </a:solidFill>
@@ -3704,7 +3733,7 @@
                     </a:p>
                   </a:txBody>
                   <a:tcPr marL="190500" marR="190500" marT="190500" marB="190500" anchor="ctr">
-                    <a:lnL cmpd="sng" algn="ctr" cap="flat" w="38100">
+                    <a:lnL w="38100" cap="flat" cmpd="sng" algn="ctr">
                       <a:solidFill>
                         <a:srgbClr val="FFFFFF"/>
                       </a:solidFill>
@@ -3713,7 +3742,7 @@
                       <a:headEnd type="none" w="med" len="med"/>
                       <a:tailEnd type="none" w="med" len="med"/>
                     </a:lnL>
-                    <a:lnR cmpd="sng" algn="ctr" cap="flat" w="38100">
+                    <a:lnR w="38100" cap="flat" cmpd="sng" algn="ctr">
                       <a:solidFill>
                         <a:srgbClr val="FFFFFF"/>
                       </a:solidFill>
@@ -3722,7 +3751,7 @@
                       <a:headEnd type="none" w="med" len="med"/>
                       <a:tailEnd type="none" w="med" len="med"/>
                     </a:lnR>
-                    <a:lnT cmpd="sng" algn="ctr" cap="flat" w="38100">
+                    <a:lnT w="38100" cap="flat" cmpd="sng" algn="ctr">
                       <a:solidFill>
                         <a:srgbClr val="FFFFFF"/>
                       </a:solidFill>
@@ -3731,7 +3760,7 @@
                       <a:headEnd type="none" w="med" len="med"/>
                       <a:tailEnd type="none" w="med" len="med"/>
                     </a:lnT>
-                    <a:lnB cmpd="sng" algn="ctr" cap="flat" w="38100">
+                    <a:lnB w="38100" cap="flat" cmpd="sng" algn="ctr">
                       <a:solidFill>
                         <a:srgbClr val="FFFFFF"/>
                       </a:solidFill>
@@ -3742,11 +3771,16 @@
                     </a:lnB>
                   </a:tcPr>
                 </a:tc>
+                <a:extLst>
+                  <a:ext uri="{0D108BD9-81ED-4DB2-BD59-A6C34878D82A}">
+                    <a16:rowId xmlns:a16="http://schemas.microsoft.com/office/drawing/2014/main" val="10002"/>
+                  </a:ext>
+                </a:extLst>
               </a:tr>
               <a:tr h="866775">
                 <a:tc>
                   <a:txBody>
-                    <a:bodyPr anchor="t" rtlCol="false"/>
+                    <a:bodyPr/>
                     <a:lstStyle/>
                     <a:p>
                       <a:pPr algn="ctr">
@@ -3756,7 +3790,7 @@
                         <a:defRPr/>
                       </a:pPr>
                       <a:r>
-                        <a:rPr lang="en-US" sz="2100" b="true">
+                        <a:rPr lang="en-US" sz="2100" b="1">
                           <a:solidFill>
                             <a:srgbClr val="F2F1EE"/>
                           </a:solidFill>
@@ -3771,7 +3805,7 @@
                     </a:p>
                   </a:txBody>
                   <a:tcPr marL="190500" marR="190500" marT="190500" marB="190500" anchor="ctr">
-                    <a:lnL cmpd="sng" algn="ctr" cap="flat" w="38100">
+                    <a:lnL w="38100" cap="flat" cmpd="sng" algn="ctr">
                       <a:solidFill>
                         <a:srgbClr val="FFFFFF"/>
                       </a:solidFill>
@@ -3780,7 +3814,7 @@
                       <a:headEnd type="none" w="med" len="med"/>
                       <a:tailEnd type="none" w="med" len="med"/>
                     </a:lnL>
-                    <a:lnR cmpd="sng" algn="ctr" cap="flat" w="38100">
+                    <a:lnR w="38100" cap="flat" cmpd="sng" algn="ctr">
                       <a:solidFill>
                         <a:srgbClr val="FFFFFF"/>
                       </a:solidFill>
@@ -3789,7 +3823,7 @@
                       <a:headEnd type="none" w="med" len="med"/>
                       <a:tailEnd type="none" w="med" len="med"/>
                     </a:lnR>
-                    <a:lnT cmpd="sng" algn="ctr" cap="flat" w="38100">
+                    <a:lnT w="38100" cap="flat" cmpd="sng" algn="ctr">
                       <a:solidFill>
                         <a:srgbClr val="FFFFFF"/>
                       </a:solidFill>
@@ -3798,7 +3832,7 @@
                       <a:headEnd type="none" w="med" len="med"/>
                       <a:tailEnd type="none" w="med" len="med"/>
                     </a:lnT>
-                    <a:lnB cmpd="sng" algn="ctr" cap="flat" w="38100">
+                    <a:lnB w="38100" cap="flat" cmpd="sng" algn="ctr">
                       <a:solidFill>
                         <a:srgbClr val="FFFFFF"/>
                       </a:solidFill>
@@ -3811,7 +3845,7 @@
                 </a:tc>
                 <a:tc>
                   <a:txBody>
-                    <a:bodyPr anchor="t" rtlCol="false"/>
+                    <a:bodyPr/>
                     <a:lstStyle/>
                     <a:p>
                       <a:pPr algn="ctr">
@@ -3821,7 +3855,7 @@
                         <a:defRPr/>
                       </a:pPr>
                       <a:r>
-                        <a:rPr lang="en-US" b="true" sz="2100">
+                        <a:rPr lang="en-US" sz="2100" b="1">
                           <a:solidFill>
                             <a:srgbClr val="F2F1EE"/>
                           </a:solidFill>
@@ -3836,7 +3870,7 @@
                     </a:p>
                   </a:txBody>
                   <a:tcPr marL="190500" marR="190500" marT="190500" marB="190500" anchor="ctr">
-                    <a:lnL cmpd="sng" algn="ctr" cap="flat" w="38100">
+                    <a:lnL w="38100" cap="flat" cmpd="sng" algn="ctr">
                       <a:solidFill>
                         <a:srgbClr val="FFFFFF"/>
                       </a:solidFill>
@@ -3845,7 +3879,7 @@
                       <a:headEnd type="none" w="med" len="med"/>
                       <a:tailEnd type="none" w="med" len="med"/>
                     </a:lnL>
-                    <a:lnR cmpd="sng" algn="ctr" cap="flat" w="38100">
+                    <a:lnR w="38100" cap="flat" cmpd="sng" algn="ctr">
                       <a:solidFill>
                         <a:srgbClr val="FFFFFF"/>
                       </a:solidFill>
@@ -3854,7 +3888,7 @@
                       <a:headEnd type="none" w="med" len="med"/>
                       <a:tailEnd type="none" w="med" len="med"/>
                     </a:lnR>
-                    <a:lnT cmpd="sng" algn="ctr" cap="flat" w="38100">
+                    <a:lnT w="38100" cap="flat" cmpd="sng" algn="ctr">
                       <a:solidFill>
                         <a:srgbClr val="FFFFFF"/>
                       </a:solidFill>
@@ -3863,7 +3897,7 @@
                       <a:headEnd type="none" w="med" len="med"/>
                       <a:tailEnd type="none" w="med" len="med"/>
                     </a:lnT>
-                    <a:lnB cmpd="sng" algn="ctr" cap="flat" w="38100">
+                    <a:lnB w="38100" cap="flat" cmpd="sng" algn="ctr">
                       <a:solidFill>
                         <a:srgbClr val="FFFFFF"/>
                       </a:solidFill>
@@ -3874,6 +3908,11 @@
                     </a:lnB>
                   </a:tcPr>
                 </a:tc>
+                <a:extLst>
+                  <a:ext uri="{0D108BD9-81ED-4DB2-BD59-A6C34878D82A}">
+                    <a16:rowId xmlns:a16="http://schemas.microsoft.com/office/drawing/2014/main" val="10003"/>
+                  </a:ext>
+                </a:extLst>
               </a:tr>
             </a:tbl>
           </a:graphicData>
@@ -3881,21 +3920,21 @@
       </p:graphicFrame>
       <p:sp>
         <p:nvSpPr>
-          <p:cNvPr name="TextBox 9" id="9"/>
-          <p:cNvSpPr txBox="true"/>
+          <p:cNvPr id="9" name="TextBox 9"/>
+          <p:cNvSpPr txBox="1"/>
           <p:nvPr/>
         </p:nvSpPr>
         <p:spPr>
-          <a:xfrm rot="0">
-            <a:off x="2812995" y="8232458"/>
-            <a:ext cx="4990148" cy="606425"/>
+          <a:xfrm>
+            <a:off x="2781206" y="8232458"/>
+            <a:ext cx="5053727" cy="606425"/>
           </a:xfrm>
           <a:prstGeom prst="rect">
             <a:avLst/>
           </a:prstGeom>
         </p:spPr>
         <p:txBody>
-          <a:bodyPr anchor="t" rtlCol="false" tIns="0" lIns="0" bIns="0" rIns="0">
+          <a:bodyPr lIns="0" tIns="0" rIns="0" bIns="0" rtlCol="0" anchor="t">
             <a:spAutoFit/>
           </a:bodyPr>
           <a:lstStyle/>
@@ -3906,7 +3945,7 @@
               </a:lnSpc>
             </a:pPr>
             <a:r>
-              <a:rPr lang="en-US" b="true" sz="3500" spc="31">
+              <a:rPr lang="en-US" sz="3500" b="1" spc="31">
                 <a:solidFill>
                   <a:srgbClr val="FFFFFF"/>
                 </a:solidFill>
@@ -3915,28 +3954,28 @@
                 <a:cs typeface="IBM Plex Sans Bold"/>
                 <a:sym typeface="IBM Plex Sans Bold"/>
               </a:rPr>
-              <a:t>Proffesor - Mehul Raval</a:t>
-            </a:r>
-          </a:p>
-        </p:txBody>
-      </p:sp>
-      <p:sp>
-        <p:nvSpPr>
-          <p:cNvPr name="TextBox 10" id="10"/>
-          <p:cNvSpPr txBox="true"/>
+              <a:t>Professor - Mehul Raval</a:t>
+            </a:r>
+          </a:p>
+        </p:txBody>
+      </p:sp>
+      <p:sp>
+        <p:nvSpPr>
+          <p:cNvPr id="10" name="TextBox 10"/>
+          <p:cNvSpPr txBox="1"/>
           <p:nvPr/>
         </p:nvSpPr>
         <p:spPr>
-          <a:xfrm rot="0">
-            <a:off x="3356337" y="8802688"/>
-            <a:ext cx="3903464" cy="606425"/>
+          <a:xfrm>
+            <a:off x="2935468" y="8741219"/>
+            <a:ext cx="4745201" cy="606425"/>
           </a:xfrm>
           <a:prstGeom prst="rect">
             <a:avLst/>
           </a:prstGeom>
         </p:spPr>
         <p:txBody>
-          <a:bodyPr anchor="t" rtlCol="false" tIns="0" lIns="0" bIns="0" rIns="0">
+          <a:bodyPr wrap="square" lIns="0" tIns="0" rIns="0" bIns="0" rtlCol="0" anchor="t">
             <a:spAutoFit/>
           </a:bodyPr>
           <a:lstStyle/>
@@ -3947,7 +3986,7 @@
               </a:lnSpc>
             </a:pPr>
             <a:r>
-              <a:rPr lang="en-US" b="true" sz="3500" spc="31">
+              <a:rPr lang="en-US" sz="3500" b="1" spc="31" dirty="0">
                 <a:solidFill>
                   <a:srgbClr val="FFFFFF"/>
                 </a:solidFill>
@@ -3969,19 +4008,26 @@
 </p:sld>
 </file>
 
-<file path=ppt/slides/slide2.xml><?xml version="1.0" encoding="utf-8"?>
-<p:sld xmlns:p="http://schemas.openxmlformats.org/presentationml/2006/main" xmlns:a="http://schemas.openxmlformats.org/drawingml/2006/main" xmlns:r="http://schemas.openxmlformats.org/officeDocument/2006/relationships">
+<file path=ppt/slides/slide10.xml><?xml version="1.0" encoding="utf-8"?>
+<p:sld xmlns:a="http://schemas.openxmlformats.org/drawingml/2006/main" xmlns:r="http://schemas.openxmlformats.org/officeDocument/2006/relationships" xmlns:p="http://schemas.openxmlformats.org/presentationml/2006/main">
   <p:cSld>
     <p:bg>
       <p:bgPr>
         <a:solidFill>
           <a:srgbClr val="F2F1EE"/>
         </a:solidFill>
+        <a:effectLst/>
       </p:bgPr>
     </p:bg>
     <p:spTree>
       <p:nvGrpSpPr>
-        <p:cNvPr id="1" name=""/>
+        <p:cNvPr id="1" name="">
+          <a:extLst>
+            <a:ext uri="{FF2B5EF4-FFF2-40B4-BE49-F238E27FC236}">
+              <a16:creationId xmlns:a16="http://schemas.microsoft.com/office/drawing/2014/main" id="{49E975C8-A41B-A90C-E988-4F766317094E}"/>
+            </a:ext>
+          </a:extLst>
+        </p:cNvPr>
         <p:cNvGrpSpPr/>
         <p:nvPr/>
       </p:nvGrpSpPr>
@@ -3995,12 +4041,18 @@
       </p:grpSpPr>
       <p:sp>
         <p:nvSpPr>
-          <p:cNvPr name="Freeform 2" id="2"/>
+          <p:cNvPr id="2" name="Freeform 2">
+            <a:extLst>
+              <a:ext uri="{FF2B5EF4-FFF2-40B4-BE49-F238E27FC236}">
+                <a16:creationId xmlns:a16="http://schemas.microsoft.com/office/drawing/2014/main" id="{2D4C134D-D744-AE33-14D4-A6DE8FE4E015}"/>
+              </a:ext>
+            </a:extLst>
+          </p:cNvPr>
           <p:cNvSpPr/>
           <p:nvPr/>
         </p:nvSpPr>
         <p:spPr>
-          <a:xfrm flipH="false" flipV="false" rot="0">
+          <a:xfrm>
             <a:off x="2310233" y="10132980"/>
             <a:ext cx="13861398" cy="154020"/>
           </a:xfrm>
@@ -4009,9 +4061,9 @@
             <a:gdLst/>
             <a:ahLst/>
             <a:cxnLst/>
-            <a:rect r="r" b="b" t="t" l="l"/>
+            <a:rect l="l" t="t" r="r" b="b"/>
             <a:pathLst>
-              <a:path h="154020" w="13861398">
+              <a:path w="13861398" h="154020">
                 <a:moveTo>
                   <a:pt x="0" y="0"/>
                 </a:moveTo>
@@ -4032,7 +4084,72 @@
             </a:pathLst>
           </a:custGeom>
           <a:blipFill>
-            <a:blip r:embed="rId2">
+            <a:blip>
+              <a:extLst>
+                <a:ext uri="{96DAC541-7B7A-43D3-8B79-37D633B846F1}">
+                  <asvg:svgBlip xmlns:asvg="http://schemas.microsoft.com/office/drawing/2016/SVG/main" r:embed="rId2"/>
+                </a:ext>
+              </a:extLst>
+            </a:blip>
+            <a:stretch>
+              <a:fillRect/>
+            </a:stretch>
+          </a:blipFill>
+        </p:spPr>
+        <p:txBody>
+          <a:bodyPr/>
+          <a:lstStyle/>
+          <a:p>
+            <a:endParaRPr lang="en-IN"/>
+          </a:p>
+        </p:txBody>
+      </p:sp>
+      <p:sp>
+        <p:nvSpPr>
+          <p:cNvPr id="3" name="Freeform 3">
+            <a:extLst>
+              <a:ext uri="{FF2B5EF4-FFF2-40B4-BE49-F238E27FC236}">
+                <a16:creationId xmlns:a16="http://schemas.microsoft.com/office/drawing/2014/main" id="{41BFB600-31E5-8647-22CA-965A1B36E40E}"/>
+              </a:ext>
+            </a:extLst>
+          </p:cNvPr>
+          <p:cNvSpPr/>
+          <p:nvPr/>
+        </p:nvSpPr>
+        <p:spPr>
+          <a:xfrm>
+            <a:off x="0" y="10132980"/>
+            <a:ext cx="3939395" cy="154020"/>
+          </a:xfrm>
+          <a:custGeom>
+            <a:avLst/>
+            <a:gdLst/>
+            <a:ahLst/>
+            <a:cxnLst/>
+            <a:rect l="l" t="t" r="r" b="b"/>
+            <a:pathLst>
+              <a:path w="3939395" h="154020">
+                <a:moveTo>
+                  <a:pt x="0" y="0"/>
+                </a:moveTo>
+                <a:lnTo>
+                  <a:pt x="3939395" y="0"/>
+                </a:lnTo>
+                <a:lnTo>
+                  <a:pt x="3939395" y="154020"/>
+                </a:lnTo>
+                <a:lnTo>
+                  <a:pt x="0" y="154020"/>
+                </a:lnTo>
+                <a:lnTo>
+                  <a:pt x="0" y="0"/>
+                </a:lnTo>
+                <a:close/>
+              </a:path>
+            </a:pathLst>
+          </a:custGeom>
+          <a:blipFill>
+            <a:blip>
               <a:extLst>
                 <a:ext uri="{96DAC541-7B7A-43D3-8B79-37D633B846F1}">
                   <asvg:svgBlip xmlns:asvg="http://schemas.microsoft.com/office/drawing/2016/SVG/main" r:embed="rId3"/>
@@ -4040,20 +4157,33 @@
               </a:extLst>
             </a:blip>
             <a:stretch>
-              <a:fillRect l="0" t="0" r="0" b="0"/>
+              <a:fillRect/>
             </a:stretch>
           </a:blipFill>
         </p:spPr>
-      </p:sp>
-      <p:sp>
-        <p:nvSpPr>
-          <p:cNvPr name="Freeform 3" id="3"/>
+        <p:txBody>
+          <a:bodyPr/>
+          <a:lstStyle/>
+          <a:p>
+            <a:endParaRPr lang="en-IN"/>
+          </a:p>
+        </p:txBody>
+      </p:sp>
+      <p:sp>
+        <p:nvSpPr>
+          <p:cNvPr id="4" name="Freeform 4">
+            <a:extLst>
+              <a:ext uri="{FF2B5EF4-FFF2-40B4-BE49-F238E27FC236}">
+                <a16:creationId xmlns:a16="http://schemas.microsoft.com/office/drawing/2014/main" id="{F35A2931-4D54-FD56-4935-0C880406D91D}"/>
+              </a:ext>
+            </a:extLst>
+          </p:cNvPr>
           <p:cNvSpPr/>
           <p:nvPr/>
         </p:nvSpPr>
         <p:spPr>
-          <a:xfrm flipH="false" flipV="false" rot="0">
-            <a:off x="0" y="10132980"/>
+          <a:xfrm>
+            <a:off x="14542469" y="10132980"/>
             <a:ext cx="3939395" cy="154020"/>
           </a:xfrm>
           <a:custGeom>
@@ -4061,9 +4191,9 @@
             <a:gdLst/>
             <a:ahLst/>
             <a:cxnLst/>
-            <a:rect r="r" b="b" t="t" l="l"/>
+            <a:rect l="l" t="t" r="r" b="b"/>
             <a:pathLst>
-              <a:path h="154020" w="3939395">
+              <a:path w="3939395" h="154020">
                 <a:moveTo>
                   <a:pt x="0" y="0"/>
                 </a:moveTo>
@@ -4084,80 +4214,41 @@
             </a:pathLst>
           </a:custGeom>
           <a:blipFill>
-            <a:blip r:embed="rId4">
+            <a:blip>
               <a:extLst>
                 <a:ext uri="{96DAC541-7B7A-43D3-8B79-37D633B846F1}">
-                  <asvg:svgBlip xmlns:asvg="http://schemas.microsoft.com/office/drawing/2016/SVG/main" r:embed="rId5"/>
+                  <asvg:svgBlip xmlns:asvg="http://schemas.microsoft.com/office/drawing/2016/SVG/main" r:embed="rId4"/>
                 </a:ext>
               </a:extLst>
             </a:blip>
             <a:stretch>
-              <a:fillRect l="0" t="0" r="0" b="0"/>
+              <a:fillRect/>
             </a:stretch>
           </a:blipFill>
         </p:spPr>
-      </p:sp>
-      <p:sp>
-        <p:nvSpPr>
-          <p:cNvPr name="Freeform 4" id="4"/>
-          <p:cNvSpPr/>
-          <p:nvPr/>
-        </p:nvSpPr>
-        <p:spPr>
-          <a:xfrm flipH="false" flipV="false" rot="0">
-            <a:off x="14542469" y="10132980"/>
-            <a:ext cx="3939395" cy="154020"/>
-          </a:xfrm>
-          <a:custGeom>
-            <a:avLst/>
-            <a:gdLst/>
-            <a:ahLst/>
-            <a:cxnLst/>
-            <a:rect r="r" b="b" t="t" l="l"/>
-            <a:pathLst>
-              <a:path h="154020" w="3939395">
-                <a:moveTo>
-                  <a:pt x="0" y="0"/>
-                </a:moveTo>
-                <a:lnTo>
-                  <a:pt x="3939395" y="0"/>
-                </a:lnTo>
-                <a:lnTo>
-                  <a:pt x="3939395" y="154020"/>
-                </a:lnTo>
-                <a:lnTo>
-                  <a:pt x="0" y="154020"/>
-                </a:lnTo>
-                <a:lnTo>
-                  <a:pt x="0" y="0"/>
-                </a:lnTo>
-                <a:close/>
-              </a:path>
-            </a:pathLst>
-          </a:custGeom>
-          <a:blipFill>
-            <a:blip r:embed="rId4">
-              <a:extLst>
-                <a:ext uri="{96DAC541-7B7A-43D3-8B79-37D633B846F1}">
-                  <asvg:svgBlip xmlns:asvg="http://schemas.microsoft.com/office/drawing/2016/SVG/main" r:embed="rId6"/>
-                </a:ext>
-              </a:extLst>
-            </a:blip>
-            <a:stretch>
-              <a:fillRect l="0" t="0" r="0" b="0"/>
-            </a:stretch>
-          </a:blipFill>
-        </p:spPr>
+        <p:txBody>
+          <a:bodyPr/>
+          <a:lstStyle/>
+          <a:p>
+            <a:endParaRPr lang="en-IN"/>
+          </a:p>
+        </p:txBody>
       </p:sp>
       <p:grpSp>
         <p:nvGrpSpPr>
-          <p:cNvPr name="Group 5" id="5"/>
+          <p:cNvPr id="5" name="Group 5">
+            <a:extLst>
+              <a:ext uri="{FF2B5EF4-FFF2-40B4-BE49-F238E27FC236}">
+                <a16:creationId xmlns:a16="http://schemas.microsoft.com/office/drawing/2014/main" id="{FCEFE199-D3D6-4004-5AB3-BC687D3BB994}"/>
+              </a:ext>
+            </a:extLst>
+          </p:cNvPr>
           <p:cNvGrpSpPr/>
           <p:nvPr/>
         </p:nvGrpSpPr>
         <p:grpSpPr>
-          <a:xfrm rot="0">
-            <a:off x="0" y="10132980"/>
+          <a:xfrm>
+            <a:off x="-96933" y="10132980"/>
             <a:ext cx="18481864" cy="154020"/>
             <a:chOff x="0" y="0"/>
             <a:chExt cx="16256000" cy="135471"/>
@@ -4165,12 +4256,18 @@
         </p:grpSpPr>
         <p:sp>
           <p:nvSpPr>
-            <p:cNvPr name="Freeform 6" id="6"/>
+            <p:cNvPr id="6" name="Freeform 6">
+              <a:extLst>
+                <a:ext uri="{FF2B5EF4-FFF2-40B4-BE49-F238E27FC236}">
+                  <a16:creationId xmlns:a16="http://schemas.microsoft.com/office/drawing/2014/main" id="{34A8B48E-CC9C-A74B-4534-BAB141458210}"/>
+                </a:ext>
+              </a:extLst>
+            </p:cNvPr>
             <p:cNvSpPr/>
             <p:nvPr/>
           </p:nvSpPr>
           <p:spPr>
-            <a:xfrm flipH="false" flipV="false" rot="0">
+            <a:xfrm>
               <a:off x="0" y="0"/>
               <a:ext cx="16256000" cy="135509"/>
             </a:xfrm>
@@ -4179,9 +4276,9 @@
               <a:gdLst/>
               <a:ahLst/>
               <a:cxnLst/>
-              <a:rect r="r" b="b" t="t" l="l"/>
+              <a:rect l="l" t="t" r="r" b="b"/>
               <a:pathLst>
-                <a:path h="135509" w="16256000">
+                <a:path w="16256000" h="135509">
                   <a:moveTo>
                     <a:pt x="0" y="0"/>
                   </a:moveTo>
@@ -4202,22 +4299,35 @@
               </a:pathLst>
             </a:custGeom>
             <a:blipFill>
-              <a:blip r:embed="rId7"/>
+              <a:blip r:embed="rId5"/>
               <a:stretch>
-                <a:fillRect l="0" t="0" r="0" b="28"/>
+                <a:fillRect b="28"/>
               </a:stretch>
             </a:blipFill>
           </p:spPr>
+          <p:txBody>
+            <a:bodyPr/>
+            <a:lstStyle/>
+            <a:p>
+              <a:endParaRPr lang="en-IN"/>
+            </a:p>
+          </p:txBody>
         </p:sp>
       </p:grpSp>
       <p:sp>
         <p:nvSpPr>
-          <p:cNvPr name="Freeform 7" id="7"/>
+          <p:cNvPr id="7" name="Freeform 7">
+            <a:extLst>
+              <a:ext uri="{FF2B5EF4-FFF2-40B4-BE49-F238E27FC236}">
+                <a16:creationId xmlns:a16="http://schemas.microsoft.com/office/drawing/2014/main" id="{C0BA6949-AFC3-819D-2D83-E023FEB9F89B}"/>
+              </a:ext>
+            </a:extLst>
+          </p:cNvPr>
           <p:cNvSpPr/>
           <p:nvPr/>
         </p:nvSpPr>
         <p:spPr>
-          <a:xfrm flipH="false" flipV="false" rot="0">
+          <a:xfrm>
             <a:off x="543930" y="9045394"/>
             <a:ext cx="2070431" cy="908008"/>
           </a:xfrm>
@@ -4226,9 +4336,9 @@
             <a:gdLst/>
             <a:ahLst/>
             <a:cxnLst/>
-            <a:rect r="r" b="b" t="t" l="l"/>
+            <a:rect l="l" t="t" r="r" b="b"/>
             <a:pathLst>
-              <a:path h="908008" w="2070431">
+              <a:path w="2070431" h="908008">
                 <a:moveTo>
                   <a:pt x="0" y="0"/>
                 </a:moveTo>
@@ -4249,27 +4359,40 @@
             </a:pathLst>
           </a:custGeom>
           <a:blipFill>
-            <a:blip r:embed="rId8">
+            <a:blip>
               <a:extLst>
                 <a:ext uri="{96DAC541-7B7A-43D3-8B79-37D633B846F1}">
-                  <asvg:svgBlip xmlns:asvg="http://schemas.microsoft.com/office/drawing/2016/SVG/main" r:embed="rId9"/>
+                  <asvg:svgBlip xmlns:asvg="http://schemas.microsoft.com/office/drawing/2016/SVG/main" r:embed="rId6"/>
                 </a:ext>
               </a:extLst>
             </a:blip>
             <a:stretch>
-              <a:fillRect l="0" t="0" r="0" b="0"/>
+              <a:fillRect/>
             </a:stretch>
           </a:blipFill>
         </p:spPr>
+        <p:txBody>
+          <a:bodyPr/>
+          <a:lstStyle/>
+          <a:p>
+            <a:endParaRPr lang="en-IN"/>
+          </a:p>
+        </p:txBody>
       </p:sp>
       <p:grpSp>
         <p:nvGrpSpPr>
-          <p:cNvPr name="Group 8" id="8"/>
+          <p:cNvPr id="8" name="Group 8">
+            <a:extLst>
+              <a:ext uri="{FF2B5EF4-FFF2-40B4-BE49-F238E27FC236}">
+                <a16:creationId xmlns:a16="http://schemas.microsoft.com/office/drawing/2014/main" id="{CFDACB72-17C9-3A8C-A8A3-717B843BF3B9}"/>
+              </a:ext>
+            </a:extLst>
+          </p:cNvPr>
           <p:cNvGrpSpPr/>
           <p:nvPr/>
         </p:nvGrpSpPr>
         <p:grpSpPr>
-          <a:xfrm rot="0">
+          <a:xfrm>
             <a:off x="543930" y="9045394"/>
             <a:ext cx="2070431" cy="944640"/>
             <a:chOff x="0" y="0"/>
@@ -4278,12 +4401,18 @@
         </p:grpSpPr>
         <p:sp>
           <p:nvSpPr>
-            <p:cNvPr name="Freeform 9" id="9"/>
+            <p:cNvPr id="9" name="Freeform 9">
+              <a:extLst>
+                <a:ext uri="{FF2B5EF4-FFF2-40B4-BE49-F238E27FC236}">
+                  <a16:creationId xmlns:a16="http://schemas.microsoft.com/office/drawing/2014/main" id="{FC60C4F3-A5FF-97E9-548A-1730B46C78A5}"/>
+                </a:ext>
+              </a:extLst>
+            </p:cNvPr>
             <p:cNvSpPr/>
             <p:nvPr/>
           </p:nvSpPr>
           <p:spPr>
-            <a:xfrm flipH="false" flipV="false" rot="0">
+            <a:xfrm>
               <a:off x="0" y="0"/>
               <a:ext cx="1821053" cy="830923"/>
             </a:xfrm>
@@ -4292,9 +4421,9 @@
               <a:gdLst/>
               <a:ahLst/>
               <a:cxnLst/>
-              <a:rect r="r" b="b" t="t" l="l"/>
+              <a:rect l="l" t="t" r="r" b="b"/>
               <a:pathLst>
-                <a:path h="830923" w="1821053">
+                <a:path w="1821053" h="830923">
                   <a:moveTo>
                     <a:pt x="0" y="0"/>
                   </a:moveTo>
@@ -4315,31 +4444,44 @@
               </a:pathLst>
             </a:custGeom>
             <a:blipFill>
-              <a:blip r:embed="rId10"/>
+              <a:blip r:embed="rId7"/>
               <a:stretch>
                 <a:fillRect l="-72565" t="-156165" r="-72141" b="-156511"/>
               </a:stretch>
             </a:blipFill>
           </p:spPr>
+          <p:txBody>
+            <a:bodyPr/>
+            <a:lstStyle/>
+            <a:p>
+              <a:endParaRPr lang="en-IN"/>
+            </a:p>
+          </p:txBody>
         </p:sp>
       </p:grpSp>
       <p:sp>
         <p:nvSpPr>
-          <p:cNvPr name="TextBox 10" id="10"/>
-          <p:cNvSpPr txBox="true"/>
+          <p:cNvPr id="10" name="TextBox 10">
+            <a:extLst>
+              <a:ext uri="{FF2B5EF4-FFF2-40B4-BE49-F238E27FC236}">
+                <a16:creationId xmlns:a16="http://schemas.microsoft.com/office/drawing/2014/main" id="{8C3AEBAE-1CDF-8D5F-3F2D-8BBE98E4981D}"/>
+              </a:ext>
+            </a:extLst>
+          </p:cNvPr>
+          <p:cNvSpPr txBox="1"/>
           <p:nvPr/>
         </p:nvSpPr>
         <p:spPr>
-          <a:xfrm rot="0">
-            <a:off x="17259300" y="9210675"/>
-            <a:ext cx="152400" cy="200025"/>
+          <a:xfrm>
+            <a:off x="17192832" y="9210675"/>
+            <a:ext cx="285335" cy="327718"/>
           </a:xfrm>
           <a:prstGeom prst="rect">
             <a:avLst/>
           </a:prstGeom>
         </p:spPr>
         <p:txBody>
-          <a:bodyPr anchor="t" rtlCol="false" tIns="0" lIns="0" bIns="0" rIns="0" wrap="none">
+          <a:bodyPr wrap="none" lIns="0" tIns="0" rIns="0" bIns="0" rtlCol="0" anchor="t">
             <a:spAutoFit/>
           </a:bodyPr>
           <a:lstStyle/>
@@ -4353,7 +4495,7 @@
               </a:spcBef>
             </a:pPr>
             <a:r>
-              <a:rPr lang="en-US" sz="2000">
+              <a:rPr lang="en-US" sz="2000" dirty="0">
                 <a:solidFill>
                   <a:srgbClr val="000000"/>
                 </a:solidFill>
@@ -4362,42 +4504,48 @@
                 <a:cs typeface="Arial"/>
                 <a:sym typeface="Arial"/>
               </a:rPr>
-              <a:t>2</a:t>
-            </a:r>
-          </a:p>
-        </p:txBody>
-      </p:sp>
-      <p:sp>
-        <p:nvSpPr>
-          <p:cNvPr name="TextBox 11" id="11"/>
-          <p:cNvSpPr txBox="true"/>
+              <a:t>10</a:t>
+            </a:r>
+          </a:p>
+        </p:txBody>
+      </p:sp>
+      <p:sp>
+        <p:nvSpPr>
+          <p:cNvPr id="11" name="TextBox 11">
+            <a:extLst>
+              <a:ext uri="{FF2B5EF4-FFF2-40B4-BE49-F238E27FC236}">
+                <a16:creationId xmlns:a16="http://schemas.microsoft.com/office/drawing/2014/main" id="{576DBDE0-8092-C81D-C82B-A91FF57BFF40}"/>
+              </a:ext>
+            </a:extLst>
+          </p:cNvPr>
+          <p:cNvSpPr txBox="1"/>
           <p:nvPr/>
         </p:nvSpPr>
         <p:spPr>
-          <a:xfrm rot="0">
-            <a:off x="7239179" y="885825"/>
-            <a:ext cx="3809643" cy="1057275"/>
+          <a:xfrm>
+            <a:off x="4975145" y="895350"/>
+            <a:ext cx="8337709" cy="983090"/>
           </a:xfrm>
           <a:prstGeom prst="rect">
             <a:avLst/>
           </a:prstGeom>
         </p:spPr>
         <p:txBody>
-          <a:bodyPr anchor="t" rtlCol="false" tIns="0" lIns="0" bIns="0" rIns="0">
+          <a:bodyPr lIns="0" tIns="0" rIns="0" bIns="0" rtlCol="0" anchor="t">
             <a:spAutoFit/>
           </a:bodyPr>
           <a:lstStyle/>
           <a:p>
             <a:pPr algn="ctr">
               <a:lnSpc>
-                <a:spcPts val="8400"/>
+                <a:spcPts val="8399"/>
               </a:lnSpc>
               <a:spcBef>
                 <a:spcPct val="0"/>
               </a:spcBef>
             </a:pPr>
             <a:r>
-              <a:rPr lang="en-US" b="true" sz="6000">
+              <a:rPr lang="en-US" sz="5999" b="1" dirty="0">
                 <a:solidFill>
                   <a:srgbClr val="7D1916"/>
                 </a:solidFill>
@@ -4406,100 +4554,236 @@
                 <a:cs typeface="Arial Bold"/>
                 <a:sym typeface="Arial Bold"/>
               </a:rPr>
-              <a:t>Motivation</a:t>
-            </a:r>
-          </a:p>
-        </p:txBody>
-      </p:sp>
-      <p:sp>
-        <p:nvSpPr>
-          <p:cNvPr name="TextBox 12" id="12"/>
-          <p:cNvSpPr txBox="true"/>
+              <a:t>References</a:t>
+            </a:r>
+          </a:p>
+        </p:txBody>
+      </p:sp>
+      <p:sp>
+        <p:nvSpPr>
+          <p:cNvPr id="12" name="TextBox 12">
+            <a:extLst>
+              <a:ext uri="{FF2B5EF4-FFF2-40B4-BE49-F238E27FC236}">
+                <a16:creationId xmlns:a16="http://schemas.microsoft.com/office/drawing/2014/main" id="{7FA0319C-8963-36ED-6E0D-D652F74BC1D6}"/>
+              </a:ext>
+            </a:extLst>
+          </p:cNvPr>
+          <p:cNvSpPr txBox="1"/>
           <p:nvPr/>
         </p:nvSpPr>
         <p:spPr>
-          <a:xfrm rot="0">
-            <a:off x="2623226" y="3905250"/>
-            <a:ext cx="13235412" cy="2228849"/>
+          <a:xfrm>
+            <a:off x="3122124" y="2600720"/>
+            <a:ext cx="12043750" cy="6549357"/>
           </a:xfrm>
           <a:prstGeom prst="rect">
             <a:avLst/>
           </a:prstGeom>
         </p:spPr>
         <p:txBody>
-          <a:bodyPr anchor="t" rtlCol="false" tIns="0" lIns="0" bIns="0" rIns="0">
+          <a:bodyPr lIns="0" tIns="0" rIns="0" bIns="0" rtlCol="0" anchor="t">
             <a:spAutoFit/>
           </a:bodyPr>
           <a:lstStyle/>
           <a:p>
-            <a:pPr algn="l" marL="647702" indent="-323851" lvl="1">
+            <a:pPr marL="457200" lvl="0" indent="-457200">
               <a:lnSpc>
-                <a:spcPts val="6000"/>
+                <a:spcPct val="150000"/>
               </a:lnSpc>
-              <a:buFont typeface="Arial"/>
-              <a:buChar char="•"/>
+              <a:buFont typeface="+mj-lt"/>
+              <a:buAutoNum type="arabicPeriod"/>
             </a:pPr>
             <a:r>
-              <a:rPr lang="en-US" sz="3000">
-                <a:solidFill>
-                  <a:srgbClr val="000000"/>
-                </a:solidFill>
-                <a:latin typeface="Arial"/>
-                <a:ea typeface="Arial"/>
-                <a:cs typeface="Arial"/>
-                <a:sym typeface="Arial"/>
+              <a:rPr lang="en-IN" sz="2200" dirty="0"/>
+              <a:t>M. </a:t>
+            </a:r>
+            <a:r>
+              <a:rPr lang="en-IN" sz="2200" dirty="0" err="1"/>
+              <a:t>Dawngliana</a:t>
+            </a:r>
+            <a:r>
+              <a:rPr lang="en-IN" sz="2200" dirty="0"/>
+              <a:t>, D. Deb, M. </a:t>
+            </a:r>
+            <a:r>
+              <a:rPr lang="en-IN" sz="2200" dirty="0" err="1"/>
+              <a:t>Handique</a:t>
+            </a:r>
+            <a:r>
+              <a:rPr lang="en-IN" sz="2200" dirty="0"/>
+              <a:t>, and S. Roy, "Automatic brain </a:t>
+            </a:r>
+            <a:r>
+              <a:rPr lang="en-IN" sz="2200" dirty="0" err="1"/>
+              <a:t>tumor</a:t>
+            </a:r>
+            <a:r>
+              <a:rPr lang="en-IN" sz="2200" dirty="0"/>
+              <a:t> segmentation in MRI: Hybridized multilevel thresholding and level set," in </a:t>
+            </a:r>
+            <a:r>
+              <a:rPr lang="en-IN" sz="2200" i="1" dirty="0"/>
+              <a:t>2015 International Symposium on Advanced Computing and Communication (ISACC)</a:t>
+            </a:r>
+            <a:r>
+              <a:rPr lang="en-IN" sz="2200" dirty="0"/>
+              <a:t>, </a:t>
+            </a:r>
+            <a:r>
+              <a:rPr lang="en-IN" sz="2200" dirty="0" err="1"/>
+              <a:t>Silchar</a:t>
+            </a:r>
+            <a:r>
+              <a:rPr lang="en-IN" sz="2200" dirty="0"/>
+              <a:t>, India, 2015, pp. 129–133, </a:t>
+            </a:r>
+            <a:r>
+              <a:rPr lang="en-IN" sz="2200" dirty="0" err="1"/>
+              <a:t>doi</a:t>
+            </a:r>
+            <a:r>
+              <a:rPr lang="en-IN" sz="2200" dirty="0"/>
+              <a:t>: 10.1109/ISACC.2015.7377328. </a:t>
+            </a:r>
+          </a:p>
+          <a:p>
+            <a:pPr marL="457200" lvl="0" indent="-457200">
+              <a:lnSpc>
+                <a:spcPct val="150000"/>
+              </a:lnSpc>
+              <a:buFont typeface="+mj-lt"/>
+              <a:buAutoNum type="arabicPeriod"/>
+            </a:pPr>
+            <a:r>
+              <a:rPr lang="en-IN" sz="2200" dirty="0"/>
+              <a:t>D. Murthy T.S. and G. </a:t>
+            </a:r>
+            <a:r>
+              <a:rPr lang="en-IN" sz="2200" dirty="0" err="1"/>
+              <a:t>Sadashivappa</a:t>
+            </a:r>
+            <a:r>
+              <a:rPr lang="en-IN" sz="2200" dirty="0"/>
+              <a:t>, "Brain </a:t>
+            </a:r>
+            <a:r>
+              <a:rPr lang="en-IN" sz="2200" dirty="0" err="1"/>
+              <a:t>tumor</a:t>
+            </a:r>
+            <a:r>
+              <a:rPr lang="en-IN" sz="2200" dirty="0"/>
+              <a:t> segmentation using thresholding, morphological operations and extraction of features of </a:t>
+            </a:r>
+            <a:r>
+              <a:rPr lang="en-IN" sz="2200" dirty="0" err="1"/>
+              <a:t>tumor</a:t>
+            </a:r>
+            <a:r>
+              <a:rPr lang="en-IN" sz="2200" dirty="0"/>
+              <a:t>," in </a:t>
+            </a:r>
+            <a:r>
+              <a:rPr lang="en-IN" sz="2200" i="1" dirty="0"/>
+              <a:t>2014 International Conference on Advances in Electronics, Computers and Communications (ICAECC)</a:t>
+            </a:r>
+            <a:r>
+              <a:rPr lang="en-IN" sz="2200" dirty="0"/>
+              <a:t>, Bangalore, India, 2014, pp. 1–6, </a:t>
+            </a:r>
+            <a:r>
+              <a:rPr lang="en-IN" sz="2200" dirty="0" err="1"/>
+              <a:t>doi</a:t>
+            </a:r>
+            <a:r>
+              <a:rPr lang="en-IN" sz="2200" dirty="0"/>
+              <a:t>: 10.1109/ICAECC.2014.7002429. </a:t>
+            </a:r>
+          </a:p>
+          <a:p>
+            <a:pPr marL="457200" lvl="0" indent="-457200">
+              <a:lnSpc>
+                <a:spcPct val="150000"/>
+              </a:lnSpc>
+              <a:buFont typeface="+mj-lt"/>
+              <a:buAutoNum type="arabicPeriod"/>
+            </a:pPr>
+            <a:r>
+              <a:rPr lang="en-IN" sz="2200" dirty="0"/>
+              <a:t>Md. R. Islam, Md. R. </a:t>
+            </a:r>
+            <a:r>
+              <a:rPr lang="en-IN" sz="2200" dirty="0" err="1"/>
+              <a:t>Imteaz</a:t>
+            </a:r>
+            <a:r>
+              <a:rPr lang="en-IN" sz="2200" dirty="0"/>
+              <a:t>, and Marium-E-Jannat, "Detection and analysis of brain </a:t>
+            </a:r>
+            <a:r>
+              <a:rPr lang="en-IN" sz="2200" dirty="0" err="1"/>
+              <a:t>tumor</a:t>
+            </a:r>
+            <a:r>
+              <a:rPr lang="en-IN" sz="2200" dirty="0"/>
+              <a:t> from MRI by integrated thresholding and morphological process with histogram based method," </a:t>
+            </a:r>
+            <a:r>
+              <a:rPr lang="en-IN" sz="2200" i="1" dirty="0"/>
+              <a:t>International Conference / Research Literature on Medical Image Processing</a:t>
+            </a:r>
+            <a:r>
+              <a:rPr lang="en-IN" sz="2200" dirty="0"/>
+              <a:t>, 2018. </a:t>
+            </a:r>
+          </a:p>
+          <a:p>
+            <a:pPr marL="457200" lvl="0" indent="-457200">
+              <a:lnSpc>
+                <a:spcPct val="150000"/>
+              </a:lnSpc>
+              <a:buFont typeface="+mj-lt"/>
+              <a:buAutoNum type="arabicPeriod"/>
+            </a:pPr>
+            <a:r>
+              <a:rPr lang="en-IN" sz="2200" dirty="0" err="1"/>
+              <a:t>Awsaf</a:t>
+            </a:r>
+            <a:r>
+              <a:rPr lang="en-IN" sz="2200" dirty="0"/>
+              <a:t>, "Brain </a:t>
+            </a:r>
+            <a:r>
+              <a:rPr lang="en-IN" sz="2200" dirty="0" err="1"/>
+              <a:t>Tumor</a:t>
+            </a:r>
+            <a:r>
+              <a:rPr lang="en-IN" sz="2200" dirty="0"/>
+              <a:t> Segmentation (BraTS2020) Training Data," </a:t>
+            </a:r>
+            <a:r>
+              <a:rPr lang="en-IN" sz="2200" i="1" dirty="0"/>
+              <a:t>Kaggle</a:t>
+            </a:r>
+            <a:r>
+              <a:rPr lang="en-IN" sz="2200" dirty="0"/>
+              <a:t>, 2020.  Available: </a:t>
+            </a:r>
+            <a:r>
+              <a:rPr lang="en-IN" sz="2200" dirty="0">
+                <a:hlinkClick r:id="rId8"/>
               </a:rPr>
-              <a:t>Brain Tumors are life threatening so their detection is necessary.</a:t>
-            </a:r>
-          </a:p>
-          <a:p>
-            <a:pPr algn="l" marL="647702" indent="-323851" lvl="1">
-              <a:lnSpc>
-                <a:spcPts val="6000"/>
-              </a:lnSpc>
-              <a:buFont typeface="Arial"/>
-              <a:buChar char="•"/>
-            </a:pPr>
-            <a:r>
-              <a:rPr lang="en-US" sz="3000">
-                <a:solidFill>
-                  <a:srgbClr val="000000"/>
-                </a:solidFill>
-                <a:latin typeface="Arial"/>
-                <a:ea typeface="Arial"/>
-                <a:cs typeface="Arial"/>
-                <a:sym typeface="Arial"/>
-              </a:rPr>
-              <a:t>In a volumetric sample, slice by slice contouring by a person takes time.</a:t>
-            </a:r>
-          </a:p>
-          <a:p>
-            <a:pPr algn="l" marL="647702" indent="-323851" lvl="1">
-              <a:lnSpc>
-                <a:spcPts val="6000"/>
-              </a:lnSpc>
-              <a:spcBef>
-                <a:spcPct val="0"/>
-              </a:spcBef>
-              <a:buFont typeface="Arial"/>
-              <a:buChar char="•"/>
-            </a:pPr>
-            <a:r>
-              <a:rPr lang="en-US" sz="3000">
-                <a:solidFill>
-                  <a:srgbClr val="000000"/>
-                </a:solidFill>
-                <a:latin typeface="Arial"/>
-                <a:ea typeface="Arial"/>
-                <a:cs typeface="Arial"/>
-                <a:sym typeface="Arial"/>
-              </a:rPr>
-              <a:t>Classical methods of detection are faster and efficient.</a:t>
-            </a:r>
+              <a:t>https://www.kaggle.com/datasets/awsaf49/brats2020-training-data</a:t>
+            </a:r>
+            <a:endParaRPr lang="en-IN" sz="2200" dirty="0"/>
           </a:p>
         </p:txBody>
       </p:sp>
     </p:spTree>
+    <p:extLst>
+      <p:ext uri="{BB962C8B-B14F-4D97-AF65-F5344CB8AC3E}">
+        <p14:creationId xmlns:p14="http://schemas.microsoft.com/office/powerpoint/2010/main" val="510816056"/>
+      </p:ext>
+    </p:extLst>
   </p:cSld>
   <p:clrMapOvr>
     <a:masterClrMapping/>
@@ -4507,14 +4791,15 @@
 </p:sld>
 </file>
 
-<file path=ppt/slides/slide3.xml><?xml version="1.0" encoding="utf-8"?>
-<p:sld xmlns:p="http://schemas.openxmlformats.org/presentationml/2006/main" xmlns:a="http://schemas.openxmlformats.org/drawingml/2006/main" xmlns:r="http://schemas.openxmlformats.org/officeDocument/2006/relationships">
+<file path=ppt/slides/slide2.xml><?xml version="1.0" encoding="utf-8"?>
+<p:sld xmlns:a="http://schemas.openxmlformats.org/drawingml/2006/main" xmlns:r="http://schemas.openxmlformats.org/officeDocument/2006/relationships" xmlns:p="http://schemas.openxmlformats.org/presentationml/2006/main">
   <p:cSld>
     <p:bg>
       <p:bgPr>
         <a:solidFill>
           <a:srgbClr val="F2F1EE"/>
         </a:solidFill>
+        <a:effectLst/>
       </p:bgPr>
     </p:bg>
     <p:spTree>
@@ -4533,12 +4818,12 @@
       </p:grpSpPr>
       <p:sp>
         <p:nvSpPr>
-          <p:cNvPr name="Freeform 2" id="2"/>
+          <p:cNvPr id="2" name="Freeform 2"/>
           <p:cNvSpPr/>
           <p:nvPr/>
         </p:nvSpPr>
         <p:spPr>
-          <a:xfrm flipH="false" flipV="false" rot="0">
+          <a:xfrm>
             <a:off x="2310233" y="10132980"/>
             <a:ext cx="13861398" cy="154020"/>
           </a:xfrm>
@@ -4547,9 +4832,9 @@
             <a:gdLst/>
             <a:ahLst/>
             <a:cxnLst/>
-            <a:rect r="r" b="b" t="t" l="l"/>
+            <a:rect l="l" t="t" r="r" b="b"/>
             <a:pathLst>
-              <a:path h="154020" w="13861398">
+              <a:path w="13861398" h="154020">
                 <a:moveTo>
                   <a:pt x="0" y="0"/>
                 </a:moveTo>
@@ -4570,7 +4855,66 @@
             </a:pathLst>
           </a:custGeom>
           <a:blipFill>
-            <a:blip r:embed="rId2">
+            <a:blip>
+              <a:extLst>
+                <a:ext uri="{96DAC541-7B7A-43D3-8B79-37D633B846F1}">
+                  <asvg:svgBlip xmlns:asvg="http://schemas.microsoft.com/office/drawing/2016/SVG/main" r:embed="rId2"/>
+                </a:ext>
+              </a:extLst>
+            </a:blip>
+            <a:stretch>
+              <a:fillRect/>
+            </a:stretch>
+          </a:blipFill>
+        </p:spPr>
+        <p:txBody>
+          <a:bodyPr/>
+          <a:lstStyle/>
+          <a:p>
+            <a:endParaRPr lang="en-IN"/>
+          </a:p>
+        </p:txBody>
+      </p:sp>
+      <p:sp>
+        <p:nvSpPr>
+          <p:cNvPr id="3" name="Freeform 3"/>
+          <p:cNvSpPr/>
+          <p:nvPr/>
+        </p:nvSpPr>
+        <p:spPr>
+          <a:xfrm>
+            <a:off x="0" y="10132980"/>
+            <a:ext cx="3939395" cy="154020"/>
+          </a:xfrm>
+          <a:custGeom>
+            <a:avLst/>
+            <a:gdLst/>
+            <a:ahLst/>
+            <a:cxnLst/>
+            <a:rect l="l" t="t" r="r" b="b"/>
+            <a:pathLst>
+              <a:path w="3939395" h="154020">
+                <a:moveTo>
+                  <a:pt x="0" y="0"/>
+                </a:moveTo>
+                <a:lnTo>
+                  <a:pt x="3939395" y="0"/>
+                </a:lnTo>
+                <a:lnTo>
+                  <a:pt x="3939395" y="154020"/>
+                </a:lnTo>
+                <a:lnTo>
+                  <a:pt x="0" y="154020"/>
+                </a:lnTo>
+                <a:lnTo>
+                  <a:pt x="0" y="0"/>
+                </a:lnTo>
+                <a:close/>
+              </a:path>
+            </a:pathLst>
+          </a:custGeom>
+          <a:blipFill>
+            <a:blip>
               <a:extLst>
                 <a:ext uri="{96DAC541-7B7A-43D3-8B79-37D633B846F1}">
                   <asvg:svgBlip xmlns:asvg="http://schemas.microsoft.com/office/drawing/2016/SVG/main" r:embed="rId3"/>
@@ -4578,20 +4922,27 @@
               </a:extLst>
             </a:blip>
             <a:stretch>
-              <a:fillRect l="0" t="0" r="0" b="0"/>
+              <a:fillRect/>
             </a:stretch>
           </a:blipFill>
         </p:spPr>
-      </p:sp>
-      <p:sp>
-        <p:nvSpPr>
-          <p:cNvPr name="Freeform 3" id="3"/>
+        <p:txBody>
+          <a:bodyPr/>
+          <a:lstStyle/>
+          <a:p>
+            <a:endParaRPr lang="en-IN"/>
+          </a:p>
+        </p:txBody>
+      </p:sp>
+      <p:sp>
+        <p:nvSpPr>
+          <p:cNvPr id="4" name="Freeform 4"/>
           <p:cNvSpPr/>
           <p:nvPr/>
         </p:nvSpPr>
         <p:spPr>
-          <a:xfrm flipH="false" flipV="false" rot="0">
-            <a:off x="0" y="10132980"/>
+          <a:xfrm>
+            <a:off x="14542469" y="10132980"/>
             <a:ext cx="3939395" cy="154020"/>
           </a:xfrm>
           <a:custGeom>
@@ -4599,9 +4950,9 @@
             <a:gdLst/>
             <a:ahLst/>
             <a:cxnLst/>
-            <a:rect r="r" b="b" t="t" l="l"/>
+            <a:rect l="l" t="t" r="r" b="b"/>
             <a:pathLst>
-              <a:path h="154020" w="3939395">
+              <a:path w="3939395" h="154020">
                 <a:moveTo>
                   <a:pt x="0" y="0"/>
                 </a:moveTo>
@@ -4622,79 +4973,34 @@
             </a:pathLst>
           </a:custGeom>
           <a:blipFill>
-            <a:blip r:embed="rId4">
+            <a:blip>
               <a:extLst>
                 <a:ext uri="{96DAC541-7B7A-43D3-8B79-37D633B846F1}">
-                  <asvg:svgBlip xmlns:asvg="http://schemas.microsoft.com/office/drawing/2016/SVG/main" r:embed="rId5"/>
+                  <asvg:svgBlip xmlns:asvg="http://schemas.microsoft.com/office/drawing/2016/SVG/main" r:embed="rId4"/>
                 </a:ext>
               </a:extLst>
             </a:blip>
             <a:stretch>
-              <a:fillRect l="0" t="0" r="0" b="0"/>
+              <a:fillRect/>
             </a:stretch>
           </a:blipFill>
         </p:spPr>
-      </p:sp>
-      <p:sp>
-        <p:nvSpPr>
-          <p:cNvPr name="Freeform 4" id="4"/>
-          <p:cNvSpPr/>
-          <p:nvPr/>
-        </p:nvSpPr>
-        <p:spPr>
-          <a:xfrm flipH="false" flipV="false" rot="0">
-            <a:off x="14542469" y="10132980"/>
-            <a:ext cx="3939395" cy="154020"/>
-          </a:xfrm>
-          <a:custGeom>
-            <a:avLst/>
-            <a:gdLst/>
-            <a:ahLst/>
-            <a:cxnLst/>
-            <a:rect r="r" b="b" t="t" l="l"/>
-            <a:pathLst>
-              <a:path h="154020" w="3939395">
-                <a:moveTo>
-                  <a:pt x="0" y="0"/>
-                </a:moveTo>
-                <a:lnTo>
-                  <a:pt x="3939395" y="0"/>
-                </a:lnTo>
-                <a:lnTo>
-                  <a:pt x="3939395" y="154020"/>
-                </a:lnTo>
-                <a:lnTo>
-                  <a:pt x="0" y="154020"/>
-                </a:lnTo>
-                <a:lnTo>
-                  <a:pt x="0" y="0"/>
-                </a:lnTo>
-                <a:close/>
-              </a:path>
-            </a:pathLst>
-          </a:custGeom>
-          <a:blipFill>
-            <a:blip r:embed="rId4">
-              <a:extLst>
-                <a:ext uri="{96DAC541-7B7A-43D3-8B79-37D633B846F1}">
-                  <asvg:svgBlip xmlns:asvg="http://schemas.microsoft.com/office/drawing/2016/SVG/main" r:embed="rId6"/>
-                </a:ext>
-              </a:extLst>
-            </a:blip>
-            <a:stretch>
-              <a:fillRect l="0" t="0" r="0" b="0"/>
-            </a:stretch>
-          </a:blipFill>
-        </p:spPr>
+        <p:txBody>
+          <a:bodyPr/>
+          <a:lstStyle/>
+          <a:p>
+            <a:endParaRPr lang="en-IN"/>
+          </a:p>
+        </p:txBody>
       </p:sp>
       <p:grpSp>
         <p:nvGrpSpPr>
-          <p:cNvPr name="Group 5" id="5"/>
+          <p:cNvPr id="5" name="Group 5"/>
           <p:cNvGrpSpPr/>
           <p:nvPr/>
         </p:nvGrpSpPr>
         <p:grpSpPr>
-          <a:xfrm rot="0">
+          <a:xfrm>
             <a:off x="0" y="10132980"/>
             <a:ext cx="18481864" cy="154020"/>
             <a:chOff x="0" y="0"/>
@@ -4703,12 +5009,12 @@
         </p:grpSpPr>
         <p:sp>
           <p:nvSpPr>
-            <p:cNvPr name="Freeform 6" id="6"/>
+            <p:cNvPr id="6" name="Freeform 6"/>
             <p:cNvSpPr/>
             <p:nvPr/>
           </p:nvSpPr>
           <p:spPr>
-            <a:xfrm flipH="false" flipV="false" rot="0">
+            <a:xfrm>
               <a:off x="0" y="0"/>
               <a:ext cx="16256000" cy="135509"/>
             </a:xfrm>
@@ -4717,9 +5023,9 @@
               <a:gdLst/>
               <a:ahLst/>
               <a:cxnLst/>
-              <a:rect r="r" b="b" t="t" l="l"/>
+              <a:rect l="l" t="t" r="r" b="b"/>
               <a:pathLst>
-                <a:path h="135509" w="16256000">
+                <a:path w="16256000" h="135509">
                   <a:moveTo>
                     <a:pt x="0" y="0"/>
                   </a:moveTo>
@@ -4740,22 +5046,29 @@
               </a:pathLst>
             </a:custGeom>
             <a:blipFill>
-              <a:blip r:embed="rId7"/>
+              <a:blip r:embed="rId5"/>
               <a:stretch>
-                <a:fillRect l="0" t="0" r="0" b="28"/>
+                <a:fillRect b="28"/>
               </a:stretch>
             </a:blipFill>
           </p:spPr>
+          <p:txBody>
+            <a:bodyPr/>
+            <a:lstStyle/>
+            <a:p>
+              <a:endParaRPr lang="en-IN"/>
+            </a:p>
+          </p:txBody>
         </p:sp>
       </p:grpSp>
       <p:sp>
         <p:nvSpPr>
-          <p:cNvPr name="Freeform 7" id="7"/>
+          <p:cNvPr id="7" name="Freeform 7"/>
           <p:cNvSpPr/>
           <p:nvPr/>
         </p:nvSpPr>
         <p:spPr>
-          <a:xfrm flipH="false" flipV="false" rot="0">
+          <a:xfrm>
             <a:off x="543930" y="9045394"/>
             <a:ext cx="2070431" cy="908008"/>
           </a:xfrm>
@@ -4764,9 +5077,9 @@
             <a:gdLst/>
             <a:ahLst/>
             <a:cxnLst/>
-            <a:rect r="r" b="b" t="t" l="l"/>
+            <a:rect l="l" t="t" r="r" b="b"/>
             <a:pathLst>
-              <a:path h="908008" w="2070431">
+              <a:path w="2070431" h="908008">
                 <a:moveTo>
                   <a:pt x="0" y="0"/>
                 </a:moveTo>
@@ -4787,27 +5100,34 @@
             </a:pathLst>
           </a:custGeom>
           <a:blipFill>
-            <a:blip r:embed="rId8">
+            <a:blip>
               <a:extLst>
                 <a:ext uri="{96DAC541-7B7A-43D3-8B79-37D633B846F1}">
-                  <asvg:svgBlip xmlns:asvg="http://schemas.microsoft.com/office/drawing/2016/SVG/main" r:embed="rId9"/>
+                  <asvg:svgBlip xmlns:asvg="http://schemas.microsoft.com/office/drawing/2016/SVG/main" r:embed="rId6"/>
                 </a:ext>
               </a:extLst>
             </a:blip>
             <a:stretch>
-              <a:fillRect l="0" t="0" r="0" b="0"/>
+              <a:fillRect/>
             </a:stretch>
           </a:blipFill>
         </p:spPr>
+        <p:txBody>
+          <a:bodyPr/>
+          <a:lstStyle/>
+          <a:p>
+            <a:endParaRPr lang="en-IN"/>
+          </a:p>
+        </p:txBody>
       </p:sp>
       <p:grpSp>
         <p:nvGrpSpPr>
-          <p:cNvPr name="Group 8" id="8"/>
+          <p:cNvPr id="8" name="Group 8"/>
           <p:cNvGrpSpPr/>
           <p:nvPr/>
         </p:nvGrpSpPr>
         <p:grpSpPr>
-          <a:xfrm rot="0">
+          <a:xfrm>
             <a:off x="543930" y="9045394"/>
             <a:ext cx="2070431" cy="944640"/>
             <a:chOff x="0" y="0"/>
@@ -4816,12 +5136,12 @@
         </p:grpSpPr>
         <p:sp>
           <p:nvSpPr>
-            <p:cNvPr name="Freeform 9" id="9"/>
+            <p:cNvPr id="9" name="Freeform 9"/>
             <p:cNvSpPr/>
             <p:nvPr/>
           </p:nvSpPr>
           <p:spPr>
-            <a:xfrm flipH="false" flipV="false" rot="0">
+            <a:xfrm>
               <a:off x="0" y="0"/>
               <a:ext cx="1821053" cy="830923"/>
             </a:xfrm>
@@ -4830,9 +5150,9 @@
               <a:gdLst/>
               <a:ahLst/>
               <a:cxnLst/>
-              <a:rect r="r" b="b" t="t" l="l"/>
+              <a:rect l="l" t="t" r="r" b="b"/>
               <a:pathLst>
-                <a:path h="830923" w="1821053">
+                <a:path w="1821053" h="830923">
                   <a:moveTo>
                     <a:pt x="0" y="0"/>
                   </a:moveTo>
@@ -4853,22 +5173,29 @@
               </a:pathLst>
             </a:custGeom>
             <a:blipFill>
-              <a:blip r:embed="rId10"/>
+              <a:blip r:embed="rId7"/>
               <a:stretch>
                 <a:fillRect l="-72565" t="-156165" r="-72141" b="-156511"/>
               </a:stretch>
             </a:blipFill>
           </p:spPr>
+          <p:txBody>
+            <a:bodyPr/>
+            <a:lstStyle/>
+            <a:p>
+              <a:endParaRPr lang="en-IN"/>
+            </a:p>
+          </p:txBody>
         </p:sp>
       </p:grpSp>
       <p:sp>
         <p:nvSpPr>
-          <p:cNvPr name="TextBox 10" id="10"/>
-          <p:cNvSpPr txBox="true"/>
+          <p:cNvPr id="10" name="TextBox 10"/>
+          <p:cNvSpPr txBox="1"/>
           <p:nvPr/>
         </p:nvSpPr>
         <p:spPr>
-          <a:xfrm rot="0">
+          <a:xfrm>
             <a:off x="17259300" y="9210675"/>
             <a:ext cx="152400" cy="200025"/>
           </a:xfrm>
@@ -4877,7 +5204,7 @@
           </a:prstGeom>
         </p:spPr>
         <p:txBody>
-          <a:bodyPr anchor="t" rtlCol="false" tIns="0" lIns="0" bIns="0" rIns="0" wrap="none">
+          <a:bodyPr wrap="none" lIns="0" tIns="0" rIns="0" bIns="0" rtlCol="0" anchor="t">
             <a:spAutoFit/>
           </a:bodyPr>
           <a:lstStyle/>
@@ -4900,42 +5227,42 @@
                 <a:cs typeface="Arial"/>
                 <a:sym typeface="Arial"/>
               </a:rPr>
-              <a:t>3</a:t>
-            </a:r>
-          </a:p>
-        </p:txBody>
-      </p:sp>
-      <p:sp>
-        <p:nvSpPr>
-          <p:cNvPr name="TextBox 11" id="11"/>
-          <p:cNvSpPr txBox="true"/>
+              <a:t>2</a:t>
+            </a:r>
+          </a:p>
+        </p:txBody>
+      </p:sp>
+      <p:sp>
+        <p:nvSpPr>
+          <p:cNvPr id="11" name="TextBox 11"/>
+          <p:cNvSpPr txBox="1"/>
           <p:nvPr/>
         </p:nvSpPr>
         <p:spPr>
-          <a:xfrm rot="0">
-            <a:off x="5757565" y="895350"/>
-            <a:ext cx="6772870" cy="1038225"/>
+          <a:xfrm>
+            <a:off x="7239179" y="885825"/>
+            <a:ext cx="3809643" cy="1057275"/>
           </a:xfrm>
           <a:prstGeom prst="rect">
             <a:avLst/>
           </a:prstGeom>
         </p:spPr>
         <p:txBody>
-          <a:bodyPr anchor="t" rtlCol="false" tIns="0" lIns="0" bIns="0" rIns="0">
+          <a:bodyPr lIns="0" tIns="0" rIns="0" bIns="0" rtlCol="0" anchor="t">
             <a:spAutoFit/>
           </a:bodyPr>
           <a:lstStyle/>
           <a:p>
             <a:pPr algn="ctr">
               <a:lnSpc>
-                <a:spcPts val="8399"/>
+                <a:spcPts val="8400"/>
               </a:lnSpc>
               <a:spcBef>
                 <a:spcPct val="0"/>
               </a:spcBef>
             </a:pPr>
             <a:r>
-              <a:rPr lang="en-US" b="true" sz="5999">
+              <a:rPr lang="en-US" sz="6000" b="1">
                 <a:solidFill>
                   <a:srgbClr val="7D1916"/>
                 </a:solidFill>
@@ -4944,33 +5271,33 @@
                 <a:cs typeface="Arial Bold"/>
                 <a:sym typeface="Arial Bold"/>
               </a:rPr>
-              <a:t>Problem Definition</a:t>
-            </a:r>
-          </a:p>
-        </p:txBody>
-      </p:sp>
-      <p:sp>
-        <p:nvSpPr>
-          <p:cNvPr name="TextBox 12" id="12"/>
-          <p:cNvSpPr txBox="true"/>
+              <a:t>Motivation</a:t>
+            </a:r>
+          </a:p>
+        </p:txBody>
+      </p:sp>
+      <p:sp>
+        <p:nvSpPr>
+          <p:cNvPr id="12" name="TextBox 12"/>
+          <p:cNvSpPr txBox="1"/>
           <p:nvPr/>
         </p:nvSpPr>
         <p:spPr>
-          <a:xfrm rot="0">
-            <a:off x="2654591" y="3524251"/>
-            <a:ext cx="12978817" cy="2990848"/>
+          <a:xfrm>
+            <a:off x="2623226" y="3905250"/>
+            <a:ext cx="13235412" cy="2228849"/>
           </a:xfrm>
           <a:prstGeom prst="rect">
             <a:avLst/>
           </a:prstGeom>
         </p:spPr>
         <p:txBody>
-          <a:bodyPr anchor="t" rtlCol="false" tIns="0" lIns="0" bIns="0" rIns="0">
+          <a:bodyPr lIns="0" tIns="0" rIns="0" bIns="0" rtlCol="0" anchor="t">
             <a:spAutoFit/>
           </a:bodyPr>
           <a:lstStyle/>
           <a:p>
-            <a:pPr algn="l" marL="647703" indent="-323852" lvl="1">
+            <a:pPr marL="647702" lvl="1" indent="-323851" algn="l">
               <a:lnSpc>
                 <a:spcPts val="6000"/>
               </a:lnSpc>
@@ -4987,11 +5314,11 @@
                 <a:cs typeface="Arial"/>
                 <a:sym typeface="Arial"/>
               </a:rPr>
-              <a:t>Segment the Whole Tumor (WT) from MRI data.</a:t>
-            </a:r>
-          </a:p>
-          <a:p>
-            <a:pPr algn="l" marL="647703" indent="-323852" lvl="1">
+              <a:t>Brain Tumors are life threatening so their detection is necessary.</a:t>
+            </a:r>
+          </a:p>
+          <a:p>
+            <a:pPr marL="647702" lvl="1" indent="-323851" algn="l">
               <a:lnSpc>
                 <a:spcPts val="6000"/>
               </a:lnSpc>
@@ -5008,32 +5335,11 @@
                 <a:cs typeface="Arial"/>
                 <a:sym typeface="Arial"/>
               </a:rPr>
-              <a:t>Use classical image processing techniques instead of ML/DL.</a:t>
-            </a:r>
-          </a:p>
-          <a:p>
-            <a:pPr algn="l" marL="647703" indent="-323852" lvl="1">
-              <a:lnSpc>
-                <a:spcPts val="6000"/>
-              </a:lnSpc>
-              <a:buFont typeface="Arial"/>
-              <a:buChar char="•"/>
-            </a:pPr>
-            <a:r>
-              <a:rPr lang="en-US" sz="3000">
-                <a:solidFill>
-                  <a:srgbClr val="000000"/>
-                </a:solidFill>
-                <a:latin typeface="Arial"/>
-                <a:ea typeface="Arial"/>
-                <a:cs typeface="Arial"/>
-                <a:sym typeface="Arial"/>
-              </a:rPr>
-              <a:t>Create a binary mask of the tumor.</a:t>
-            </a:r>
-          </a:p>
-          <a:p>
-            <a:pPr algn="l" marL="647703" indent="-323852" lvl="1">
+              <a:t>In a volumetric sample, slice by slice contouring by a person takes time.</a:t>
+            </a:r>
+          </a:p>
+          <a:p>
+            <a:pPr marL="647702" lvl="1" indent="-323851" algn="l">
               <a:lnSpc>
                 <a:spcPts val="6000"/>
               </a:lnSpc>
@@ -5053,7 +5359,7 @@
                 <a:cs typeface="Arial"/>
                 <a:sym typeface="Arial"/>
               </a:rPr>
-              <a:t>Compare the predicted masks with ground truth masks from BraTS2020.</a:t>
+              <a:t>Classical methods of detection are faster and efficient.</a:t>
             </a:r>
           </a:p>
         </p:txBody>
@@ -5066,14 +5372,15 @@
 </p:sld>
 </file>
 
-<file path=ppt/slides/slide4.xml><?xml version="1.0" encoding="utf-8"?>
-<p:sld xmlns:p="http://schemas.openxmlformats.org/presentationml/2006/main" xmlns:a="http://schemas.openxmlformats.org/drawingml/2006/main" xmlns:r="http://schemas.openxmlformats.org/officeDocument/2006/relationships">
+<file path=ppt/slides/slide3.xml><?xml version="1.0" encoding="utf-8"?>
+<p:sld xmlns:a="http://schemas.openxmlformats.org/drawingml/2006/main" xmlns:r="http://schemas.openxmlformats.org/officeDocument/2006/relationships" xmlns:p="http://schemas.openxmlformats.org/presentationml/2006/main">
   <p:cSld>
     <p:bg>
       <p:bgPr>
         <a:solidFill>
           <a:srgbClr val="F2F1EE"/>
         </a:solidFill>
+        <a:effectLst/>
       </p:bgPr>
     </p:bg>
     <p:spTree>
@@ -5092,12 +5399,12 @@
       </p:grpSpPr>
       <p:sp>
         <p:nvSpPr>
-          <p:cNvPr name="Freeform 2" id="2"/>
+          <p:cNvPr id="2" name="Freeform 2"/>
           <p:cNvSpPr/>
           <p:nvPr/>
         </p:nvSpPr>
         <p:spPr>
-          <a:xfrm flipH="false" flipV="false" rot="0">
+          <a:xfrm>
             <a:off x="2310233" y="10132980"/>
             <a:ext cx="13861398" cy="154020"/>
           </a:xfrm>
@@ -5106,9 +5413,9 @@
             <a:gdLst/>
             <a:ahLst/>
             <a:cxnLst/>
-            <a:rect r="r" b="b" t="t" l="l"/>
+            <a:rect l="l" t="t" r="r" b="b"/>
             <a:pathLst>
-              <a:path h="154020" w="13861398">
+              <a:path w="13861398" h="154020">
                 <a:moveTo>
                   <a:pt x="0" y="0"/>
                 </a:moveTo>
@@ -5129,7 +5436,66 @@
             </a:pathLst>
           </a:custGeom>
           <a:blipFill>
-            <a:blip r:embed="rId2">
+            <a:blip>
+              <a:extLst>
+                <a:ext uri="{96DAC541-7B7A-43D3-8B79-37D633B846F1}">
+                  <asvg:svgBlip xmlns:asvg="http://schemas.microsoft.com/office/drawing/2016/SVG/main" r:embed="rId2"/>
+                </a:ext>
+              </a:extLst>
+            </a:blip>
+            <a:stretch>
+              <a:fillRect/>
+            </a:stretch>
+          </a:blipFill>
+        </p:spPr>
+        <p:txBody>
+          <a:bodyPr/>
+          <a:lstStyle/>
+          <a:p>
+            <a:endParaRPr lang="en-IN"/>
+          </a:p>
+        </p:txBody>
+      </p:sp>
+      <p:sp>
+        <p:nvSpPr>
+          <p:cNvPr id="3" name="Freeform 3"/>
+          <p:cNvSpPr/>
+          <p:nvPr/>
+        </p:nvSpPr>
+        <p:spPr>
+          <a:xfrm>
+            <a:off x="0" y="10132980"/>
+            <a:ext cx="3939395" cy="154020"/>
+          </a:xfrm>
+          <a:custGeom>
+            <a:avLst/>
+            <a:gdLst/>
+            <a:ahLst/>
+            <a:cxnLst/>
+            <a:rect l="l" t="t" r="r" b="b"/>
+            <a:pathLst>
+              <a:path w="3939395" h="154020">
+                <a:moveTo>
+                  <a:pt x="0" y="0"/>
+                </a:moveTo>
+                <a:lnTo>
+                  <a:pt x="3939395" y="0"/>
+                </a:lnTo>
+                <a:lnTo>
+                  <a:pt x="3939395" y="154020"/>
+                </a:lnTo>
+                <a:lnTo>
+                  <a:pt x="0" y="154020"/>
+                </a:lnTo>
+                <a:lnTo>
+                  <a:pt x="0" y="0"/>
+                </a:lnTo>
+                <a:close/>
+              </a:path>
+            </a:pathLst>
+          </a:custGeom>
+          <a:blipFill>
+            <a:blip>
               <a:extLst>
                 <a:ext uri="{96DAC541-7B7A-43D3-8B79-37D633B846F1}">
                   <asvg:svgBlip xmlns:asvg="http://schemas.microsoft.com/office/drawing/2016/SVG/main" r:embed="rId3"/>
@@ -5137,20 +5503,27 @@
               </a:extLst>
             </a:blip>
             <a:stretch>
-              <a:fillRect l="0" t="0" r="0" b="0"/>
+              <a:fillRect/>
             </a:stretch>
           </a:blipFill>
         </p:spPr>
-      </p:sp>
-      <p:sp>
-        <p:nvSpPr>
-          <p:cNvPr name="Freeform 3" id="3"/>
+        <p:txBody>
+          <a:bodyPr/>
+          <a:lstStyle/>
+          <a:p>
+            <a:endParaRPr lang="en-IN"/>
+          </a:p>
+        </p:txBody>
+      </p:sp>
+      <p:sp>
+        <p:nvSpPr>
+          <p:cNvPr id="4" name="Freeform 4"/>
           <p:cNvSpPr/>
           <p:nvPr/>
         </p:nvSpPr>
         <p:spPr>
-          <a:xfrm flipH="false" flipV="false" rot="0">
-            <a:off x="0" y="10132980"/>
+          <a:xfrm>
+            <a:off x="14542469" y="10132980"/>
             <a:ext cx="3939395" cy="154020"/>
           </a:xfrm>
           <a:custGeom>
@@ -5158,9 +5531,9 @@
             <a:gdLst/>
             <a:ahLst/>
             <a:cxnLst/>
-            <a:rect r="r" b="b" t="t" l="l"/>
+            <a:rect l="l" t="t" r="r" b="b"/>
             <a:pathLst>
-              <a:path h="154020" w="3939395">
+              <a:path w="3939395" h="154020">
                 <a:moveTo>
                   <a:pt x="0" y="0"/>
                 </a:moveTo>
@@ -5181,79 +5554,34 @@
             </a:pathLst>
           </a:custGeom>
           <a:blipFill>
-            <a:blip r:embed="rId4">
+            <a:blip>
               <a:extLst>
                 <a:ext uri="{96DAC541-7B7A-43D3-8B79-37D633B846F1}">
-                  <asvg:svgBlip xmlns:asvg="http://schemas.microsoft.com/office/drawing/2016/SVG/main" r:embed="rId5"/>
+                  <asvg:svgBlip xmlns:asvg="http://schemas.microsoft.com/office/drawing/2016/SVG/main" r:embed="rId4"/>
                 </a:ext>
               </a:extLst>
             </a:blip>
             <a:stretch>
-              <a:fillRect l="0" t="0" r="0" b="0"/>
+              <a:fillRect/>
             </a:stretch>
           </a:blipFill>
         </p:spPr>
-      </p:sp>
-      <p:sp>
-        <p:nvSpPr>
-          <p:cNvPr name="Freeform 4" id="4"/>
-          <p:cNvSpPr/>
-          <p:nvPr/>
-        </p:nvSpPr>
-        <p:spPr>
-          <a:xfrm flipH="false" flipV="false" rot="0">
-            <a:off x="14542469" y="10132980"/>
-            <a:ext cx="3939395" cy="154020"/>
-          </a:xfrm>
-          <a:custGeom>
-            <a:avLst/>
-            <a:gdLst/>
-            <a:ahLst/>
-            <a:cxnLst/>
-            <a:rect r="r" b="b" t="t" l="l"/>
-            <a:pathLst>
-              <a:path h="154020" w="3939395">
-                <a:moveTo>
-                  <a:pt x="0" y="0"/>
-                </a:moveTo>
-                <a:lnTo>
-                  <a:pt x="3939395" y="0"/>
-                </a:lnTo>
-                <a:lnTo>
-                  <a:pt x="3939395" y="154020"/>
-                </a:lnTo>
-                <a:lnTo>
-                  <a:pt x="0" y="154020"/>
-                </a:lnTo>
-                <a:lnTo>
-                  <a:pt x="0" y="0"/>
-                </a:lnTo>
-                <a:close/>
-              </a:path>
-            </a:pathLst>
-          </a:custGeom>
-          <a:blipFill>
-            <a:blip r:embed="rId4">
-              <a:extLst>
-                <a:ext uri="{96DAC541-7B7A-43D3-8B79-37D633B846F1}">
-                  <asvg:svgBlip xmlns:asvg="http://schemas.microsoft.com/office/drawing/2016/SVG/main" r:embed="rId6"/>
-                </a:ext>
-              </a:extLst>
-            </a:blip>
-            <a:stretch>
-              <a:fillRect l="0" t="0" r="0" b="0"/>
-            </a:stretch>
-          </a:blipFill>
-        </p:spPr>
+        <p:txBody>
+          <a:bodyPr/>
+          <a:lstStyle/>
+          <a:p>
+            <a:endParaRPr lang="en-IN"/>
+          </a:p>
+        </p:txBody>
       </p:sp>
       <p:grpSp>
         <p:nvGrpSpPr>
-          <p:cNvPr name="Group 5" id="5"/>
+          <p:cNvPr id="5" name="Group 5"/>
           <p:cNvGrpSpPr/>
           <p:nvPr/>
         </p:nvGrpSpPr>
         <p:grpSpPr>
-          <a:xfrm rot="0">
+          <a:xfrm>
             <a:off x="0" y="10132980"/>
             <a:ext cx="18481864" cy="154020"/>
             <a:chOff x="0" y="0"/>
@@ -5262,12 +5590,12 @@
         </p:grpSpPr>
         <p:sp>
           <p:nvSpPr>
-            <p:cNvPr name="Freeform 6" id="6"/>
+            <p:cNvPr id="6" name="Freeform 6"/>
             <p:cNvSpPr/>
             <p:nvPr/>
           </p:nvSpPr>
           <p:spPr>
-            <a:xfrm flipH="false" flipV="false" rot="0">
+            <a:xfrm>
               <a:off x="0" y="0"/>
               <a:ext cx="16256000" cy="135509"/>
             </a:xfrm>
@@ -5276,9 +5604,9 @@
               <a:gdLst/>
               <a:ahLst/>
               <a:cxnLst/>
-              <a:rect r="r" b="b" t="t" l="l"/>
+              <a:rect l="l" t="t" r="r" b="b"/>
               <a:pathLst>
-                <a:path h="135509" w="16256000">
+                <a:path w="16256000" h="135509">
                   <a:moveTo>
                     <a:pt x="0" y="0"/>
                   </a:moveTo>
@@ -5299,22 +5627,29 @@
               </a:pathLst>
             </a:custGeom>
             <a:blipFill>
-              <a:blip r:embed="rId7"/>
+              <a:blip r:embed="rId5"/>
               <a:stretch>
-                <a:fillRect l="0" t="0" r="0" b="28"/>
+                <a:fillRect b="28"/>
               </a:stretch>
             </a:blipFill>
           </p:spPr>
+          <p:txBody>
+            <a:bodyPr/>
+            <a:lstStyle/>
+            <a:p>
+              <a:endParaRPr lang="en-IN"/>
+            </a:p>
+          </p:txBody>
         </p:sp>
       </p:grpSp>
       <p:sp>
         <p:nvSpPr>
-          <p:cNvPr name="Freeform 7" id="7"/>
+          <p:cNvPr id="7" name="Freeform 7"/>
           <p:cNvSpPr/>
           <p:nvPr/>
         </p:nvSpPr>
         <p:spPr>
-          <a:xfrm flipH="false" flipV="false" rot="0">
+          <a:xfrm>
             <a:off x="543930" y="9045394"/>
             <a:ext cx="2070431" cy="908008"/>
           </a:xfrm>
@@ -5323,9 +5658,9 @@
             <a:gdLst/>
             <a:ahLst/>
             <a:cxnLst/>
-            <a:rect r="r" b="b" t="t" l="l"/>
+            <a:rect l="l" t="t" r="r" b="b"/>
             <a:pathLst>
-              <a:path h="908008" w="2070431">
+              <a:path w="2070431" h="908008">
                 <a:moveTo>
                   <a:pt x="0" y="0"/>
                 </a:moveTo>
@@ -5346,27 +5681,34 @@
             </a:pathLst>
           </a:custGeom>
           <a:blipFill>
-            <a:blip r:embed="rId8">
+            <a:blip>
               <a:extLst>
                 <a:ext uri="{96DAC541-7B7A-43D3-8B79-37D633B846F1}">
-                  <asvg:svgBlip xmlns:asvg="http://schemas.microsoft.com/office/drawing/2016/SVG/main" r:embed="rId9"/>
+                  <asvg:svgBlip xmlns:asvg="http://schemas.microsoft.com/office/drawing/2016/SVG/main" r:embed="rId6"/>
                 </a:ext>
               </a:extLst>
             </a:blip>
             <a:stretch>
-              <a:fillRect l="0" t="0" r="0" b="0"/>
+              <a:fillRect/>
             </a:stretch>
           </a:blipFill>
         </p:spPr>
+        <p:txBody>
+          <a:bodyPr/>
+          <a:lstStyle/>
+          <a:p>
+            <a:endParaRPr lang="en-IN"/>
+          </a:p>
+        </p:txBody>
       </p:sp>
       <p:grpSp>
         <p:nvGrpSpPr>
-          <p:cNvPr name="Group 8" id="8"/>
+          <p:cNvPr id="8" name="Group 8"/>
           <p:cNvGrpSpPr/>
           <p:nvPr/>
         </p:nvGrpSpPr>
         <p:grpSpPr>
-          <a:xfrm rot="0">
+          <a:xfrm>
             <a:off x="543930" y="9045394"/>
             <a:ext cx="2070431" cy="944640"/>
             <a:chOff x="0" y="0"/>
@@ -5375,12 +5717,12 @@
         </p:grpSpPr>
         <p:sp>
           <p:nvSpPr>
-            <p:cNvPr name="Freeform 9" id="9"/>
+            <p:cNvPr id="9" name="Freeform 9"/>
             <p:cNvSpPr/>
             <p:nvPr/>
           </p:nvSpPr>
           <p:spPr>
-            <a:xfrm flipH="false" flipV="false" rot="0">
+            <a:xfrm>
               <a:off x="0" y="0"/>
               <a:ext cx="1821053" cy="830923"/>
             </a:xfrm>
@@ -5389,9 +5731,9 @@
               <a:gdLst/>
               <a:ahLst/>
               <a:cxnLst/>
-              <a:rect r="r" b="b" t="t" l="l"/>
+              <a:rect l="l" t="t" r="r" b="b"/>
               <a:pathLst>
-                <a:path h="830923" w="1821053">
+                <a:path w="1821053" h="830923">
                   <a:moveTo>
                     <a:pt x="0" y="0"/>
                   </a:moveTo>
@@ -5412,22 +5754,29 @@
               </a:pathLst>
             </a:custGeom>
             <a:blipFill>
-              <a:blip r:embed="rId10"/>
+              <a:blip r:embed="rId7"/>
               <a:stretch>
                 <a:fillRect l="-72565" t="-156165" r="-72141" b="-156511"/>
               </a:stretch>
             </a:blipFill>
           </p:spPr>
+          <p:txBody>
+            <a:bodyPr/>
+            <a:lstStyle/>
+            <a:p>
+              <a:endParaRPr lang="en-IN"/>
+            </a:p>
+          </p:txBody>
         </p:sp>
       </p:grpSp>
       <p:sp>
         <p:nvSpPr>
-          <p:cNvPr name="TextBox 10" id="10"/>
-          <p:cNvSpPr txBox="true"/>
+          <p:cNvPr id="10" name="TextBox 10"/>
+          <p:cNvSpPr txBox="1"/>
           <p:nvPr/>
         </p:nvSpPr>
         <p:spPr>
-          <a:xfrm rot="0">
+          <a:xfrm>
             <a:off x="17259300" y="9210675"/>
             <a:ext cx="152400" cy="200025"/>
           </a:xfrm>
@@ -5436,7 +5785,7 @@
           </a:prstGeom>
         </p:spPr>
         <p:txBody>
-          <a:bodyPr anchor="t" rtlCol="false" tIns="0" lIns="0" bIns="0" rIns="0" wrap="none">
+          <a:bodyPr wrap="none" lIns="0" tIns="0" rIns="0" bIns="0" rtlCol="0" anchor="t">
             <a:spAutoFit/>
           </a:bodyPr>
           <a:lstStyle/>
@@ -5459,42 +5808,42 @@
                 <a:cs typeface="Arial"/>
                 <a:sym typeface="Arial"/>
               </a:rPr>
-              <a:t>4</a:t>
-            </a:r>
-          </a:p>
-        </p:txBody>
-      </p:sp>
-      <p:sp>
-        <p:nvSpPr>
-          <p:cNvPr name="TextBox 11" id="11"/>
-          <p:cNvSpPr txBox="true"/>
+              <a:t>3</a:t>
+            </a:r>
+          </a:p>
+        </p:txBody>
+      </p:sp>
+      <p:sp>
+        <p:nvSpPr>
+          <p:cNvPr id="11" name="TextBox 11"/>
+          <p:cNvSpPr txBox="1"/>
           <p:nvPr/>
         </p:nvSpPr>
         <p:spPr>
-          <a:xfrm rot="0">
-            <a:off x="2854122" y="885825"/>
-            <a:ext cx="12773620" cy="1057275"/>
+          <a:xfrm>
+            <a:off x="5757565" y="895350"/>
+            <a:ext cx="6772870" cy="1038225"/>
           </a:xfrm>
           <a:prstGeom prst="rect">
             <a:avLst/>
           </a:prstGeom>
         </p:spPr>
         <p:txBody>
-          <a:bodyPr anchor="t" rtlCol="false" tIns="0" lIns="0" bIns="0" rIns="0">
+          <a:bodyPr lIns="0" tIns="0" rIns="0" bIns="0" rtlCol="0" anchor="t">
             <a:spAutoFit/>
           </a:bodyPr>
           <a:lstStyle/>
           <a:p>
             <a:pPr algn="ctr">
               <a:lnSpc>
-                <a:spcPts val="8400"/>
+                <a:spcPts val="8399"/>
               </a:lnSpc>
               <a:spcBef>
                 <a:spcPct val="0"/>
               </a:spcBef>
             </a:pPr>
             <a:r>
-              <a:rPr lang="en-US" b="true" sz="6000">
+              <a:rPr lang="en-US" sz="5999" b="1">
                 <a:solidFill>
                   <a:srgbClr val="7D1916"/>
                 </a:solidFill>
@@ -5503,77 +5852,41 @@
                 <a:cs typeface="Arial Bold"/>
                 <a:sym typeface="Arial Bold"/>
               </a:rPr>
-              <a:t>Literature Review ( Existing  Work )</a:t>
-            </a:r>
-          </a:p>
-        </p:txBody>
-      </p:sp>
-      <p:sp>
-        <p:nvSpPr>
-          <p:cNvPr name="TextBox 12" id="12"/>
-          <p:cNvSpPr txBox="true"/>
+              <a:t>Problem Definition</a:t>
+            </a:r>
+          </a:p>
+        </p:txBody>
+      </p:sp>
+      <p:sp>
+        <p:nvSpPr>
+          <p:cNvPr id="12" name="TextBox 12"/>
+          <p:cNvSpPr txBox="1"/>
           <p:nvPr/>
         </p:nvSpPr>
         <p:spPr>
-          <a:xfrm rot="0">
-            <a:off x="2432300" y="3108234"/>
-            <a:ext cx="13617264" cy="4705351"/>
+          <a:xfrm>
+            <a:off x="2654591" y="3524251"/>
+            <a:ext cx="12978817" cy="3742371"/>
           </a:xfrm>
           <a:prstGeom prst="rect">
             <a:avLst/>
           </a:prstGeom>
         </p:spPr>
         <p:txBody>
-          <a:bodyPr anchor="t" rtlCol="false" tIns="0" lIns="0" bIns="0" rIns="0">
+          <a:bodyPr lIns="0" tIns="0" rIns="0" bIns="0" rtlCol="0" anchor="t">
             <a:spAutoFit/>
           </a:bodyPr>
           <a:lstStyle/>
           <a:p>
-            <a:pPr algn="l" marL="647695" indent="-323848" lvl="1">
+            <a:pPr marL="647703" lvl="1" indent="-323852" algn="l">
               <a:lnSpc>
-                <a:spcPts val="4199"/>
+                <a:spcPts val="6000"/>
               </a:lnSpc>
-              <a:spcBef>
-                <a:spcPct val="0"/>
-              </a:spcBef>
-              <a:buAutoNum type="arabicPeriod" startAt="1"/>
+              <a:buFont typeface="Arial"/>
+              <a:buChar char="•"/>
             </a:pPr>
             <a:r>
-              <a:rPr lang="en-US" b="true" sz="2999">
-                <a:solidFill>
-                  <a:srgbClr val="000000"/>
-                </a:solidFill>
-                <a:latin typeface="Arial Bold"/>
-                <a:ea typeface="Arial Bold"/>
-                <a:cs typeface="Arial Bold"/>
-                <a:sym typeface="Arial Bold"/>
-              </a:rPr>
-              <a:t> Hyb</a:t>
-            </a:r>
-            <a:r>
-              <a:rPr lang="en-US" b="true" sz="2999">
-                <a:solidFill>
-                  <a:srgbClr val="000000"/>
-                </a:solidFill>
-                <a:latin typeface="Arial Bold"/>
-                <a:ea typeface="Arial Bold"/>
-                <a:cs typeface="Arial Bold"/>
-                <a:sym typeface="Arial Bold"/>
-              </a:rPr>
-              <a:t>ridized Multilevel Thresholding + Level Set</a:t>
-            </a:r>
-          </a:p>
-          <a:p>
-            <a:pPr algn="l">
-              <a:lnSpc>
-                <a:spcPts val="4199"/>
-              </a:lnSpc>
-              <a:spcBef>
-                <a:spcPct val="0"/>
-              </a:spcBef>
-            </a:pPr>
-            <a:r>
-              <a:rPr lang="en-US" sz="2999">
+              <a:rPr lang="en-US" sz="3000" dirty="0">
                 <a:solidFill>
                   <a:srgbClr val="000000"/>
                 </a:solidFill>
@@ -5582,21 +5895,19 @@
                 <a:cs typeface="Arial"/>
                 <a:sym typeface="Arial"/>
               </a:rPr>
-              <a:t>            Dawngliana et al., 2015</a:t>
-            </a:r>
-          </a:p>
-          <a:p>
-            <a:pPr algn="l" marL="647695" indent="-323848" lvl="1">
+              <a:t>Segment the Whole Tumor (WT) from MRI data.</a:t>
+            </a:r>
+          </a:p>
+          <a:p>
+            <a:pPr marL="647703" lvl="1" indent="-323852" algn="l">
               <a:lnSpc>
-                <a:spcPts val="4199"/>
+                <a:spcPts val="6000"/>
               </a:lnSpc>
-              <a:spcBef>
-                <a:spcPct val="0"/>
-              </a:spcBef>
-              <a:buAutoNum type="arabicPeriod" startAt="1"/>
+              <a:buFont typeface="Arial"/>
+              <a:buChar char="•"/>
             </a:pPr>
             <a:r>
-              <a:rPr lang="en-US" sz="2999">
+              <a:rPr lang="en-US" sz="3000" dirty="0">
                 <a:solidFill>
                   <a:srgbClr val="000000"/>
                 </a:solidFill>
@@ -5605,10 +5916,19 @@
                 <a:cs typeface="Arial"/>
                 <a:sym typeface="Arial"/>
               </a:rPr>
-              <a:t> </a:t>
-            </a:r>
-            <a:r>
-              <a:rPr lang="en-US" sz="2999">
+              <a:t>Use classical image processing technique of Thresholding instead of ML/DL.</a:t>
+            </a:r>
+          </a:p>
+          <a:p>
+            <a:pPr marL="647703" lvl="1" indent="-323852" algn="l">
+              <a:lnSpc>
+                <a:spcPts val="6000"/>
+              </a:lnSpc>
+              <a:buFont typeface="Arial"/>
+              <a:buChar char="•"/>
+            </a:pPr>
+            <a:r>
+              <a:rPr lang="en-US" sz="3000" dirty="0">
                 <a:solidFill>
                   <a:srgbClr val="000000"/>
                 </a:solidFill>
@@ -5617,126 +5937,13 @@
                 <a:cs typeface="Arial"/>
                 <a:sym typeface="Arial"/>
               </a:rPr>
-              <a:t>T</a:t>
-            </a:r>
-            <a:r>
-              <a:rPr lang="en-US" b="true" sz="2999">
-                <a:solidFill>
-                  <a:srgbClr val="000000"/>
-                </a:solidFill>
-                <a:latin typeface="Arial Bold"/>
-                <a:ea typeface="Arial Bold"/>
-                <a:cs typeface="Arial Bold"/>
-                <a:sym typeface="Arial Bold"/>
-              </a:rPr>
-              <a:t>hresholding + Morphological Operations</a:t>
-            </a:r>
-          </a:p>
-          <a:p>
-            <a:pPr algn="l">
+              <a:t>Create a binary mask of the tumor.</a:t>
+            </a:r>
+          </a:p>
+          <a:p>
+            <a:pPr marL="647703" lvl="1" indent="-323852" algn="l">
               <a:lnSpc>
-                <a:spcPts val="4199"/>
-              </a:lnSpc>
-              <a:spcBef>
-                <a:spcPct val="0"/>
-              </a:spcBef>
-            </a:pPr>
-            <a:r>
-              <a:rPr lang="en-US" sz="2999">
-                <a:solidFill>
-                  <a:srgbClr val="000000"/>
-                </a:solidFill>
-                <a:latin typeface="Arial"/>
-                <a:ea typeface="Arial"/>
-                <a:cs typeface="Arial"/>
-                <a:sym typeface="Arial"/>
-              </a:rPr>
-              <a:t>            </a:t>
-            </a:r>
-            <a:r>
-              <a:rPr lang="en-US" sz="2999">
-                <a:solidFill>
-                  <a:srgbClr val="000000"/>
-                </a:solidFill>
-                <a:latin typeface="Arial"/>
-                <a:ea typeface="Arial"/>
-                <a:cs typeface="Arial"/>
-                <a:sym typeface="Arial"/>
-              </a:rPr>
-              <a:t>Murthy &amp; Sadashivappa, 2014</a:t>
-            </a:r>
-          </a:p>
-          <a:p>
-            <a:pPr algn="l" marL="647695" indent="-323848" lvl="1">
-              <a:lnSpc>
-                <a:spcPts val="4199"/>
-              </a:lnSpc>
-              <a:spcBef>
-                <a:spcPct val="0"/>
-              </a:spcBef>
-              <a:buAutoNum type="arabicPeriod" startAt="1"/>
-            </a:pPr>
-            <a:r>
-              <a:rPr lang="en-US" b="true" sz="2999">
-                <a:solidFill>
-                  <a:srgbClr val="000000"/>
-                </a:solidFill>
-                <a:latin typeface="Arial Bold"/>
-                <a:ea typeface="Arial Bold"/>
-                <a:cs typeface="Arial Bold"/>
-                <a:sym typeface="Arial Bold"/>
-              </a:rPr>
-              <a:t> Integrated Thresholding + Morphological Processing</a:t>
-            </a:r>
-          </a:p>
-          <a:p>
-            <a:pPr algn="l">
-              <a:lnSpc>
-                <a:spcPts val="4199"/>
-              </a:lnSpc>
-              <a:spcBef>
-                <a:spcPct val="0"/>
-              </a:spcBef>
-            </a:pPr>
-            <a:r>
-              <a:rPr lang="en-US" sz="2999">
-                <a:solidFill>
-                  <a:srgbClr val="000000"/>
-                </a:solidFill>
-                <a:latin typeface="Arial"/>
-                <a:ea typeface="Arial"/>
-                <a:cs typeface="Arial"/>
-                <a:sym typeface="Arial"/>
-              </a:rPr>
-              <a:t>            </a:t>
-            </a:r>
-            <a:r>
-              <a:rPr lang="en-US" sz="2999">
-                <a:solidFill>
-                  <a:srgbClr val="000000"/>
-                </a:solidFill>
-                <a:latin typeface="Arial"/>
-                <a:ea typeface="Arial"/>
-                <a:cs typeface="Arial"/>
-                <a:sym typeface="Arial"/>
-              </a:rPr>
-              <a:t>Islam et al., 2018</a:t>
-            </a:r>
-          </a:p>
-          <a:p>
-            <a:pPr algn="l">
-              <a:lnSpc>
-                <a:spcPts val="4199"/>
-              </a:lnSpc>
-              <a:spcBef>
-                <a:spcPct val="0"/>
-              </a:spcBef>
-            </a:pPr>
-          </a:p>
-          <a:p>
-            <a:pPr algn="l" marL="647695" indent="-323848" lvl="1">
-              <a:lnSpc>
-                <a:spcPts val="4199"/>
+                <a:spcPts val="6000"/>
               </a:lnSpc>
               <a:spcBef>
                 <a:spcPct val="0"/>
@@ -5745,7 +5952,7 @@
               <a:buChar char="•"/>
             </a:pPr>
             <a:r>
-              <a:rPr lang="en-US" sz="2999">
+              <a:rPr lang="en-US" sz="3000" dirty="0">
                 <a:solidFill>
                   <a:srgbClr val="000000"/>
                 </a:solidFill>
@@ -5754,7 +5961,7 @@
                 <a:cs typeface="Arial"/>
                 <a:sym typeface="Arial"/>
               </a:rPr>
-              <a:t>Classical approaches have been shown to be effective for tumor segmentation in previous studies. </a:t>
+              <a:t>Compare the predicted masks with ground truth masks from BraTS2020.</a:t>
             </a:r>
           </a:p>
         </p:txBody>
@@ -5767,14 +5974,15 @@
 </p:sld>
 </file>
 
-<file path=ppt/slides/slide5.xml><?xml version="1.0" encoding="utf-8"?>
-<p:sld xmlns:p="http://schemas.openxmlformats.org/presentationml/2006/main" xmlns:a="http://schemas.openxmlformats.org/drawingml/2006/main" xmlns:r="http://schemas.openxmlformats.org/officeDocument/2006/relationships">
+<file path=ppt/slides/slide4.xml><?xml version="1.0" encoding="utf-8"?>
+<p:sld xmlns:a="http://schemas.openxmlformats.org/drawingml/2006/main" xmlns:r="http://schemas.openxmlformats.org/officeDocument/2006/relationships" xmlns:p="http://schemas.openxmlformats.org/presentationml/2006/main">
   <p:cSld>
     <p:bg>
       <p:bgPr>
         <a:solidFill>
           <a:srgbClr val="F2F1EE"/>
         </a:solidFill>
+        <a:effectLst/>
       </p:bgPr>
     </p:bg>
     <p:spTree>
@@ -5793,12 +6001,12 @@
       </p:grpSpPr>
       <p:sp>
         <p:nvSpPr>
-          <p:cNvPr name="Freeform 2" id="2"/>
+          <p:cNvPr id="2" name="Freeform 2"/>
           <p:cNvSpPr/>
           <p:nvPr/>
         </p:nvSpPr>
         <p:spPr>
-          <a:xfrm flipH="false" flipV="false" rot="0">
+          <a:xfrm>
             <a:off x="2310233" y="10132980"/>
             <a:ext cx="13861398" cy="154020"/>
           </a:xfrm>
@@ -5807,9 +6015,9 @@
             <a:gdLst/>
             <a:ahLst/>
             <a:cxnLst/>
-            <a:rect r="r" b="b" t="t" l="l"/>
+            <a:rect l="l" t="t" r="r" b="b"/>
             <a:pathLst>
-              <a:path h="154020" w="13861398">
+              <a:path w="13861398" h="154020">
                 <a:moveTo>
                   <a:pt x="0" y="0"/>
                 </a:moveTo>
@@ -5830,7 +6038,66 @@
             </a:pathLst>
           </a:custGeom>
           <a:blipFill>
-            <a:blip r:embed="rId2">
+            <a:blip>
+              <a:extLst>
+                <a:ext uri="{96DAC541-7B7A-43D3-8B79-37D633B846F1}">
+                  <asvg:svgBlip xmlns:asvg="http://schemas.microsoft.com/office/drawing/2016/SVG/main" r:embed="rId2"/>
+                </a:ext>
+              </a:extLst>
+            </a:blip>
+            <a:stretch>
+              <a:fillRect/>
+            </a:stretch>
+          </a:blipFill>
+        </p:spPr>
+        <p:txBody>
+          <a:bodyPr/>
+          <a:lstStyle/>
+          <a:p>
+            <a:endParaRPr lang="en-IN"/>
+          </a:p>
+        </p:txBody>
+      </p:sp>
+      <p:sp>
+        <p:nvSpPr>
+          <p:cNvPr id="3" name="Freeform 3"/>
+          <p:cNvSpPr/>
+          <p:nvPr/>
+        </p:nvSpPr>
+        <p:spPr>
+          <a:xfrm>
+            <a:off x="0" y="10132980"/>
+            <a:ext cx="3939395" cy="154020"/>
+          </a:xfrm>
+          <a:custGeom>
+            <a:avLst/>
+            <a:gdLst/>
+            <a:ahLst/>
+            <a:cxnLst/>
+            <a:rect l="l" t="t" r="r" b="b"/>
+            <a:pathLst>
+              <a:path w="3939395" h="154020">
+                <a:moveTo>
+                  <a:pt x="0" y="0"/>
+                </a:moveTo>
+                <a:lnTo>
+                  <a:pt x="3939395" y="0"/>
+                </a:lnTo>
+                <a:lnTo>
+                  <a:pt x="3939395" y="154020"/>
+                </a:lnTo>
+                <a:lnTo>
+                  <a:pt x="0" y="154020"/>
+                </a:lnTo>
+                <a:lnTo>
+                  <a:pt x="0" y="0"/>
+                </a:lnTo>
+                <a:close/>
+              </a:path>
+            </a:pathLst>
+          </a:custGeom>
+          <a:blipFill>
+            <a:blip>
               <a:extLst>
                 <a:ext uri="{96DAC541-7B7A-43D3-8B79-37D633B846F1}">
                   <asvg:svgBlip xmlns:asvg="http://schemas.microsoft.com/office/drawing/2016/SVG/main" r:embed="rId3"/>
@@ -5838,20 +6105,27 @@
               </a:extLst>
             </a:blip>
             <a:stretch>
-              <a:fillRect l="0" t="0" r="0" b="0"/>
+              <a:fillRect/>
             </a:stretch>
           </a:blipFill>
         </p:spPr>
-      </p:sp>
-      <p:sp>
-        <p:nvSpPr>
-          <p:cNvPr name="Freeform 3" id="3"/>
+        <p:txBody>
+          <a:bodyPr/>
+          <a:lstStyle/>
+          <a:p>
+            <a:endParaRPr lang="en-IN"/>
+          </a:p>
+        </p:txBody>
+      </p:sp>
+      <p:sp>
+        <p:nvSpPr>
+          <p:cNvPr id="4" name="Freeform 4"/>
           <p:cNvSpPr/>
           <p:nvPr/>
         </p:nvSpPr>
         <p:spPr>
-          <a:xfrm flipH="false" flipV="false" rot="0">
-            <a:off x="0" y="10132980"/>
+          <a:xfrm>
+            <a:off x="14542469" y="10132980"/>
             <a:ext cx="3939395" cy="154020"/>
           </a:xfrm>
           <a:custGeom>
@@ -5859,9 +6133,9 @@
             <a:gdLst/>
             <a:ahLst/>
             <a:cxnLst/>
-            <a:rect r="r" b="b" t="t" l="l"/>
+            <a:rect l="l" t="t" r="r" b="b"/>
             <a:pathLst>
-              <a:path h="154020" w="3939395">
+              <a:path w="3939395" h="154020">
                 <a:moveTo>
                   <a:pt x="0" y="0"/>
                 </a:moveTo>
@@ -5882,79 +6156,34 @@
             </a:pathLst>
           </a:custGeom>
           <a:blipFill>
-            <a:blip r:embed="rId4">
+            <a:blip>
               <a:extLst>
                 <a:ext uri="{96DAC541-7B7A-43D3-8B79-37D633B846F1}">
-                  <asvg:svgBlip xmlns:asvg="http://schemas.microsoft.com/office/drawing/2016/SVG/main" r:embed="rId5"/>
+                  <asvg:svgBlip xmlns:asvg="http://schemas.microsoft.com/office/drawing/2016/SVG/main" r:embed="rId4"/>
                 </a:ext>
               </a:extLst>
             </a:blip>
             <a:stretch>
-              <a:fillRect l="0" t="0" r="0" b="0"/>
+              <a:fillRect/>
             </a:stretch>
           </a:blipFill>
         </p:spPr>
-      </p:sp>
-      <p:sp>
-        <p:nvSpPr>
-          <p:cNvPr name="Freeform 4" id="4"/>
-          <p:cNvSpPr/>
-          <p:nvPr/>
-        </p:nvSpPr>
-        <p:spPr>
-          <a:xfrm flipH="false" flipV="false" rot="0">
-            <a:off x="14542469" y="10132980"/>
-            <a:ext cx="3939395" cy="154020"/>
-          </a:xfrm>
-          <a:custGeom>
-            <a:avLst/>
-            <a:gdLst/>
-            <a:ahLst/>
-            <a:cxnLst/>
-            <a:rect r="r" b="b" t="t" l="l"/>
-            <a:pathLst>
-              <a:path h="154020" w="3939395">
-                <a:moveTo>
-                  <a:pt x="0" y="0"/>
-                </a:moveTo>
-                <a:lnTo>
-                  <a:pt x="3939395" y="0"/>
-                </a:lnTo>
-                <a:lnTo>
-                  <a:pt x="3939395" y="154020"/>
-                </a:lnTo>
-                <a:lnTo>
-                  <a:pt x="0" y="154020"/>
-                </a:lnTo>
-                <a:lnTo>
-                  <a:pt x="0" y="0"/>
-                </a:lnTo>
-                <a:close/>
-              </a:path>
-            </a:pathLst>
-          </a:custGeom>
-          <a:blipFill>
-            <a:blip r:embed="rId4">
-              <a:extLst>
-                <a:ext uri="{96DAC541-7B7A-43D3-8B79-37D633B846F1}">
-                  <asvg:svgBlip xmlns:asvg="http://schemas.microsoft.com/office/drawing/2016/SVG/main" r:embed="rId6"/>
-                </a:ext>
-              </a:extLst>
-            </a:blip>
-            <a:stretch>
-              <a:fillRect l="0" t="0" r="0" b="0"/>
-            </a:stretch>
-          </a:blipFill>
-        </p:spPr>
+        <p:txBody>
+          <a:bodyPr/>
+          <a:lstStyle/>
+          <a:p>
+            <a:endParaRPr lang="en-IN"/>
+          </a:p>
+        </p:txBody>
       </p:sp>
       <p:grpSp>
         <p:nvGrpSpPr>
-          <p:cNvPr name="Group 5" id="5"/>
+          <p:cNvPr id="5" name="Group 5"/>
           <p:cNvGrpSpPr/>
           <p:nvPr/>
         </p:nvGrpSpPr>
         <p:grpSpPr>
-          <a:xfrm rot="0">
+          <a:xfrm>
             <a:off x="0" y="10132980"/>
             <a:ext cx="18481864" cy="154020"/>
             <a:chOff x="0" y="0"/>
@@ -5963,12 +6192,12 @@
         </p:grpSpPr>
         <p:sp>
           <p:nvSpPr>
-            <p:cNvPr name="Freeform 6" id="6"/>
+            <p:cNvPr id="6" name="Freeform 6"/>
             <p:cNvSpPr/>
             <p:nvPr/>
           </p:nvSpPr>
           <p:spPr>
-            <a:xfrm flipH="false" flipV="false" rot="0">
+            <a:xfrm>
               <a:off x="0" y="0"/>
               <a:ext cx="16256000" cy="135509"/>
             </a:xfrm>
@@ -5977,9 +6206,9 @@
               <a:gdLst/>
               <a:ahLst/>
               <a:cxnLst/>
-              <a:rect r="r" b="b" t="t" l="l"/>
+              <a:rect l="l" t="t" r="r" b="b"/>
               <a:pathLst>
-                <a:path h="135509" w="16256000">
+                <a:path w="16256000" h="135509">
                   <a:moveTo>
                     <a:pt x="0" y="0"/>
                   </a:moveTo>
@@ -6000,22 +6229,29 @@
               </a:pathLst>
             </a:custGeom>
             <a:blipFill>
-              <a:blip r:embed="rId7"/>
+              <a:blip r:embed="rId5"/>
               <a:stretch>
-                <a:fillRect l="0" t="0" r="0" b="28"/>
+                <a:fillRect b="28"/>
               </a:stretch>
             </a:blipFill>
           </p:spPr>
+          <p:txBody>
+            <a:bodyPr/>
+            <a:lstStyle/>
+            <a:p>
+              <a:endParaRPr lang="en-IN"/>
+            </a:p>
+          </p:txBody>
         </p:sp>
       </p:grpSp>
       <p:sp>
         <p:nvSpPr>
-          <p:cNvPr name="Freeform 7" id="7"/>
+          <p:cNvPr id="7" name="Freeform 7"/>
           <p:cNvSpPr/>
           <p:nvPr/>
         </p:nvSpPr>
         <p:spPr>
-          <a:xfrm flipH="false" flipV="false" rot="0">
+          <a:xfrm>
             <a:off x="543930" y="9045394"/>
             <a:ext cx="2070431" cy="908008"/>
           </a:xfrm>
@@ -6024,9 +6260,9 @@
             <a:gdLst/>
             <a:ahLst/>
             <a:cxnLst/>
-            <a:rect r="r" b="b" t="t" l="l"/>
+            <a:rect l="l" t="t" r="r" b="b"/>
             <a:pathLst>
-              <a:path h="908008" w="2070431">
+              <a:path w="2070431" h="908008">
                 <a:moveTo>
                   <a:pt x="0" y="0"/>
                 </a:moveTo>
@@ -6047,27 +6283,34 @@
             </a:pathLst>
           </a:custGeom>
           <a:blipFill>
-            <a:blip r:embed="rId8">
+            <a:blip>
               <a:extLst>
                 <a:ext uri="{96DAC541-7B7A-43D3-8B79-37D633B846F1}">
-                  <asvg:svgBlip xmlns:asvg="http://schemas.microsoft.com/office/drawing/2016/SVG/main" r:embed="rId9"/>
+                  <asvg:svgBlip xmlns:asvg="http://schemas.microsoft.com/office/drawing/2016/SVG/main" r:embed="rId6"/>
                 </a:ext>
               </a:extLst>
             </a:blip>
             <a:stretch>
-              <a:fillRect l="0" t="0" r="0" b="0"/>
+              <a:fillRect/>
             </a:stretch>
           </a:blipFill>
         </p:spPr>
+        <p:txBody>
+          <a:bodyPr/>
+          <a:lstStyle/>
+          <a:p>
+            <a:endParaRPr lang="en-IN"/>
+          </a:p>
+        </p:txBody>
       </p:sp>
       <p:grpSp>
         <p:nvGrpSpPr>
-          <p:cNvPr name="Group 8" id="8"/>
+          <p:cNvPr id="8" name="Group 8"/>
           <p:cNvGrpSpPr/>
           <p:nvPr/>
         </p:nvGrpSpPr>
         <p:grpSpPr>
-          <a:xfrm rot="0">
+          <a:xfrm>
             <a:off x="543930" y="9045394"/>
             <a:ext cx="2070431" cy="944640"/>
             <a:chOff x="0" y="0"/>
@@ -6076,12 +6319,12 @@
         </p:grpSpPr>
         <p:sp>
           <p:nvSpPr>
-            <p:cNvPr name="Freeform 9" id="9"/>
+            <p:cNvPr id="9" name="Freeform 9"/>
             <p:cNvSpPr/>
             <p:nvPr/>
           </p:nvSpPr>
           <p:spPr>
-            <a:xfrm flipH="false" flipV="false" rot="0">
+            <a:xfrm>
               <a:off x="0" y="0"/>
               <a:ext cx="1821053" cy="830923"/>
             </a:xfrm>
@@ -6090,9 +6333,9 @@
               <a:gdLst/>
               <a:ahLst/>
               <a:cxnLst/>
-              <a:rect r="r" b="b" t="t" l="l"/>
+              <a:rect l="l" t="t" r="r" b="b"/>
               <a:pathLst>
-                <a:path h="830923" w="1821053">
+                <a:path w="1821053" h="830923">
                   <a:moveTo>
                     <a:pt x="0" y="0"/>
                   </a:moveTo>
@@ -6113,68 +6356,29 @@
               </a:pathLst>
             </a:custGeom>
             <a:blipFill>
-              <a:blip r:embed="rId10"/>
+              <a:blip r:embed="rId7"/>
               <a:stretch>
                 <a:fillRect l="-72565" t="-156165" r="-72141" b="-156511"/>
               </a:stretch>
             </a:blipFill>
           </p:spPr>
+          <p:txBody>
+            <a:bodyPr/>
+            <a:lstStyle/>
+            <a:p>
+              <a:endParaRPr lang="en-IN"/>
+            </a:p>
+          </p:txBody>
         </p:sp>
       </p:grpSp>
       <p:sp>
         <p:nvSpPr>
-          <p:cNvPr name="Freeform 10" id="10"/>
-          <p:cNvSpPr/>
+          <p:cNvPr id="10" name="TextBox 10"/>
+          <p:cNvSpPr txBox="1"/>
           <p:nvPr/>
         </p:nvSpPr>
         <p:spPr>
-          <a:xfrm flipH="false" flipV="false" rot="0">
-            <a:off x="543930" y="3096724"/>
-            <a:ext cx="17224333" cy="3520223"/>
-          </a:xfrm>
-          <a:custGeom>
-            <a:avLst/>
-            <a:gdLst/>
-            <a:ahLst/>
-            <a:cxnLst/>
-            <a:rect r="r" b="b" t="t" l="l"/>
-            <a:pathLst>
-              <a:path h="3520223" w="17224333">
-                <a:moveTo>
-                  <a:pt x="0" y="0"/>
-                </a:moveTo>
-                <a:lnTo>
-                  <a:pt x="17224333" y="0"/>
-                </a:lnTo>
-                <a:lnTo>
-                  <a:pt x="17224333" y="3520223"/>
-                </a:lnTo>
-                <a:lnTo>
-                  <a:pt x="0" y="3520223"/>
-                </a:lnTo>
-                <a:lnTo>
-                  <a:pt x="0" y="0"/>
-                </a:lnTo>
-                <a:close/>
-              </a:path>
-            </a:pathLst>
-          </a:custGeom>
-          <a:blipFill>
-            <a:blip r:embed="rId11"/>
-            <a:stretch>
-              <a:fillRect l="0" t="0" r="0" b="0"/>
-            </a:stretch>
-          </a:blipFill>
-        </p:spPr>
-      </p:sp>
-      <p:sp>
-        <p:nvSpPr>
-          <p:cNvPr name="TextBox 11" id="11"/>
-          <p:cNvSpPr txBox="true"/>
-          <p:nvPr/>
-        </p:nvSpPr>
-        <p:spPr>
-          <a:xfrm rot="0">
+          <a:xfrm>
             <a:off x="17259300" y="9210675"/>
             <a:ext cx="152400" cy="200025"/>
           </a:xfrm>
@@ -6183,7 +6387,7 @@
           </a:prstGeom>
         </p:spPr>
         <p:txBody>
-          <a:bodyPr anchor="t" rtlCol="false" tIns="0" lIns="0" bIns="0" rIns="0" wrap="none">
+          <a:bodyPr wrap="none" lIns="0" tIns="0" rIns="0" bIns="0" rtlCol="0" anchor="t">
             <a:spAutoFit/>
           </a:bodyPr>
           <a:lstStyle/>
@@ -6206,42 +6410,42 @@
                 <a:cs typeface="Arial"/>
                 <a:sym typeface="Arial"/>
               </a:rPr>
-              <a:t>5</a:t>
-            </a:r>
-          </a:p>
-        </p:txBody>
-      </p:sp>
-      <p:sp>
-        <p:nvSpPr>
-          <p:cNvPr name="TextBox 12" id="12"/>
-          <p:cNvSpPr txBox="true"/>
+              <a:t>4</a:t>
+            </a:r>
+          </a:p>
+        </p:txBody>
+      </p:sp>
+      <p:sp>
+        <p:nvSpPr>
+          <p:cNvPr id="11" name="TextBox 11"/>
+          <p:cNvSpPr txBox="1"/>
           <p:nvPr/>
         </p:nvSpPr>
         <p:spPr>
-          <a:xfrm rot="0">
-            <a:off x="4761071" y="895350"/>
-            <a:ext cx="8765857" cy="1038227"/>
+          <a:xfrm>
+            <a:off x="2485245" y="883841"/>
+            <a:ext cx="13317509" cy="983090"/>
           </a:xfrm>
           <a:prstGeom prst="rect">
             <a:avLst/>
           </a:prstGeom>
         </p:spPr>
         <p:txBody>
-          <a:bodyPr anchor="t" rtlCol="false" tIns="0" lIns="0" bIns="0" rIns="0">
+          <a:bodyPr wrap="square" lIns="0" tIns="0" rIns="0" bIns="0" rtlCol="0" anchor="t">
             <a:spAutoFit/>
           </a:bodyPr>
           <a:lstStyle/>
           <a:p>
             <a:pPr algn="ctr">
               <a:lnSpc>
-                <a:spcPts val="8399"/>
+                <a:spcPts val="8400"/>
               </a:lnSpc>
               <a:spcBef>
                 <a:spcPct val="0"/>
               </a:spcBef>
             </a:pPr>
             <a:r>
-              <a:rPr lang="en-US" b="true" sz="5999">
+              <a:rPr lang="en-US" sz="6000" b="1" dirty="0">
                 <a:solidFill>
                   <a:srgbClr val="7D1916"/>
                 </a:solidFill>
@@ -6250,41 +6454,66 @@
                 <a:cs typeface="Arial Bold"/>
                 <a:sym typeface="Arial Bold"/>
               </a:rPr>
-              <a:t>Results: Visual Analysis</a:t>
-            </a:r>
-          </a:p>
-        </p:txBody>
-      </p:sp>
-      <p:sp>
-        <p:nvSpPr>
-          <p:cNvPr name="TextBox 13" id="13"/>
-          <p:cNvSpPr txBox="true"/>
+              <a:t>Literature Review (References)</a:t>
+            </a:r>
+          </a:p>
+        </p:txBody>
+      </p:sp>
+      <p:sp>
+        <p:nvSpPr>
+          <p:cNvPr id="12" name="TextBox 12"/>
+          <p:cNvSpPr txBox="1"/>
           <p:nvPr/>
         </p:nvSpPr>
         <p:spPr>
-          <a:xfrm rot="0">
-            <a:off x="3192814" y="6816546"/>
-            <a:ext cx="12978817" cy="2990848"/>
+          <a:xfrm>
+            <a:off x="2432300" y="3108234"/>
+            <a:ext cx="13617264" cy="4800353"/>
           </a:xfrm>
           <a:prstGeom prst="rect">
             <a:avLst/>
           </a:prstGeom>
         </p:spPr>
         <p:txBody>
-          <a:bodyPr anchor="t" rtlCol="false" tIns="0" lIns="0" bIns="0" rIns="0">
+          <a:bodyPr lIns="0" tIns="0" rIns="0" bIns="0" rtlCol="0" anchor="t">
             <a:spAutoFit/>
           </a:bodyPr>
           <a:lstStyle/>
           <a:p>
-            <a:pPr algn="l" marL="647703" indent="-323852" lvl="1">
+            <a:pPr marL="781047" lvl="1" indent="-457200" algn="l">
               <a:lnSpc>
-                <a:spcPts val="6000"/>
+                <a:spcPts val="4199"/>
               </a:lnSpc>
-              <a:buFont typeface="Arial"/>
-              <a:buChar char="•"/>
+              <a:spcBef>
+                <a:spcPct val="0"/>
+              </a:spcBef>
+              <a:buFont typeface="Wingdings" panose="05000000000000000000" pitchFamily="2" charset="2"/>
+              <a:buChar char="v"/>
             </a:pPr>
             <a:r>
-              <a:rPr lang="en-US" sz="3000">
+              <a:rPr lang="en-US" sz="2999" b="1" dirty="0">
+                <a:solidFill>
+                  <a:srgbClr val="000000"/>
+                </a:solidFill>
+                <a:latin typeface="Arial Bold"/>
+                <a:ea typeface="Arial Bold"/>
+                <a:cs typeface="Arial Bold"/>
+                <a:sym typeface="Arial Bold"/>
+              </a:rPr>
+              <a:t> Hybridized Multilevel Thresholding + Level Set</a:t>
+            </a:r>
+          </a:p>
+          <a:p>
+            <a:pPr algn="l">
+              <a:lnSpc>
+                <a:spcPts val="4199"/>
+              </a:lnSpc>
+              <a:spcBef>
+                <a:spcPct val="0"/>
+              </a:spcBef>
+            </a:pPr>
+            <a:r>
+              <a:rPr lang="en-US" sz="2999" dirty="0">
                 <a:solidFill>
                   <a:srgbClr val="000000"/>
                 </a:solidFill>
@@ -6293,19 +6522,10 @@
                 <a:cs typeface="Arial"/>
                 <a:sym typeface="Arial"/>
               </a:rPr>
-              <a:t>FLAIR → Highlights Tumor Edema and suppresses CSF signals</a:t>
-            </a:r>
-          </a:p>
-          <a:p>
-            <a:pPr algn="l" marL="647703" indent="-323852" lvl="1">
-              <a:lnSpc>
-                <a:spcPts val="6000"/>
-              </a:lnSpc>
-              <a:buFont typeface="Arial"/>
-              <a:buChar char="•"/>
-            </a:pPr>
-            <a:r>
-              <a:rPr lang="en-US" sz="3000">
+              <a:t>            </a:t>
+            </a:r>
+            <a:r>
+              <a:rPr lang="en-US" sz="2999" dirty="0" err="1">
                 <a:solidFill>
                   <a:srgbClr val="000000"/>
                 </a:solidFill>
@@ -6314,13 +6534,172 @@
                 <a:cs typeface="Arial"/>
                 <a:sym typeface="Arial"/>
               </a:rPr>
-              <a:t>T2 → Free Fluid and Edema Highlighted</a:t>
-            </a:r>
-          </a:p>
-          <a:p>
-            <a:pPr algn="l" marL="647703" indent="-323852" lvl="1">
+              <a:t>Dawngliana</a:t>
+            </a:r>
+            <a:r>
+              <a:rPr lang="en-US" sz="2999" dirty="0">
+                <a:solidFill>
+                  <a:srgbClr val="000000"/>
+                </a:solidFill>
+                <a:latin typeface="Arial"/>
+                <a:ea typeface="Arial"/>
+                <a:cs typeface="Arial"/>
+                <a:sym typeface="Arial"/>
+              </a:rPr>
+              <a:t> et al., 2015</a:t>
+            </a:r>
+          </a:p>
+          <a:p>
+            <a:pPr marL="781047" lvl="1" indent="-457200" algn="l">
               <a:lnSpc>
-                <a:spcPts val="6000"/>
+                <a:spcPts val="4199"/>
+              </a:lnSpc>
+              <a:spcBef>
+                <a:spcPct val="0"/>
+              </a:spcBef>
+              <a:buFont typeface="Wingdings" panose="05000000000000000000" pitchFamily="2" charset="2"/>
+              <a:buChar char="v"/>
+            </a:pPr>
+            <a:r>
+              <a:rPr lang="en-US" sz="2999" dirty="0">
+                <a:solidFill>
+                  <a:srgbClr val="000000"/>
+                </a:solidFill>
+                <a:latin typeface="Arial"/>
+                <a:ea typeface="Arial"/>
+                <a:cs typeface="Arial"/>
+                <a:sym typeface="Arial"/>
+              </a:rPr>
+              <a:t> </a:t>
+            </a:r>
+            <a:r>
+              <a:rPr lang="en-US" sz="2999" b="1" dirty="0">
+                <a:solidFill>
+                  <a:srgbClr val="000000"/>
+                </a:solidFill>
+                <a:latin typeface="Arial Bold"/>
+                <a:ea typeface="Arial Bold"/>
+                <a:cs typeface="Arial Bold"/>
+                <a:sym typeface="Arial Bold"/>
+              </a:rPr>
+              <a:t>Thresholding + Morphological Operations</a:t>
+            </a:r>
+          </a:p>
+          <a:p>
+            <a:pPr algn="l">
+              <a:lnSpc>
+                <a:spcPts val="4199"/>
+              </a:lnSpc>
+              <a:spcBef>
+                <a:spcPct val="0"/>
+              </a:spcBef>
+            </a:pPr>
+            <a:r>
+              <a:rPr lang="en-US" sz="2999" dirty="0">
+                <a:solidFill>
+                  <a:srgbClr val="000000"/>
+                </a:solidFill>
+                <a:latin typeface="Arial"/>
+                <a:ea typeface="Arial"/>
+                <a:cs typeface="Arial"/>
+                <a:sym typeface="Arial"/>
+              </a:rPr>
+              <a:t>            Murthy &amp; </a:t>
+            </a:r>
+            <a:r>
+              <a:rPr lang="en-US" sz="2999" dirty="0" err="1">
+                <a:solidFill>
+                  <a:srgbClr val="000000"/>
+                </a:solidFill>
+                <a:latin typeface="Arial"/>
+                <a:ea typeface="Arial"/>
+                <a:cs typeface="Arial"/>
+                <a:sym typeface="Arial"/>
+              </a:rPr>
+              <a:t>Sadashivappa</a:t>
+            </a:r>
+            <a:r>
+              <a:rPr lang="en-US" sz="2999" dirty="0">
+                <a:solidFill>
+                  <a:srgbClr val="000000"/>
+                </a:solidFill>
+                <a:latin typeface="Arial"/>
+                <a:ea typeface="Arial"/>
+                <a:cs typeface="Arial"/>
+                <a:sym typeface="Arial"/>
+              </a:rPr>
+              <a:t>, 2014</a:t>
+            </a:r>
+          </a:p>
+          <a:p>
+            <a:pPr marL="781047" lvl="1" indent="-457200" algn="l">
+              <a:lnSpc>
+                <a:spcPts val="4199"/>
+              </a:lnSpc>
+              <a:spcBef>
+                <a:spcPct val="0"/>
+              </a:spcBef>
+              <a:buFont typeface="Wingdings" panose="05000000000000000000" pitchFamily="2" charset="2"/>
+              <a:buChar char="v"/>
+            </a:pPr>
+            <a:r>
+              <a:rPr lang="en-US" sz="2999" b="1" dirty="0">
+                <a:solidFill>
+                  <a:srgbClr val="000000"/>
+                </a:solidFill>
+                <a:latin typeface="Arial Bold"/>
+                <a:ea typeface="Arial Bold"/>
+                <a:cs typeface="Arial Bold"/>
+                <a:sym typeface="Arial Bold"/>
+              </a:rPr>
+              <a:t> Integrated Thresholding + Morphological Processing</a:t>
+            </a:r>
+          </a:p>
+          <a:p>
+            <a:pPr algn="l">
+              <a:lnSpc>
+                <a:spcPts val="4199"/>
+              </a:lnSpc>
+              <a:spcBef>
+                <a:spcPct val="0"/>
+              </a:spcBef>
+            </a:pPr>
+            <a:r>
+              <a:rPr lang="en-US" sz="2999" dirty="0">
+                <a:solidFill>
+                  <a:srgbClr val="000000"/>
+                </a:solidFill>
+                <a:latin typeface="Arial"/>
+                <a:ea typeface="Arial"/>
+                <a:cs typeface="Arial"/>
+                <a:sym typeface="Arial"/>
+              </a:rPr>
+              <a:t>            Islam et al., 2018</a:t>
+            </a:r>
+          </a:p>
+          <a:p>
+            <a:pPr algn="l">
+              <a:lnSpc>
+                <a:spcPts val="4199"/>
+              </a:lnSpc>
+              <a:spcBef>
+                <a:spcPct val="0"/>
+              </a:spcBef>
+            </a:pPr>
+            <a:endParaRPr lang="en-US" sz="2999" dirty="0">
+              <a:solidFill>
+                <a:srgbClr val="000000"/>
+              </a:solidFill>
+              <a:latin typeface="Arial"/>
+              <a:ea typeface="Arial"/>
+              <a:cs typeface="Arial"/>
+              <a:sym typeface="Arial"/>
+            </a:endParaRPr>
+          </a:p>
+          <a:p>
+            <a:pPr marL="647695" lvl="1" indent="-323848" algn="l">
+              <a:lnSpc>
+                <a:spcPts val="4199"/>
               </a:lnSpc>
               <a:spcBef>
                 <a:spcPct val="0"/>
@@ -6329,7 +6708,7 @@
               <a:buChar char="•"/>
             </a:pPr>
             <a:r>
-              <a:rPr lang="en-US" sz="3000">
+              <a:rPr lang="en-US" sz="2999" dirty="0">
                 <a:solidFill>
                   <a:srgbClr val="000000"/>
                 </a:solidFill>
@@ -6338,7 +6717,7 @@
                 <a:cs typeface="Arial"/>
                 <a:sym typeface="Arial"/>
               </a:rPr>
-              <a:t>T1ce → Tumor (ET) core appears bright because of Paramagnetic contrast agent (Gadolinium)</a:t>
+              <a:t>Classical approaches have been shown to be effective for tumor segmentation in previous studies. </a:t>
             </a:r>
           </a:p>
         </p:txBody>
@@ -6351,14 +6730,15 @@
 </p:sld>
 </file>
 
-<file path=ppt/slides/slide6.xml><?xml version="1.0" encoding="utf-8"?>
-<p:sld xmlns:p="http://schemas.openxmlformats.org/presentationml/2006/main" xmlns:a="http://schemas.openxmlformats.org/drawingml/2006/main" xmlns:r="http://schemas.openxmlformats.org/officeDocument/2006/relationships">
+<file path=ppt/slides/slide5.xml><?xml version="1.0" encoding="utf-8"?>
+<p:sld xmlns:a="http://schemas.openxmlformats.org/drawingml/2006/main" xmlns:r="http://schemas.openxmlformats.org/officeDocument/2006/relationships" xmlns:p="http://schemas.openxmlformats.org/presentationml/2006/main">
   <p:cSld>
     <p:bg>
       <p:bgPr>
         <a:solidFill>
           <a:srgbClr val="F2F1EE"/>
         </a:solidFill>
+        <a:effectLst/>
       </p:bgPr>
     </p:bg>
     <p:spTree>
@@ -6377,12 +6757,12 @@
       </p:grpSpPr>
       <p:sp>
         <p:nvSpPr>
-          <p:cNvPr name="Freeform 2" id="2"/>
+          <p:cNvPr id="2" name="Freeform 2"/>
           <p:cNvSpPr/>
           <p:nvPr/>
         </p:nvSpPr>
         <p:spPr>
-          <a:xfrm flipH="false" flipV="false" rot="0">
+          <a:xfrm>
             <a:off x="2310233" y="10132980"/>
             <a:ext cx="13861398" cy="154020"/>
           </a:xfrm>
@@ -6391,9 +6771,9 @@
             <a:gdLst/>
             <a:ahLst/>
             <a:cxnLst/>
-            <a:rect r="r" b="b" t="t" l="l"/>
+            <a:rect l="l" t="t" r="r" b="b"/>
             <a:pathLst>
-              <a:path h="154020" w="13861398">
+              <a:path w="13861398" h="154020">
                 <a:moveTo>
                   <a:pt x="0" y="0"/>
                 </a:moveTo>
@@ -6414,7 +6794,66 @@
             </a:pathLst>
           </a:custGeom>
           <a:blipFill>
-            <a:blip r:embed="rId2">
+            <a:blip>
+              <a:extLst>
+                <a:ext uri="{96DAC541-7B7A-43D3-8B79-37D633B846F1}">
+                  <asvg:svgBlip xmlns:asvg="http://schemas.microsoft.com/office/drawing/2016/SVG/main" r:embed="rId2"/>
+                </a:ext>
+              </a:extLst>
+            </a:blip>
+            <a:stretch>
+              <a:fillRect/>
+            </a:stretch>
+          </a:blipFill>
+        </p:spPr>
+        <p:txBody>
+          <a:bodyPr/>
+          <a:lstStyle/>
+          <a:p>
+            <a:endParaRPr lang="en-IN"/>
+          </a:p>
+        </p:txBody>
+      </p:sp>
+      <p:sp>
+        <p:nvSpPr>
+          <p:cNvPr id="3" name="Freeform 3"/>
+          <p:cNvSpPr/>
+          <p:nvPr/>
+        </p:nvSpPr>
+        <p:spPr>
+          <a:xfrm>
+            <a:off x="0" y="10132980"/>
+            <a:ext cx="3939395" cy="154020"/>
+          </a:xfrm>
+          <a:custGeom>
+            <a:avLst/>
+            <a:gdLst/>
+            <a:ahLst/>
+            <a:cxnLst/>
+            <a:rect l="l" t="t" r="r" b="b"/>
+            <a:pathLst>
+              <a:path w="3939395" h="154020">
+                <a:moveTo>
+                  <a:pt x="0" y="0"/>
+                </a:moveTo>
+                <a:lnTo>
+                  <a:pt x="3939395" y="0"/>
+                </a:lnTo>
+                <a:lnTo>
+                  <a:pt x="3939395" y="154020"/>
+                </a:lnTo>
+                <a:lnTo>
+                  <a:pt x="0" y="154020"/>
+                </a:lnTo>
+                <a:lnTo>
+                  <a:pt x="0" y="0"/>
+                </a:lnTo>
+                <a:close/>
+              </a:path>
+            </a:pathLst>
+          </a:custGeom>
+          <a:blipFill>
+            <a:blip>
               <a:extLst>
                 <a:ext uri="{96DAC541-7B7A-43D3-8B79-37D633B846F1}">
                   <asvg:svgBlip xmlns:asvg="http://schemas.microsoft.com/office/drawing/2016/SVG/main" r:embed="rId3"/>
@@ -6422,20 +6861,27 @@
               </a:extLst>
             </a:blip>
             <a:stretch>
-              <a:fillRect l="0" t="0" r="0" b="0"/>
+              <a:fillRect/>
             </a:stretch>
           </a:blipFill>
         </p:spPr>
-      </p:sp>
-      <p:sp>
-        <p:nvSpPr>
-          <p:cNvPr name="Freeform 3" id="3"/>
+        <p:txBody>
+          <a:bodyPr/>
+          <a:lstStyle/>
+          <a:p>
+            <a:endParaRPr lang="en-IN"/>
+          </a:p>
+        </p:txBody>
+      </p:sp>
+      <p:sp>
+        <p:nvSpPr>
+          <p:cNvPr id="4" name="Freeform 4"/>
           <p:cNvSpPr/>
           <p:nvPr/>
         </p:nvSpPr>
         <p:spPr>
-          <a:xfrm flipH="false" flipV="false" rot="0">
-            <a:off x="0" y="10132980"/>
+          <a:xfrm>
+            <a:off x="14542469" y="10132980"/>
             <a:ext cx="3939395" cy="154020"/>
           </a:xfrm>
           <a:custGeom>
@@ -6443,9 +6889,9 @@
             <a:gdLst/>
             <a:ahLst/>
             <a:cxnLst/>
-            <a:rect r="r" b="b" t="t" l="l"/>
+            <a:rect l="l" t="t" r="r" b="b"/>
             <a:pathLst>
-              <a:path h="154020" w="3939395">
+              <a:path w="3939395" h="154020">
                 <a:moveTo>
                   <a:pt x="0" y="0"/>
                 </a:moveTo>
@@ -6466,79 +6912,34 @@
             </a:pathLst>
           </a:custGeom>
           <a:blipFill>
-            <a:blip r:embed="rId4">
+            <a:blip>
               <a:extLst>
                 <a:ext uri="{96DAC541-7B7A-43D3-8B79-37D633B846F1}">
-                  <asvg:svgBlip xmlns:asvg="http://schemas.microsoft.com/office/drawing/2016/SVG/main" r:embed="rId5"/>
+                  <asvg:svgBlip xmlns:asvg="http://schemas.microsoft.com/office/drawing/2016/SVG/main" r:embed="rId4"/>
                 </a:ext>
               </a:extLst>
             </a:blip>
             <a:stretch>
-              <a:fillRect l="0" t="0" r="0" b="0"/>
+              <a:fillRect/>
             </a:stretch>
           </a:blipFill>
         </p:spPr>
-      </p:sp>
-      <p:sp>
-        <p:nvSpPr>
-          <p:cNvPr name="Freeform 4" id="4"/>
-          <p:cNvSpPr/>
-          <p:nvPr/>
-        </p:nvSpPr>
-        <p:spPr>
-          <a:xfrm flipH="false" flipV="false" rot="0">
-            <a:off x="14542469" y="10132980"/>
-            <a:ext cx="3939395" cy="154020"/>
-          </a:xfrm>
-          <a:custGeom>
-            <a:avLst/>
-            <a:gdLst/>
-            <a:ahLst/>
-            <a:cxnLst/>
-            <a:rect r="r" b="b" t="t" l="l"/>
-            <a:pathLst>
-              <a:path h="154020" w="3939395">
-                <a:moveTo>
-                  <a:pt x="0" y="0"/>
-                </a:moveTo>
-                <a:lnTo>
-                  <a:pt x="3939395" y="0"/>
-                </a:lnTo>
-                <a:lnTo>
-                  <a:pt x="3939395" y="154020"/>
-                </a:lnTo>
-                <a:lnTo>
-                  <a:pt x="0" y="154020"/>
-                </a:lnTo>
-                <a:lnTo>
-                  <a:pt x="0" y="0"/>
-                </a:lnTo>
-                <a:close/>
-              </a:path>
-            </a:pathLst>
-          </a:custGeom>
-          <a:blipFill>
-            <a:blip r:embed="rId4">
-              <a:extLst>
-                <a:ext uri="{96DAC541-7B7A-43D3-8B79-37D633B846F1}">
-                  <asvg:svgBlip xmlns:asvg="http://schemas.microsoft.com/office/drawing/2016/SVG/main" r:embed="rId6"/>
-                </a:ext>
-              </a:extLst>
-            </a:blip>
-            <a:stretch>
-              <a:fillRect l="0" t="0" r="0" b="0"/>
-            </a:stretch>
-          </a:blipFill>
-        </p:spPr>
+        <p:txBody>
+          <a:bodyPr/>
+          <a:lstStyle/>
+          <a:p>
+            <a:endParaRPr lang="en-IN"/>
+          </a:p>
+        </p:txBody>
       </p:sp>
       <p:grpSp>
         <p:nvGrpSpPr>
-          <p:cNvPr name="Group 5" id="5"/>
+          <p:cNvPr id="5" name="Group 5"/>
           <p:cNvGrpSpPr/>
           <p:nvPr/>
         </p:nvGrpSpPr>
         <p:grpSpPr>
-          <a:xfrm rot="0">
+          <a:xfrm>
             <a:off x="0" y="10132980"/>
             <a:ext cx="18481864" cy="154020"/>
             <a:chOff x="0" y="0"/>
@@ -6547,12 +6948,12 @@
         </p:grpSpPr>
         <p:sp>
           <p:nvSpPr>
-            <p:cNvPr name="Freeform 6" id="6"/>
+            <p:cNvPr id="6" name="Freeform 6"/>
             <p:cNvSpPr/>
             <p:nvPr/>
           </p:nvSpPr>
           <p:spPr>
-            <a:xfrm flipH="false" flipV="false" rot="0">
+            <a:xfrm>
               <a:off x="0" y="0"/>
               <a:ext cx="16256000" cy="135509"/>
             </a:xfrm>
@@ -6561,9 +6962,9 @@
               <a:gdLst/>
               <a:ahLst/>
               <a:cxnLst/>
-              <a:rect r="r" b="b" t="t" l="l"/>
+              <a:rect l="l" t="t" r="r" b="b"/>
               <a:pathLst>
-                <a:path h="135509" w="16256000">
+                <a:path w="16256000" h="135509">
                   <a:moveTo>
                     <a:pt x="0" y="0"/>
                   </a:moveTo>
@@ -6584,22 +6985,29 @@
               </a:pathLst>
             </a:custGeom>
             <a:blipFill>
-              <a:blip r:embed="rId7"/>
+              <a:blip r:embed="rId5"/>
               <a:stretch>
-                <a:fillRect l="0" t="0" r="0" b="28"/>
+                <a:fillRect b="28"/>
               </a:stretch>
             </a:blipFill>
           </p:spPr>
+          <p:txBody>
+            <a:bodyPr/>
+            <a:lstStyle/>
+            <a:p>
+              <a:endParaRPr lang="en-IN"/>
+            </a:p>
+          </p:txBody>
         </p:sp>
       </p:grpSp>
       <p:sp>
         <p:nvSpPr>
-          <p:cNvPr name="Freeform 7" id="7"/>
+          <p:cNvPr id="7" name="Freeform 7"/>
           <p:cNvSpPr/>
           <p:nvPr/>
         </p:nvSpPr>
         <p:spPr>
-          <a:xfrm flipH="false" flipV="false" rot="0">
+          <a:xfrm>
             <a:off x="543930" y="9045394"/>
             <a:ext cx="2070431" cy="908008"/>
           </a:xfrm>
@@ -6608,9 +7016,9 @@
             <a:gdLst/>
             <a:ahLst/>
             <a:cxnLst/>
-            <a:rect r="r" b="b" t="t" l="l"/>
+            <a:rect l="l" t="t" r="r" b="b"/>
             <a:pathLst>
-              <a:path h="908008" w="2070431">
+              <a:path w="2070431" h="908008">
                 <a:moveTo>
                   <a:pt x="0" y="0"/>
                 </a:moveTo>
@@ -6631,27 +7039,34 @@
             </a:pathLst>
           </a:custGeom>
           <a:blipFill>
-            <a:blip r:embed="rId8">
+            <a:blip>
               <a:extLst>
                 <a:ext uri="{96DAC541-7B7A-43D3-8B79-37D633B846F1}">
-                  <asvg:svgBlip xmlns:asvg="http://schemas.microsoft.com/office/drawing/2016/SVG/main" r:embed="rId9"/>
+                  <asvg:svgBlip xmlns:asvg="http://schemas.microsoft.com/office/drawing/2016/SVG/main" r:embed="rId6"/>
                 </a:ext>
               </a:extLst>
             </a:blip>
             <a:stretch>
-              <a:fillRect l="0" t="0" r="0" b="0"/>
+              <a:fillRect/>
             </a:stretch>
           </a:blipFill>
         </p:spPr>
+        <p:txBody>
+          <a:bodyPr/>
+          <a:lstStyle/>
+          <a:p>
+            <a:endParaRPr lang="en-IN"/>
+          </a:p>
+        </p:txBody>
       </p:sp>
       <p:grpSp>
         <p:nvGrpSpPr>
-          <p:cNvPr name="Group 8" id="8"/>
+          <p:cNvPr id="8" name="Group 8"/>
           <p:cNvGrpSpPr/>
           <p:nvPr/>
         </p:nvGrpSpPr>
         <p:grpSpPr>
-          <a:xfrm rot="0">
+          <a:xfrm>
             <a:off x="543930" y="9045394"/>
             <a:ext cx="2070431" cy="944640"/>
             <a:chOff x="0" y="0"/>
@@ -6660,12 +7075,12 @@
         </p:grpSpPr>
         <p:sp>
           <p:nvSpPr>
-            <p:cNvPr name="Freeform 9" id="9"/>
+            <p:cNvPr id="9" name="Freeform 9"/>
             <p:cNvSpPr/>
             <p:nvPr/>
           </p:nvSpPr>
           <p:spPr>
-            <a:xfrm flipH="false" flipV="false" rot="0">
+            <a:xfrm>
               <a:off x="0" y="0"/>
               <a:ext cx="1821053" cy="830923"/>
             </a:xfrm>
@@ -6674,9 +7089,9 @@
               <a:gdLst/>
               <a:ahLst/>
               <a:cxnLst/>
-              <a:rect r="r" b="b" t="t" l="l"/>
+              <a:rect l="l" t="t" r="r" b="b"/>
               <a:pathLst>
-                <a:path h="830923" w="1821053">
+                <a:path w="1821053" h="830923">
                   <a:moveTo>
                     <a:pt x="0" y="0"/>
                   </a:moveTo>
@@ -6697,44 +7112,51 @@
               </a:pathLst>
             </a:custGeom>
             <a:blipFill>
-              <a:blip r:embed="rId10"/>
+              <a:blip r:embed="rId7"/>
               <a:stretch>
                 <a:fillRect l="-72565" t="-156165" r="-72141" b="-156511"/>
               </a:stretch>
             </a:blipFill>
           </p:spPr>
+          <p:txBody>
+            <a:bodyPr/>
+            <a:lstStyle/>
+            <a:p>
+              <a:endParaRPr lang="en-IN"/>
+            </a:p>
+          </p:txBody>
         </p:sp>
       </p:grpSp>
       <p:sp>
         <p:nvSpPr>
-          <p:cNvPr name="Freeform 10" id="10"/>
+          <p:cNvPr id="10" name="Freeform 10"/>
           <p:cNvSpPr/>
           <p:nvPr/>
         </p:nvSpPr>
         <p:spPr>
-          <a:xfrm flipH="false" flipV="false" rot="0">
-            <a:off x="11833269" y="7180799"/>
-            <a:ext cx="2342301" cy="1864595"/>
+          <a:xfrm>
+            <a:off x="543930" y="3096724"/>
+            <a:ext cx="17224333" cy="3520223"/>
           </a:xfrm>
           <a:custGeom>
             <a:avLst/>
             <a:gdLst/>
             <a:ahLst/>
             <a:cxnLst/>
-            <a:rect r="r" b="b" t="t" l="l"/>
+            <a:rect l="l" t="t" r="r" b="b"/>
             <a:pathLst>
-              <a:path h="1864595" w="2342301">
+              <a:path w="17224333" h="3520223">
                 <a:moveTo>
                   <a:pt x="0" y="0"/>
                 </a:moveTo>
                 <a:lnTo>
-                  <a:pt x="2342301" y="0"/>
-                </a:lnTo>
-                <a:lnTo>
-                  <a:pt x="2342301" y="1864595"/>
-                </a:lnTo>
-                <a:lnTo>
-                  <a:pt x="0" y="1864595"/>
+                  <a:pt x="17224333" y="0"/>
+                </a:lnTo>
+                <a:lnTo>
+                  <a:pt x="17224333" y="3520223"/>
+                </a:lnTo>
+                <a:lnTo>
+                  <a:pt x="0" y="3520223"/>
                 </a:lnTo>
                 <a:lnTo>
                   <a:pt x="0" y="0"/>
@@ -6744,67 +7166,28 @@
             </a:pathLst>
           </a:custGeom>
           <a:blipFill>
-            <a:blip r:embed="rId11"/>
+            <a:blip r:embed="rId8"/>
             <a:stretch>
-              <a:fillRect l="0" t="0" r="0" b="0"/>
+              <a:fillRect/>
             </a:stretch>
           </a:blipFill>
         </p:spPr>
-      </p:sp>
-      <p:sp>
-        <p:nvSpPr>
-          <p:cNvPr name="Freeform 11" id="11"/>
-          <p:cNvSpPr/>
+        <p:txBody>
+          <a:bodyPr/>
+          <a:lstStyle/>
+          <a:p>
+            <a:endParaRPr lang="en-IN"/>
+          </a:p>
+        </p:txBody>
+      </p:sp>
+      <p:sp>
+        <p:nvSpPr>
+          <p:cNvPr id="11" name="TextBox 11"/>
+          <p:cNvSpPr txBox="1"/>
           <p:nvPr/>
         </p:nvSpPr>
         <p:spPr>
-          <a:xfrm flipH="false" flipV="false" rot="0">
-            <a:off x="8232967" y="2965696"/>
-            <a:ext cx="9542904" cy="3978198"/>
-          </a:xfrm>
-          <a:custGeom>
-            <a:avLst/>
-            <a:gdLst/>
-            <a:ahLst/>
-            <a:cxnLst/>
-            <a:rect r="r" b="b" t="t" l="l"/>
-            <a:pathLst>
-              <a:path h="3978198" w="9542904">
-                <a:moveTo>
-                  <a:pt x="0" y="0"/>
-                </a:moveTo>
-                <a:lnTo>
-                  <a:pt x="9542904" y="0"/>
-                </a:lnTo>
-                <a:lnTo>
-                  <a:pt x="9542904" y="3978198"/>
-                </a:lnTo>
-                <a:lnTo>
-                  <a:pt x="0" y="3978198"/>
-                </a:lnTo>
-                <a:lnTo>
-                  <a:pt x="0" y="0"/>
-                </a:lnTo>
-                <a:close/>
-              </a:path>
-            </a:pathLst>
-          </a:custGeom>
-          <a:blipFill>
-            <a:blip r:embed="rId12"/>
-            <a:stretch>
-              <a:fillRect l="0" t="0" r="0" b="0"/>
-            </a:stretch>
-          </a:blipFill>
-        </p:spPr>
-      </p:sp>
-      <p:sp>
-        <p:nvSpPr>
-          <p:cNvPr name="TextBox 12" id="12"/>
-          <p:cNvSpPr txBox="true"/>
-          <p:nvPr/>
-        </p:nvSpPr>
-        <p:spPr>
-          <a:xfrm rot="0">
+          <a:xfrm>
             <a:off x="17259300" y="9210675"/>
             <a:ext cx="152400" cy="200025"/>
           </a:xfrm>
@@ -6813,7 +7196,7 @@
           </a:prstGeom>
         </p:spPr>
         <p:txBody>
-          <a:bodyPr anchor="t" rtlCol="false" tIns="0" lIns="0" bIns="0" rIns="0" wrap="none">
+          <a:bodyPr wrap="none" lIns="0" tIns="0" rIns="0" bIns="0" rtlCol="0" anchor="t">
             <a:spAutoFit/>
           </a:bodyPr>
           <a:lstStyle/>
@@ -6827,37 +7210,37 @@
               </a:spcBef>
             </a:pPr>
             <a:r>
-              <a:rPr lang="en-US" b="true" sz="2000">
+              <a:rPr lang="en-US" sz="2000">
                 <a:solidFill>
                   <a:srgbClr val="000000"/>
                 </a:solidFill>
-                <a:latin typeface="Arial Bold"/>
-                <a:ea typeface="Arial Bold"/>
-                <a:cs typeface="Arial Bold"/>
-                <a:sym typeface="Arial Bold"/>
+                <a:latin typeface="Arial"/>
+                <a:ea typeface="Arial"/>
+                <a:cs typeface="Arial"/>
+                <a:sym typeface="Arial"/>
               </a:rPr>
-              <a:t>6</a:t>
-            </a:r>
-          </a:p>
-        </p:txBody>
-      </p:sp>
-      <p:sp>
-        <p:nvSpPr>
-          <p:cNvPr name="TextBox 13" id="13"/>
-          <p:cNvSpPr txBox="true"/>
+              <a:t>5</a:t>
+            </a:r>
+          </a:p>
+        </p:txBody>
+      </p:sp>
+      <p:sp>
+        <p:nvSpPr>
+          <p:cNvPr id="12" name="TextBox 12"/>
+          <p:cNvSpPr txBox="1"/>
           <p:nvPr/>
         </p:nvSpPr>
         <p:spPr>
-          <a:xfrm rot="0">
-            <a:off x="5333583" y="895350"/>
-            <a:ext cx="7620834" cy="1038227"/>
+          <a:xfrm>
+            <a:off x="4056935" y="818895"/>
+            <a:ext cx="10174129" cy="983090"/>
           </a:xfrm>
           <a:prstGeom prst="rect">
             <a:avLst/>
           </a:prstGeom>
         </p:spPr>
         <p:txBody>
-          <a:bodyPr anchor="t" rtlCol="false" tIns="0" lIns="0" bIns="0" rIns="0">
+          <a:bodyPr wrap="square" lIns="0" tIns="0" rIns="0" bIns="0" rtlCol="0" anchor="t">
             <a:spAutoFit/>
           </a:bodyPr>
           <a:lstStyle/>
@@ -6871,7 +7254,7 @@
               </a:spcBef>
             </a:pPr>
             <a:r>
-              <a:rPr lang="en-US" b="true" sz="5999">
+              <a:rPr lang="en-US" sz="5999" b="1" dirty="0">
                 <a:solidFill>
                   <a:srgbClr val="7D1916"/>
                 </a:solidFill>
@@ -6880,69 +7263,77 @@
                 <a:cs typeface="Arial Bold"/>
                 <a:sym typeface="Arial Bold"/>
               </a:rPr>
-              <a:t>Results: Quantitative</a:t>
-            </a:r>
-          </a:p>
-        </p:txBody>
-      </p:sp>
-      <p:sp>
-        <p:nvSpPr>
-          <p:cNvPr name="TextBox 14" id="14"/>
-          <p:cNvSpPr txBox="true"/>
+              <a:t>Results: Visual Analysis</a:t>
+            </a:r>
+          </a:p>
+        </p:txBody>
+      </p:sp>
+      <p:sp>
+        <p:nvSpPr>
+          <p:cNvPr id="13" name="TextBox 13"/>
+          <p:cNvSpPr txBox="1"/>
           <p:nvPr/>
         </p:nvSpPr>
         <p:spPr>
-          <a:xfrm rot="0">
-            <a:off x="1028700" y="3312497"/>
-            <a:ext cx="6341745" cy="4800600"/>
+          <a:xfrm>
+            <a:off x="3192814" y="6816546"/>
+            <a:ext cx="12978817" cy="2990848"/>
           </a:xfrm>
           <a:prstGeom prst="rect">
             <a:avLst/>
           </a:prstGeom>
         </p:spPr>
         <p:txBody>
-          <a:bodyPr anchor="t" rtlCol="false" tIns="0" lIns="0" bIns="0" rIns="0">
+          <a:bodyPr lIns="0" tIns="0" rIns="0" bIns="0" rtlCol="0" anchor="t">
             <a:spAutoFit/>
           </a:bodyPr>
           <a:lstStyle/>
           <a:p>
-            <a:pPr algn="l">
+            <a:pPr marL="647703" lvl="1" indent="-323852" algn="l">
               <a:lnSpc>
-                <a:spcPts val="4200"/>
+                <a:spcPts val="6000"/>
               </a:lnSpc>
-              <a:spcBef>
-                <a:spcPct val="0"/>
-              </a:spcBef>
+              <a:buFont typeface="Arial"/>
+              <a:buChar char="•"/>
             </a:pPr>
             <a:r>
-              <a:rPr lang="en-US" b="true" sz="3000">
+              <a:rPr lang="en-US" sz="3000">
                 <a:solidFill>
                   <a:srgbClr val="000000"/>
                 </a:solidFill>
-                <a:latin typeface="Arial Bold"/>
-                <a:ea typeface="Arial Bold"/>
-                <a:cs typeface="Arial Bold"/>
-                <a:sym typeface="Arial Bold"/>
+                <a:latin typeface="Arial"/>
+                <a:ea typeface="Arial"/>
+                <a:cs typeface="Arial"/>
+                <a:sym typeface="Arial"/>
               </a:rPr>
-              <a:t>Key Res</a:t>
-            </a:r>
-            <a:r>
-              <a:rPr lang="en-US" b="true" sz="3000">
+              <a:t>FLAIR → Highlights Tumor Edema and suppresses CSF signals</a:t>
+            </a:r>
+          </a:p>
+          <a:p>
+            <a:pPr marL="647703" lvl="1" indent="-323852" algn="l">
+              <a:lnSpc>
+                <a:spcPts val="6000"/>
+              </a:lnSpc>
+              <a:buFont typeface="Arial"/>
+              <a:buChar char="•"/>
+            </a:pPr>
+            <a:r>
+              <a:rPr lang="en-US" sz="3000">
                 <a:solidFill>
                   <a:srgbClr val="000000"/>
                 </a:solidFill>
-                <a:latin typeface="Arial Bold"/>
-                <a:ea typeface="Arial Bold"/>
-                <a:cs typeface="Arial Bold"/>
-                <a:sym typeface="Arial Bold"/>
+                <a:latin typeface="Arial"/>
+                <a:ea typeface="Arial"/>
+                <a:cs typeface="Arial"/>
+                <a:sym typeface="Arial"/>
               </a:rPr>
-              <a:t>ults</a:t>
-            </a:r>
-          </a:p>
-          <a:p>
-            <a:pPr algn="l" marL="647702" indent="-323851" lvl="1">
+              <a:t>T2 → Free Fluid and Edema Highlighted</a:t>
+            </a:r>
+          </a:p>
+          <a:p>
+            <a:pPr marL="647703" lvl="1" indent="-323852" algn="l">
               <a:lnSpc>
-                <a:spcPts val="4200"/>
+                <a:spcPts val="6000"/>
               </a:lnSpc>
               <a:spcBef>
                 <a:spcPct val="0"/>
@@ -6951,18 +7342,6 @@
               <a:buChar char="•"/>
             </a:pPr>
             <a:r>
-              <a:rPr lang="en-US" b="true" sz="3000">
-                <a:solidFill>
-                  <a:srgbClr val="000000"/>
-                </a:solidFill>
-                <a:latin typeface="Arial Bold"/>
-                <a:ea typeface="Arial Bold"/>
-                <a:cs typeface="Arial Bold"/>
-                <a:sym typeface="Arial Bold"/>
-              </a:rPr>
-              <a:t>Dice:</a:t>
-            </a:r>
-            <a:r>
               <a:rPr lang="en-US" sz="3000">
                 <a:solidFill>
                   <a:srgbClr val="000000"/>
@@ -6972,210 +7351,8 @@
                 <a:cs typeface="Arial"/>
                 <a:sym typeface="Arial"/>
               </a:rPr>
-              <a:t> 0.665 ± 0.179</a:t>
-            </a:r>
-          </a:p>
-          <a:p>
-            <a:pPr algn="l" marL="647702" indent="-323851" lvl="1">
-              <a:lnSpc>
-                <a:spcPts val="4200"/>
-              </a:lnSpc>
-              <a:spcBef>
-                <a:spcPct val="0"/>
-              </a:spcBef>
-              <a:buFont typeface="Arial"/>
-              <a:buChar char="•"/>
-            </a:pPr>
-            <a:r>
-              <a:rPr lang="en-US" b="true" sz="3000">
-                <a:solidFill>
-                  <a:srgbClr val="000000"/>
-                </a:solidFill>
-                <a:latin typeface="Arial Bold"/>
-                <a:ea typeface="Arial Bold"/>
-                <a:cs typeface="Arial Bold"/>
-                <a:sym typeface="Arial Bold"/>
-              </a:rPr>
-              <a:t>IoU:</a:t>
-            </a:r>
-            <a:r>
-              <a:rPr lang="en-US" sz="3000">
-                <a:solidFill>
-                  <a:srgbClr val="000000"/>
-                </a:solidFill>
-                <a:latin typeface="Arial"/>
-                <a:ea typeface="Arial"/>
-                <a:cs typeface="Arial"/>
-                <a:sym typeface="Arial"/>
-              </a:rPr>
-              <a:t> 0.521 ± 0.183</a:t>
-            </a:r>
-          </a:p>
-          <a:p>
-            <a:pPr algn="l" marL="647702" indent="-323851" lvl="1">
-              <a:lnSpc>
-                <a:spcPts val="4200"/>
-              </a:lnSpc>
-              <a:spcBef>
-                <a:spcPct val="0"/>
-              </a:spcBef>
-              <a:buFont typeface="Arial"/>
-              <a:buChar char="•"/>
-            </a:pPr>
-            <a:r>
-              <a:rPr lang="en-US" b="true" sz="3000">
-                <a:solidFill>
-                  <a:srgbClr val="000000"/>
-                </a:solidFill>
-                <a:latin typeface="Arial Bold"/>
-                <a:ea typeface="Arial Bold"/>
-                <a:cs typeface="Arial Bold"/>
-                <a:sym typeface="Arial Bold"/>
-              </a:rPr>
-              <a:t>Precision:</a:t>
-            </a:r>
-            <a:r>
-              <a:rPr lang="en-US" sz="3000">
-                <a:solidFill>
-                  <a:srgbClr val="000000"/>
-                </a:solidFill>
-                <a:latin typeface="Arial"/>
-                <a:ea typeface="Arial"/>
-                <a:cs typeface="Arial"/>
-                <a:sym typeface="Arial"/>
-              </a:rPr>
-              <a:t> 0.787 ± 0.179</a:t>
-            </a:r>
-          </a:p>
-          <a:p>
-            <a:pPr algn="l" marL="647702" indent="-323851" lvl="1">
-              <a:lnSpc>
-                <a:spcPts val="4200"/>
-              </a:lnSpc>
-              <a:spcBef>
-                <a:spcPct val="0"/>
-              </a:spcBef>
-              <a:buFont typeface="Arial"/>
-              <a:buChar char="•"/>
-            </a:pPr>
-            <a:r>
-              <a:rPr lang="en-US" b="true" sz="3000">
-                <a:solidFill>
-                  <a:srgbClr val="000000"/>
-                </a:solidFill>
-                <a:latin typeface="Arial Bold"/>
-                <a:ea typeface="Arial Bold"/>
-                <a:cs typeface="Arial Bold"/>
-                <a:sym typeface="Arial Bold"/>
-              </a:rPr>
-              <a:t>Recall:</a:t>
-            </a:r>
-            <a:r>
-              <a:rPr lang="en-US" sz="3000">
-                <a:solidFill>
-                  <a:srgbClr val="000000"/>
-                </a:solidFill>
-                <a:latin typeface="Arial"/>
-                <a:ea typeface="Arial"/>
-                <a:cs typeface="Arial"/>
-                <a:sym typeface="Arial"/>
-              </a:rPr>
-              <a:t> 0.600 ± 0.211</a:t>
-            </a:r>
-          </a:p>
-          <a:p>
-            <a:pPr algn="l" marL="647702" indent="-323851" lvl="1">
-              <a:lnSpc>
-                <a:spcPts val="4200"/>
-              </a:lnSpc>
-              <a:spcBef>
-                <a:spcPct val="0"/>
-              </a:spcBef>
-              <a:buFont typeface="Arial"/>
-              <a:buChar char="•"/>
-            </a:pPr>
-            <a:r>
-              <a:rPr lang="en-US" b="true" sz="3000">
-                <a:solidFill>
-                  <a:srgbClr val="000000"/>
-                </a:solidFill>
-                <a:latin typeface="Arial Bold"/>
-                <a:ea typeface="Arial Bold"/>
-                <a:cs typeface="Arial Bold"/>
-                <a:sym typeface="Arial Bold"/>
-              </a:rPr>
-              <a:t>Pooled Dice:</a:t>
-            </a:r>
-            <a:r>
-              <a:rPr lang="en-US" sz="3000">
-                <a:solidFill>
-                  <a:srgbClr val="000000"/>
-                </a:solidFill>
-                <a:latin typeface="Arial"/>
-                <a:ea typeface="Arial"/>
-                <a:cs typeface="Arial"/>
-                <a:sym typeface="Arial"/>
-              </a:rPr>
-              <a:t> 0.733</a:t>
-            </a:r>
-          </a:p>
-          <a:p>
-            <a:pPr algn="l" marL="647702" indent="-323851" lvl="1">
-              <a:lnSpc>
-                <a:spcPts val="4200"/>
-              </a:lnSpc>
-              <a:spcBef>
-                <a:spcPct val="0"/>
-              </a:spcBef>
-              <a:buFont typeface="Arial"/>
-              <a:buChar char="•"/>
-            </a:pPr>
-            <a:r>
-              <a:rPr lang="en-US" sz="3000">
-                <a:solidFill>
-                  <a:srgbClr val="000000"/>
-                </a:solidFill>
-                <a:latin typeface="Arial"/>
-                <a:ea typeface="Arial"/>
-                <a:cs typeface="Arial"/>
-                <a:sym typeface="Arial"/>
-              </a:rPr>
-              <a:t>Dice ≥ 0.50 → 16/20 cases (80%)</a:t>
-            </a:r>
-          </a:p>
-          <a:p>
-            <a:pPr algn="l" marL="647702" indent="-323851" lvl="1">
-              <a:lnSpc>
-                <a:spcPts val="4200"/>
-              </a:lnSpc>
-              <a:spcBef>
-                <a:spcPct val="0"/>
-              </a:spcBef>
-              <a:buFont typeface="Arial"/>
-              <a:buChar char="•"/>
-            </a:pPr>
-            <a:r>
-              <a:rPr lang="en-US" sz="3000">
-                <a:solidFill>
-                  <a:srgbClr val="000000"/>
-                </a:solidFill>
-                <a:latin typeface="Arial"/>
-                <a:ea typeface="Arial"/>
-                <a:cs typeface="Arial"/>
-                <a:sym typeface="Arial"/>
-              </a:rPr>
-              <a:t>Dice ≥ 0.70 → 11/20 cases (55%)</a:t>
-            </a:r>
-          </a:p>
-          <a:p>
-            <a:pPr algn="l">
-              <a:lnSpc>
-                <a:spcPts val="4200"/>
-              </a:lnSpc>
-              <a:spcBef>
-                <a:spcPct val="0"/>
-              </a:spcBef>
-            </a:pPr>
+              <a:t>T1ce → Tumor (ET) core appears bright because of Paramagnetic contrast agent (Gadolinium)</a:t>
+            </a:r>
           </a:p>
         </p:txBody>
       </p:sp>
@@ -7187,14 +7364,15 @@
 </p:sld>
 </file>
 
-<file path=ppt/slides/slide7.xml><?xml version="1.0" encoding="utf-8"?>
-<p:sld xmlns:p="http://schemas.openxmlformats.org/presentationml/2006/main" xmlns:a="http://schemas.openxmlformats.org/drawingml/2006/main" xmlns:r="http://schemas.openxmlformats.org/officeDocument/2006/relationships">
+<file path=ppt/slides/slide6.xml><?xml version="1.0" encoding="utf-8"?>
+<p:sld xmlns:a="http://schemas.openxmlformats.org/drawingml/2006/main" xmlns:r="http://schemas.openxmlformats.org/officeDocument/2006/relationships" xmlns:p="http://schemas.openxmlformats.org/presentationml/2006/main">
   <p:cSld>
     <p:bg>
       <p:bgPr>
         <a:solidFill>
           <a:srgbClr val="F2F1EE"/>
         </a:solidFill>
+        <a:effectLst/>
       </p:bgPr>
     </p:bg>
     <p:spTree>
@@ -7213,12 +7391,12 @@
       </p:grpSpPr>
       <p:sp>
         <p:nvSpPr>
-          <p:cNvPr name="Freeform 2" id="2"/>
+          <p:cNvPr id="2" name="Freeform 2"/>
           <p:cNvSpPr/>
           <p:nvPr/>
         </p:nvSpPr>
         <p:spPr>
-          <a:xfrm flipH="false" flipV="false" rot="0">
+          <a:xfrm>
             <a:off x="2310233" y="10132980"/>
             <a:ext cx="13861398" cy="154020"/>
           </a:xfrm>
@@ -7227,9 +7405,9 @@
             <a:gdLst/>
             <a:ahLst/>
             <a:cxnLst/>
-            <a:rect r="r" b="b" t="t" l="l"/>
+            <a:rect l="l" t="t" r="r" b="b"/>
             <a:pathLst>
-              <a:path h="154020" w="13861398">
+              <a:path w="13861398" h="154020">
                 <a:moveTo>
                   <a:pt x="0" y="0"/>
                 </a:moveTo>
@@ -7250,7 +7428,66 @@
             </a:pathLst>
           </a:custGeom>
           <a:blipFill>
-            <a:blip r:embed="rId2">
+            <a:blip>
+              <a:extLst>
+                <a:ext uri="{96DAC541-7B7A-43D3-8B79-37D633B846F1}">
+                  <asvg:svgBlip xmlns:asvg="http://schemas.microsoft.com/office/drawing/2016/SVG/main" r:embed="rId2"/>
+                </a:ext>
+              </a:extLst>
+            </a:blip>
+            <a:stretch>
+              <a:fillRect/>
+            </a:stretch>
+          </a:blipFill>
+        </p:spPr>
+        <p:txBody>
+          <a:bodyPr/>
+          <a:lstStyle/>
+          <a:p>
+            <a:endParaRPr lang="en-IN"/>
+          </a:p>
+        </p:txBody>
+      </p:sp>
+      <p:sp>
+        <p:nvSpPr>
+          <p:cNvPr id="3" name="Freeform 3"/>
+          <p:cNvSpPr/>
+          <p:nvPr/>
+        </p:nvSpPr>
+        <p:spPr>
+          <a:xfrm>
+            <a:off x="0" y="10132980"/>
+            <a:ext cx="3939395" cy="154020"/>
+          </a:xfrm>
+          <a:custGeom>
+            <a:avLst/>
+            <a:gdLst/>
+            <a:ahLst/>
+            <a:cxnLst/>
+            <a:rect l="l" t="t" r="r" b="b"/>
+            <a:pathLst>
+              <a:path w="3939395" h="154020">
+                <a:moveTo>
+                  <a:pt x="0" y="0"/>
+                </a:moveTo>
+                <a:lnTo>
+                  <a:pt x="3939395" y="0"/>
+                </a:lnTo>
+                <a:lnTo>
+                  <a:pt x="3939395" y="154020"/>
+                </a:lnTo>
+                <a:lnTo>
+                  <a:pt x="0" y="154020"/>
+                </a:lnTo>
+                <a:lnTo>
+                  <a:pt x="0" y="0"/>
+                </a:lnTo>
+                <a:close/>
+              </a:path>
+            </a:pathLst>
+          </a:custGeom>
+          <a:blipFill>
+            <a:blip>
               <a:extLst>
                 <a:ext uri="{96DAC541-7B7A-43D3-8B79-37D633B846F1}">
                   <asvg:svgBlip xmlns:asvg="http://schemas.microsoft.com/office/drawing/2016/SVG/main" r:embed="rId3"/>
@@ -7258,20 +7495,27 @@
               </a:extLst>
             </a:blip>
             <a:stretch>
-              <a:fillRect l="0" t="0" r="0" b="0"/>
+              <a:fillRect/>
             </a:stretch>
           </a:blipFill>
         </p:spPr>
-      </p:sp>
-      <p:sp>
-        <p:nvSpPr>
-          <p:cNvPr name="Freeform 3" id="3"/>
+        <p:txBody>
+          <a:bodyPr/>
+          <a:lstStyle/>
+          <a:p>
+            <a:endParaRPr lang="en-IN"/>
+          </a:p>
+        </p:txBody>
+      </p:sp>
+      <p:sp>
+        <p:nvSpPr>
+          <p:cNvPr id="4" name="Freeform 4"/>
           <p:cNvSpPr/>
           <p:nvPr/>
         </p:nvSpPr>
         <p:spPr>
-          <a:xfrm flipH="false" flipV="false" rot="0">
-            <a:off x="0" y="10132980"/>
+          <a:xfrm>
+            <a:off x="14542469" y="10132980"/>
             <a:ext cx="3939395" cy="154020"/>
           </a:xfrm>
           <a:custGeom>
@@ -7279,9 +7523,9 @@
             <a:gdLst/>
             <a:ahLst/>
             <a:cxnLst/>
-            <a:rect r="r" b="b" t="t" l="l"/>
+            <a:rect l="l" t="t" r="r" b="b"/>
             <a:pathLst>
-              <a:path h="154020" w="3939395">
+              <a:path w="3939395" h="154020">
                 <a:moveTo>
                   <a:pt x="0" y="0"/>
                 </a:moveTo>
@@ -7302,79 +7546,34 @@
             </a:pathLst>
           </a:custGeom>
           <a:blipFill>
-            <a:blip r:embed="rId4">
+            <a:blip>
               <a:extLst>
                 <a:ext uri="{96DAC541-7B7A-43D3-8B79-37D633B846F1}">
-                  <asvg:svgBlip xmlns:asvg="http://schemas.microsoft.com/office/drawing/2016/SVG/main" r:embed="rId5"/>
+                  <asvg:svgBlip xmlns:asvg="http://schemas.microsoft.com/office/drawing/2016/SVG/main" r:embed="rId4"/>
                 </a:ext>
               </a:extLst>
             </a:blip>
             <a:stretch>
-              <a:fillRect l="0" t="0" r="0" b="0"/>
+              <a:fillRect/>
             </a:stretch>
           </a:blipFill>
         </p:spPr>
-      </p:sp>
-      <p:sp>
-        <p:nvSpPr>
-          <p:cNvPr name="Freeform 4" id="4"/>
-          <p:cNvSpPr/>
-          <p:nvPr/>
-        </p:nvSpPr>
-        <p:spPr>
-          <a:xfrm flipH="false" flipV="false" rot="0">
-            <a:off x="14542469" y="10132980"/>
-            <a:ext cx="3939395" cy="154020"/>
-          </a:xfrm>
-          <a:custGeom>
-            <a:avLst/>
-            <a:gdLst/>
-            <a:ahLst/>
-            <a:cxnLst/>
-            <a:rect r="r" b="b" t="t" l="l"/>
-            <a:pathLst>
-              <a:path h="154020" w="3939395">
-                <a:moveTo>
-                  <a:pt x="0" y="0"/>
-                </a:moveTo>
-                <a:lnTo>
-                  <a:pt x="3939395" y="0"/>
-                </a:lnTo>
-                <a:lnTo>
-                  <a:pt x="3939395" y="154020"/>
-                </a:lnTo>
-                <a:lnTo>
-                  <a:pt x="0" y="154020"/>
-                </a:lnTo>
-                <a:lnTo>
-                  <a:pt x="0" y="0"/>
-                </a:lnTo>
-                <a:close/>
-              </a:path>
-            </a:pathLst>
-          </a:custGeom>
-          <a:blipFill>
-            <a:blip r:embed="rId4">
-              <a:extLst>
-                <a:ext uri="{96DAC541-7B7A-43D3-8B79-37D633B846F1}">
-                  <asvg:svgBlip xmlns:asvg="http://schemas.microsoft.com/office/drawing/2016/SVG/main" r:embed="rId6"/>
-                </a:ext>
-              </a:extLst>
-            </a:blip>
-            <a:stretch>
-              <a:fillRect l="0" t="0" r="0" b="0"/>
-            </a:stretch>
-          </a:blipFill>
-        </p:spPr>
+        <p:txBody>
+          <a:bodyPr/>
+          <a:lstStyle/>
+          <a:p>
+            <a:endParaRPr lang="en-IN"/>
+          </a:p>
+        </p:txBody>
       </p:sp>
       <p:grpSp>
         <p:nvGrpSpPr>
-          <p:cNvPr name="Group 5" id="5"/>
+          <p:cNvPr id="5" name="Group 5"/>
           <p:cNvGrpSpPr/>
           <p:nvPr/>
         </p:nvGrpSpPr>
         <p:grpSpPr>
-          <a:xfrm rot="0">
+          <a:xfrm>
             <a:off x="0" y="10132980"/>
             <a:ext cx="18481864" cy="154020"/>
             <a:chOff x="0" y="0"/>
@@ -7383,12 +7582,12 @@
         </p:grpSpPr>
         <p:sp>
           <p:nvSpPr>
-            <p:cNvPr name="Freeform 6" id="6"/>
+            <p:cNvPr id="6" name="Freeform 6"/>
             <p:cNvSpPr/>
             <p:nvPr/>
           </p:nvSpPr>
           <p:spPr>
-            <a:xfrm flipH="false" flipV="false" rot="0">
+            <a:xfrm>
               <a:off x="0" y="0"/>
               <a:ext cx="16256000" cy="135509"/>
             </a:xfrm>
@@ -7397,9 +7596,9 @@
               <a:gdLst/>
               <a:ahLst/>
               <a:cxnLst/>
-              <a:rect r="r" b="b" t="t" l="l"/>
+              <a:rect l="l" t="t" r="r" b="b"/>
               <a:pathLst>
-                <a:path h="135509" w="16256000">
+                <a:path w="16256000" h="135509">
                   <a:moveTo>
                     <a:pt x="0" y="0"/>
                   </a:moveTo>
@@ -7420,22 +7619,29 @@
               </a:pathLst>
             </a:custGeom>
             <a:blipFill>
-              <a:blip r:embed="rId7"/>
+              <a:blip r:embed="rId5"/>
               <a:stretch>
-                <a:fillRect l="0" t="0" r="0" b="28"/>
+                <a:fillRect b="28"/>
               </a:stretch>
             </a:blipFill>
           </p:spPr>
+          <p:txBody>
+            <a:bodyPr/>
+            <a:lstStyle/>
+            <a:p>
+              <a:endParaRPr lang="en-IN"/>
+            </a:p>
+          </p:txBody>
         </p:sp>
       </p:grpSp>
       <p:sp>
         <p:nvSpPr>
-          <p:cNvPr name="Freeform 7" id="7"/>
+          <p:cNvPr id="7" name="Freeform 7"/>
           <p:cNvSpPr/>
           <p:nvPr/>
         </p:nvSpPr>
         <p:spPr>
-          <a:xfrm flipH="false" flipV="false" rot="0">
+          <a:xfrm>
             <a:off x="543930" y="9045394"/>
             <a:ext cx="2070431" cy="908008"/>
           </a:xfrm>
@@ -7444,9 +7650,9 @@
             <a:gdLst/>
             <a:ahLst/>
             <a:cxnLst/>
-            <a:rect r="r" b="b" t="t" l="l"/>
+            <a:rect l="l" t="t" r="r" b="b"/>
             <a:pathLst>
-              <a:path h="908008" w="2070431">
+              <a:path w="2070431" h="908008">
                 <a:moveTo>
                   <a:pt x="0" y="0"/>
                 </a:moveTo>
@@ -7467,27 +7673,34 @@
             </a:pathLst>
           </a:custGeom>
           <a:blipFill>
-            <a:blip r:embed="rId8">
+            <a:blip>
               <a:extLst>
                 <a:ext uri="{96DAC541-7B7A-43D3-8B79-37D633B846F1}">
-                  <asvg:svgBlip xmlns:asvg="http://schemas.microsoft.com/office/drawing/2016/SVG/main" r:embed="rId9"/>
+                  <asvg:svgBlip xmlns:asvg="http://schemas.microsoft.com/office/drawing/2016/SVG/main" r:embed="rId6"/>
                 </a:ext>
               </a:extLst>
             </a:blip>
             <a:stretch>
-              <a:fillRect l="0" t="0" r="0" b="0"/>
+              <a:fillRect/>
             </a:stretch>
           </a:blipFill>
         </p:spPr>
+        <p:txBody>
+          <a:bodyPr/>
+          <a:lstStyle/>
+          <a:p>
+            <a:endParaRPr lang="en-IN"/>
+          </a:p>
+        </p:txBody>
       </p:sp>
       <p:grpSp>
         <p:nvGrpSpPr>
-          <p:cNvPr name="Group 8" id="8"/>
+          <p:cNvPr id="8" name="Group 8"/>
           <p:cNvGrpSpPr/>
           <p:nvPr/>
         </p:nvGrpSpPr>
         <p:grpSpPr>
-          <a:xfrm rot="0">
+          <a:xfrm>
             <a:off x="543930" y="9045394"/>
             <a:ext cx="2070431" cy="944640"/>
             <a:chOff x="0" y="0"/>
@@ -7496,12 +7709,12 @@
         </p:grpSpPr>
         <p:sp>
           <p:nvSpPr>
-            <p:cNvPr name="Freeform 9" id="9"/>
+            <p:cNvPr id="9" name="Freeform 9"/>
             <p:cNvSpPr/>
             <p:nvPr/>
           </p:nvSpPr>
           <p:spPr>
-            <a:xfrm flipH="false" flipV="false" rot="0">
+            <a:xfrm>
               <a:off x="0" y="0"/>
               <a:ext cx="1821053" cy="830923"/>
             </a:xfrm>
@@ -7510,9 +7723,9 @@
               <a:gdLst/>
               <a:ahLst/>
               <a:cxnLst/>
-              <a:rect r="r" b="b" t="t" l="l"/>
+              <a:rect l="l" t="t" r="r" b="b"/>
               <a:pathLst>
-                <a:path h="830923" w="1821053">
+                <a:path w="1821053" h="830923">
                   <a:moveTo>
                     <a:pt x="0" y="0"/>
                   </a:moveTo>
@@ -7533,22 +7746,135 @@
               </a:pathLst>
             </a:custGeom>
             <a:blipFill>
-              <a:blip r:embed="rId10"/>
+              <a:blip r:embed="rId7"/>
               <a:stretch>
                 <a:fillRect l="-72565" t="-156165" r="-72141" b="-156511"/>
               </a:stretch>
             </a:blipFill>
           </p:spPr>
+          <p:txBody>
+            <a:bodyPr/>
+            <a:lstStyle/>
+            <a:p>
+              <a:endParaRPr lang="en-IN"/>
+            </a:p>
+          </p:txBody>
         </p:sp>
       </p:grpSp>
       <p:sp>
         <p:nvSpPr>
-          <p:cNvPr name="TextBox 10" id="10"/>
-          <p:cNvSpPr txBox="true"/>
+          <p:cNvPr id="10" name="Freeform 10"/>
+          <p:cNvSpPr/>
           <p:nvPr/>
         </p:nvSpPr>
         <p:spPr>
-          <a:xfrm rot="0">
+          <a:xfrm>
+            <a:off x="11833269" y="7180799"/>
+            <a:ext cx="2342301" cy="1864595"/>
+          </a:xfrm>
+          <a:custGeom>
+            <a:avLst/>
+            <a:gdLst/>
+            <a:ahLst/>
+            <a:cxnLst/>
+            <a:rect l="l" t="t" r="r" b="b"/>
+            <a:pathLst>
+              <a:path w="2342301" h="1864595">
+                <a:moveTo>
+                  <a:pt x="0" y="0"/>
+                </a:moveTo>
+                <a:lnTo>
+                  <a:pt x="2342301" y="0"/>
+                </a:lnTo>
+                <a:lnTo>
+                  <a:pt x="2342301" y="1864595"/>
+                </a:lnTo>
+                <a:lnTo>
+                  <a:pt x="0" y="1864595"/>
+                </a:lnTo>
+                <a:lnTo>
+                  <a:pt x="0" y="0"/>
+                </a:lnTo>
+                <a:close/>
+              </a:path>
+            </a:pathLst>
+          </a:custGeom>
+          <a:blipFill>
+            <a:blip r:embed="rId8"/>
+            <a:stretch>
+              <a:fillRect/>
+            </a:stretch>
+          </a:blipFill>
+        </p:spPr>
+        <p:txBody>
+          <a:bodyPr/>
+          <a:lstStyle/>
+          <a:p>
+            <a:endParaRPr lang="en-IN"/>
+          </a:p>
+        </p:txBody>
+      </p:sp>
+      <p:sp>
+        <p:nvSpPr>
+          <p:cNvPr id="11" name="Freeform 11"/>
+          <p:cNvSpPr/>
+          <p:nvPr/>
+        </p:nvSpPr>
+        <p:spPr>
+          <a:xfrm>
+            <a:off x="8232967" y="2965696"/>
+            <a:ext cx="9542904" cy="3978198"/>
+          </a:xfrm>
+          <a:custGeom>
+            <a:avLst/>
+            <a:gdLst/>
+            <a:ahLst/>
+            <a:cxnLst/>
+            <a:rect l="l" t="t" r="r" b="b"/>
+            <a:pathLst>
+              <a:path w="9542904" h="3978198">
+                <a:moveTo>
+                  <a:pt x="0" y="0"/>
+                </a:moveTo>
+                <a:lnTo>
+                  <a:pt x="9542904" y="0"/>
+                </a:lnTo>
+                <a:lnTo>
+                  <a:pt x="9542904" y="3978198"/>
+                </a:lnTo>
+                <a:lnTo>
+                  <a:pt x="0" y="3978198"/>
+                </a:lnTo>
+                <a:lnTo>
+                  <a:pt x="0" y="0"/>
+                </a:lnTo>
+                <a:close/>
+              </a:path>
+            </a:pathLst>
+          </a:custGeom>
+          <a:blipFill>
+            <a:blip r:embed="rId9"/>
+            <a:stretch>
+              <a:fillRect/>
+            </a:stretch>
+          </a:blipFill>
+        </p:spPr>
+        <p:txBody>
+          <a:bodyPr/>
+          <a:lstStyle/>
+          <a:p>
+            <a:endParaRPr lang="en-IN"/>
+          </a:p>
+        </p:txBody>
+      </p:sp>
+      <p:sp>
+        <p:nvSpPr>
+          <p:cNvPr id="12" name="TextBox 12"/>
+          <p:cNvSpPr txBox="1"/>
+          <p:nvPr/>
+        </p:nvSpPr>
+        <p:spPr>
+          <a:xfrm>
             <a:off x="17259300" y="9210675"/>
             <a:ext cx="152400" cy="200025"/>
           </a:xfrm>
@@ -7557,7 +7883,7 @@
           </a:prstGeom>
         </p:spPr>
         <p:txBody>
-          <a:bodyPr anchor="t" rtlCol="false" tIns="0" lIns="0" bIns="0" rIns="0" wrap="none">
+          <a:bodyPr wrap="none" lIns="0" tIns="0" rIns="0" bIns="0" rtlCol="0" anchor="t">
             <a:spAutoFit/>
           </a:bodyPr>
           <a:lstStyle/>
@@ -7571,37 +7897,37 @@
               </a:spcBef>
             </a:pPr>
             <a:r>
-              <a:rPr lang="en-US" sz="2000">
+              <a:rPr lang="en-US" sz="2000" b="1">
                 <a:solidFill>
                   <a:srgbClr val="000000"/>
                 </a:solidFill>
-                <a:latin typeface="Arial"/>
-                <a:ea typeface="Arial"/>
-                <a:cs typeface="Arial"/>
-                <a:sym typeface="Arial"/>
+                <a:latin typeface="Arial Bold"/>
+                <a:ea typeface="Arial Bold"/>
+                <a:cs typeface="Arial Bold"/>
+                <a:sym typeface="Arial Bold"/>
               </a:rPr>
-              <a:t>7</a:t>
-            </a:r>
-          </a:p>
-        </p:txBody>
-      </p:sp>
-      <p:sp>
-        <p:nvSpPr>
-          <p:cNvPr name="TextBox 11" id="11"/>
-          <p:cNvSpPr txBox="true"/>
+              <a:t>6</a:t>
+            </a:r>
+          </a:p>
+        </p:txBody>
+      </p:sp>
+      <p:sp>
+        <p:nvSpPr>
+          <p:cNvPr id="13" name="TextBox 13"/>
+          <p:cNvSpPr txBox="1"/>
           <p:nvPr/>
         </p:nvSpPr>
         <p:spPr>
-          <a:xfrm rot="0">
-            <a:off x="5876032" y="895350"/>
-            <a:ext cx="6535936" cy="1038227"/>
+          <a:xfrm>
+            <a:off x="5333583" y="895350"/>
+            <a:ext cx="7620834" cy="1038227"/>
           </a:xfrm>
           <a:prstGeom prst="rect">
             <a:avLst/>
           </a:prstGeom>
         </p:spPr>
         <p:txBody>
-          <a:bodyPr anchor="t" rtlCol="false" tIns="0" lIns="0" bIns="0" rIns="0">
+          <a:bodyPr lIns="0" tIns="0" rIns="0" bIns="0" rtlCol="0" anchor="t">
             <a:spAutoFit/>
           </a:bodyPr>
           <a:lstStyle/>
@@ -7615,7 +7941,7 @@
               </a:spcBef>
             </a:pPr>
             <a:r>
-              <a:rPr lang="en-US" b="true" sz="5999">
+              <a:rPr lang="en-US" sz="5999" b="1">
                 <a:solidFill>
                   <a:srgbClr val="7D1916"/>
                 </a:solidFill>
@@ -7624,42 +7950,42 @@
                 <a:cs typeface="Arial Bold"/>
                 <a:sym typeface="Arial Bold"/>
               </a:rPr>
-              <a:t>Pipeline Accuracy</a:t>
-            </a:r>
-          </a:p>
-        </p:txBody>
-      </p:sp>
-      <p:sp>
-        <p:nvSpPr>
-          <p:cNvPr name="TextBox 12" id="12"/>
-          <p:cNvSpPr txBox="true"/>
+              <a:t>Results: Quantitative</a:t>
+            </a:r>
+          </a:p>
+        </p:txBody>
+      </p:sp>
+      <p:sp>
+        <p:nvSpPr>
+          <p:cNvPr id="14" name="TextBox 14"/>
+          <p:cNvSpPr txBox="1"/>
           <p:nvPr/>
         </p:nvSpPr>
         <p:spPr>
-          <a:xfrm rot="0">
-            <a:off x="1028700" y="3111319"/>
-            <a:ext cx="8952027" cy="5753101"/>
+          <a:xfrm>
+            <a:off x="1028700" y="3312497"/>
+            <a:ext cx="6341745" cy="5338962"/>
           </a:xfrm>
           <a:prstGeom prst="rect">
             <a:avLst/>
           </a:prstGeom>
         </p:spPr>
         <p:txBody>
-          <a:bodyPr anchor="t" rtlCol="false" tIns="0" lIns="0" bIns="0" rIns="0">
+          <a:bodyPr lIns="0" tIns="0" rIns="0" bIns="0" rtlCol="0" anchor="t">
             <a:spAutoFit/>
           </a:bodyPr>
           <a:lstStyle/>
           <a:p>
             <a:pPr algn="l">
               <a:lnSpc>
-                <a:spcPts val="4199"/>
+                <a:spcPts val="4200"/>
               </a:lnSpc>
               <a:spcBef>
                 <a:spcPct val="0"/>
               </a:spcBef>
             </a:pPr>
             <a:r>
-              <a:rPr lang="en-US" b="true" sz="2999">
+              <a:rPr lang="en-US" sz="3000" b="1" dirty="0">
                 <a:solidFill>
                   <a:srgbClr val="000000"/>
                 </a:solidFill>
@@ -7668,25 +7994,13 @@
                 <a:cs typeface="Arial Bold"/>
                 <a:sym typeface="Arial Bold"/>
               </a:rPr>
-              <a:t>Key Observati</a:t>
-            </a:r>
-            <a:r>
-              <a:rPr lang="en-US" b="true" sz="2999">
-                <a:solidFill>
-                  <a:srgbClr val="000000"/>
-                </a:solidFill>
-                <a:latin typeface="Arial Bold"/>
-                <a:ea typeface="Arial Bold"/>
-                <a:cs typeface="Arial Bold"/>
-                <a:sym typeface="Arial Bold"/>
-              </a:rPr>
-              <a:t>ons</a:t>
-            </a:r>
-          </a:p>
-          <a:p>
-            <a:pPr algn="l" marL="647695" indent="-323848" lvl="1">
+              <a:t>Key Results</a:t>
+            </a:r>
+          </a:p>
+          <a:p>
+            <a:pPr marL="647702" lvl="1" indent="-323851" algn="l">
               <a:lnSpc>
-                <a:spcPts val="4199"/>
+                <a:spcPts val="4200"/>
               </a:lnSpc>
               <a:spcBef>
                 <a:spcPct val="0"/>
@@ -7695,7 +8009,19 @@
               <a:buChar char="•"/>
             </a:pPr>
             <a:r>
-              <a:rPr lang="en-US" sz="2999">
+              <a:rPr lang="en-US" sz="3000" b="1" dirty="0">
+                <a:solidFill>
+                  <a:srgbClr val="000000"/>
+                </a:solidFill>
+                <a:latin typeface="Arial Bold"/>
+                <a:ea typeface="Arial Bold"/>
+                <a:cs typeface="Arial Bold"/>
+                <a:sym typeface="Arial Bold"/>
+              </a:rPr>
+              <a:t>Dice:</a:t>
+            </a:r>
+            <a:r>
+              <a:rPr lang="en-US" sz="3000" dirty="0">
                 <a:solidFill>
                   <a:srgbClr val="000000"/>
                 </a:solidFill>
@@ -7704,13 +8030,13 @@
                 <a:cs typeface="Arial"/>
                 <a:sym typeface="Arial"/>
               </a:rPr>
-              <a:t>Predicted tumor regions generally match the reference region</a:t>
-            </a:r>
-          </a:p>
-          <a:p>
-            <a:pPr algn="l" marL="647695" indent="-323848" lvl="1">
+              <a:t> 0.665 ± 0.179</a:t>
+            </a:r>
+          </a:p>
+          <a:p>
+            <a:pPr marL="647702" lvl="1" indent="-323851" algn="l">
               <a:lnSpc>
-                <a:spcPts val="4199"/>
+                <a:spcPts val="4200"/>
               </a:lnSpc>
               <a:spcBef>
                 <a:spcPct val="0"/>
@@ -7719,7 +8045,19 @@
               <a:buChar char="•"/>
             </a:pPr>
             <a:r>
-              <a:rPr lang="en-US" sz="2999">
+              <a:rPr lang="en-US" sz="3000" b="1" dirty="0">
+                <a:solidFill>
+                  <a:srgbClr val="000000"/>
+                </a:solidFill>
+                <a:latin typeface="Arial Bold"/>
+                <a:ea typeface="Arial Bold"/>
+                <a:cs typeface="Arial Bold"/>
+                <a:sym typeface="Arial Bold"/>
+              </a:rPr>
+              <a:t>IoU:</a:t>
+            </a:r>
+            <a:r>
+              <a:rPr lang="en-US" sz="3000" dirty="0">
                 <a:solidFill>
                   <a:srgbClr val="000000"/>
                 </a:solidFill>
@@ -7728,13 +8066,13 @@
                 <a:cs typeface="Arial"/>
                 <a:sym typeface="Arial"/>
               </a:rPr>
-              <a:t>Under-segmentation is the main limitation</a:t>
-            </a:r>
-          </a:p>
-          <a:p>
-            <a:pPr algn="l" marL="647695" indent="-323848" lvl="1">
+              <a:t> 0.521 ± 0.183</a:t>
+            </a:r>
+          </a:p>
+          <a:p>
+            <a:pPr marL="647702" lvl="1" indent="-323851" algn="l">
               <a:lnSpc>
-                <a:spcPts val="4199"/>
+                <a:spcPts val="4200"/>
               </a:lnSpc>
               <a:spcBef>
                 <a:spcPct val="0"/>
@@ -7743,7 +8081,19 @@
               <a:buChar char="•"/>
             </a:pPr>
             <a:r>
-              <a:rPr lang="en-US" sz="2999">
+              <a:rPr lang="en-US" sz="3000" b="1" dirty="0">
+                <a:solidFill>
+                  <a:srgbClr val="000000"/>
+                </a:solidFill>
+                <a:latin typeface="Arial Bold"/>
+                <a:ea typeface="Arial Bold"/>
+                <a:cs typeface="Arial Bold"/>
+                <a:sym typeface="Arial Bold"/>
+              </a:rPr>
+              <a:t>Precision:</a:t>
+            </a:r>
+            <a:r>
+              <a:rPr lang="en-US" sz="3000" dirty="0">
                 <a:solidFill>
                   <a:srgbClr val="000000"/>
                 </a:solidFill>
@@ -7752,13 +8102,13 @@
                 <a:cs typeface="Arial"/>
                 <a:sym typeface="Arial"/>
               </a:rPr>
-              <a:t>Mean Precision: 0.787</a:t>
-            </a:r>
-          </a:p>
-          <a:p>
-            <a:pPr algn="l" marL="647695" indent="-323848" lvl="1">
+              <a:t> 0.787 ± 0.179</a:t>
+            </a:r>
+          </a:p>
+          <a:p>
+            <a:pPr marL="647702" lvl="1" indent="-323851" algn="l">
               <a:lnSpc>
-                <a:spcPts val="4199"/>
+                <a:spcPct val="100000"/>
               </a:lnSpc>
               <a:spcBef>
                 <a:spcPct val="0"/>
@@ -7767,7 +8117,19 @@
               <a:buChar char="•"/>
             </a:pPr>
             <a:r>
-              <a:rPr lang="en-US" sz="2999">
+              <a:rPr lang="en-US" sz="3000" b="1" dirty="0">
+                <a:solidFill>
+                  <a:srgbClr val="000000"/>
+                </a:solidFill>
+                <a:latin typeface="Arial Bold"/>
+                <a:ea typeface="Arial Bold"/>
+                <a:cs typeface="Arial Bold"/>
+                <a:sym typeface="Arial Bold"/>
+              </a:rPr>
+              <a:t>Recall:</a:t>
+            </a:r>
+            <a:r>
+              <a:rPr lang="en-US" sz="3000" dirty="0">
                 <a:solidFill>
                   <a:srgbClr val="000000"/>
                 </a:solidFill>
@@ -7776,13 +8138,13 @@
                 <a:cs typeface="Arial"/>
                 <a:sym typeface="Arial"/>
               </a:rPr>
-              <a:t>Mean Recall: 0.600</a:t>
-            </a:r>
-          </a:p>
-          <a:p>
-            <a:pPr algn="l" marL="647695" indent="-323848" lvl="1">
+              <a:t> 0.600 ± 0.211</a:t>
+            </a:r>
+          </a:p>
+          <a:p>
+            <a:pPr marL="647702" lvl="1" indent="-323851">
               <a:lnSpc>
-                <a:spcPts val="4199"/>
+                <a:spcPts val="4200"/>
               </a:lnSpc>
               <a:spcBef>
                 <a:spcPct val="0"/>
@@ -7791,19 +8153,7 @@
               <a:buChar char="•"/>
             </a:pPr>
             <a:r>
-              <a:rPr lang="en-US" b="true" sz="2999">
-                <a:solidFill>
-                  <a:srgbClr val="000000"/>
-                </a:solidFill>
-                <a:latin typeface="Arial Bold"/>
-                <a:ea typeface="Arial Bold"/>
-                <a:cs typeface="Arial Bold"/>
-                <a:sym typeface="Arial Bold"/>
-              </a:rPr>
-              <a:t>13 cases</a:t>
-            </a:r>
-            <a:r>
-              <a:rPr lang="en-US" sz="2999">
+              <a:rPr lang="en-US" sz="3000" b="1" dirty="0">
                 <a:solidFill>
                   <a:srgbClr val="000000"/>
                 </a:solidFill>
@@ -7812,13 +8162,34 @@
                 <a:cs typeface="Arial"/>
                 <a:sym typeface="Arial"/>
               </a:rPr>
-              <a:t> → under-segmentation</a:t>
-            </a:r>
-          </a:p>
-          <a:p>
-            <a:pPr algn="l" marL="647695" indent="-323848" lvl="1">
+              <a:t>ASSD: </a:t>
+            </a:r>
+            <a:r>
+              <a:rPr lang="en-US" sz="3000" dirty="0">
+                <a:solidFill>
+                  <a:srgbClr val="000000"/>
+                </a:solidFill>
+                <a:latin typeface="Arial"/>
+                <a:ea typeface="Arial"/>
+                <a:cs typeface="Arial"/>
+                <a:sym typeface="Arial"/>
+              </a:rPr>
+              <a:t>6.96 ± 5.03 (mm)</a:t>
+            </a:r>
+            <a:endParaRPr lang="en-US" sz="3000" b="1" dirty="0">
+              <a:solidFill>
+                <a:srgbClr val="000000"/>
+              </a:solidFill>
+              <a:latin typeface="Arial"/>
+              <a:ea typeface="Arial"/>
+              <a:cs typeface="Arial"/>
+              <a:sym typeface="Arial"/>
+            </a:endParaRPr>
+          </a:p>
+          <a:p>
+            <a:pPr marL="647702" lvl="1" indent="-323851" algn="l">
               <a:lnSpc>
-                <a:spcPts val="4199"/>
+                <a:spcPts val="4200"/>
               </a:lnSpc>
               <a:spcBef>
                 <a:spcPct val="0"/>
@@ -7827,7 +8198,7 @@
               <a:buChar char="•"/>
             </a:pPr>
             <a:r>
-              <a:rPr lang="en-US" b="true" sz="2999">
+              <a:rPr lang="en-US" sz="3000" b="1" dirty="0">
                 <a:solidFill>
                   <a:srgbClr val="000000"/>
                 </a:solidFill>
@@ -7836,10 +8207,10 @@
                 <a:cs typeface="Arial Bold"/>
                 <a:sym typeface="Arial Bold"/>
               </a:rPr>
-              <a:t>3 cases</a:t>
-            </a:r>
-            <a:r>
-              <a:rPr lang="en-US" sz="2999">
+              <a:t>Pooled Dice:</a:t>
+            </a:r>
+            <a:r>
+              <a:rPr lang="en-US" sz="3000" dirty="0">
                 <a:solidFill>
                   <a:srgbClr val="000000"/>
                 </a:solidFill>
@@ -7848,13 +8219,13 @@
                 <a:cs typeface="Arial"/>
                 <a:sym typeface="Arial"/>
               </a:rPr>
-              <a:t> → mixed boundary errors</a:t>
-            </a:r>
-          </a:p>
-          <a:p>
-            <a:pPr algn="l" marL="647695" indent="-323848" lvl="1">
+              <a:t> 0.733</a:t>
+            </a:r>
+          </a:p>
+          <a:p>
+            <a:pPr marL="647702" lvl="1" indent="-323851" algn="l">
               <a:lnSpc>
-                <a:spcPts val="4199"/>
+                <a:spcPts val="4200"/>
               </a:lnSpc>
               <a:spcBef>
                 <a:spcPct val="0"/>
@@ -7863,19 +8234,7 @@
               <a:buChar char="•"/>
             </a:pPr>
             <a:r>
-              <a:rPr lang="en-US" b="true" sz="2999">
-                <a:solidFill>
-                  <a:srgbClr val="000000"/>
-                </a:solidFill>
-                <a:latin typeface="Arial Bold"/>
-                <a:ea typeface="Arial Bold"/>
-                <a:cs typeface="Arial Bold"/>
-                <a:sym typeface="Arial Bold"/>
-              </a:rPr>
-              <a:t>2 cases</a:t>
-            </a:r>
-            <a:r>
-              <a:rPr lang="en-US" sz="2999">
+              <a:rPr lang="en-US" sz="3000" dirty="0">
                 <a:solidFill>
                   <a:srgbClr val="000000"/>
                 </a:solidFill>
@@ -7884,13 +8243,13 @@
                 <a:cs typeface="Arial"/>
                 <a:sym typeface="Arial"/>
               </a:rPr>
-              <a:t> → over-segmentation</a:t>
-            </a:r>
-          </a:p>
-          <a:p>
-            <a:pPr algn="l" marL="647695" indent="-323848" lvl="1">
+              <a:t>Dice ≥ 0.50 → 16/20 cases (80%)</a:t>
+            </a:r>
+          </a:p>
+          <a:p>
+            <a:pPr marL="647702" lvl="1" indent="-323851" algn="l">
               <a:lnSpc>
-                <a:spcPts val="4199"/>
+                <a:spcPts val="4200"/>
               </a:lnSpc>
               <a:spcBef>
                 <a:spcPct val="0"/>
@@ -7899,19 +8258,7 @@
               <a:buChar char="•"/>
             </a:pPr>
             <a:r>
-              <a:rPr lang="en-US" b="true" sz="2999">
-                <a:solidFill>
-                  <a:srgbClr val="000000"/>
-                </a:solidFill>
-                <a:latin typeface="Arial Bold"/>
-                <a:ea typeface="Arial Bold"/>
-                <a:cs typeface="Arial Bold"/>
-                <a:sym typeface="Arial Bold"/>
-              </a:rPr>
-              <a:t>2 cases</a:t>
-            </a:r>
-            <a:r>
-              <a:rPr lang="en-US" sz="2999">
+              <a:rPr lang="en-US" sz="3000" dirty="0">
                 <a:solidFill>
                   <a:srgbClr val="000000"/>
                 </a:solidFill>
@@ -7920,66 +8267,29 @@
                 <a:cs typeface="Arial"/>
                 <a:sym typeface="Arial"/>
               </a:rPr>
-              <a:t> → excellent overlap</a:t>
+              <a:t>Dice ≥ 0.70 → 11/20 cases (55%)</a:t>
             </a:r>
           </a:p>
           <a:p>
             <a:pPr algn="l">
               <a:lnSpc>
-                <a:spcPts val="4199"/>
+                <a:spcPts val="4200"/>
               </a:lnSpc>
               <a:spcBef>
                 <a:spcPct val="0"/>
               </a:spcBef>
             </a:pPr>
-          </a:p>
-        </p:txBody>
-      </p:sp>
-      <p:sp>
-        <p:nvSpPr>
-          <p:cNvPr name="Freeform 13" id="13"/>
-          <p:cNvSpPr/>
-          <p:nvPr/>
-        </p:nvSpPr>
-        <p:spPr>
-          <a:xfrm flipH="false" flipV="false" rot="0">
-            <a:off x="9599670" y="2564958"/>
-            <a:ext cx="6912497" cy="6912497"/>
-          </a:xfrm>
-          <a:custGeom>
-            <a:avLst/>
-            <a:gdLst/>
-            <a:ahLst/>
-            <a:cxnLst/>
-            <a:rect r="r" b="b" t="t" l="l"/>
-            <a:pathLst>
-              <a:path h="6912497" w="6912497">
-                <a:moveTo>
-                  <a:pt x="0" y="0"/>
-                </a:moveTo>
-                <a:lnTo>
-                  <a:pt x="6912497" y="0"/>
-                </a:lnTo>
-                <a:lnTo>
-                  <a:pt x="6912497" y="6912497"/>
-                </a:lnTo>
-                <a:lnTo>
-                  <a:pt x="0" y="6912497"/>
-                </a:lnTo>
-                <a:lnTo>
-                  <a:pt x="0" y="0"/>
-                </a:lnTo>
-                <a:close/>
-              </a:path>
-            </a:pathLst>
-          </a:custGeom>
-          <a:blipFill>
-            <a:blip r:embed="rId11"/>
-            <a:stretch>
-              <a:fillRect l="0" t="0" r="0" b="0"/>
-            </a:stretch>
-          </a:blipFill>
-        </p:spPr>
+            <a:endParaRPr lang="en-US" sz="3000" dirty="0">
+              <a:solidFill>
+                <a:srgbClr val="000000"/>
+              </a:solidFill>
+              <a:latin typeface="Arial"/>
+              <a:ea typeface="Arial"/>
+              <a:cs typeface="Arial"/>
+              <a:sym typeface="Arial"/>
+            </a:endParaRPr>
+          </a:p>
+        </p:txBody>
       </p:sp>
     </p:spTree>
   </p:cSld>
@@ -7989,14 +8299,15 @@
 </p:sld>
 </file>
 
-<file path=ppt/slides/slide8.xml><?xml version="1.0" encoding="utf-8"?>
-<p:sld xmlns:p="http://schemas.openxmlformats.org/presentationml/2006/main" xmlns:a="http://schemas.openxmlformats.org/drawingml/2006/main" xmlns:r="http://schemas.openxmlformats.org/officeDocument/2006/relationships">
+<file path=ppt/slides/slide7.xml><?xml version="1.0" encoding="utf-8"?>
+<p:sld xmlns:a="http://schemas.openxmlformats.org/drawingml/2006/main" xmlns:r="http://schemas.openxmlformats.org/officeDocument/2006/relationships" xmlns:p="http://schemas.openxmlformats.org/presentationml/2006/main">
   <p:cSld>
     <p:bg>
       <p:bgPr>
         <a:solidFill>
           <a:srgbClr val="F2F1EE"/>
         </a:solidFill>
+        <a:effectLst/>
       </p:bgPr>
     </p:bg>
     <p:spTree>
@@ -8015,12 +8326,12 @@
       </p:grpSpPr>
       <p:sp>
         <p:nvSpPr>
-          <p:cNvPr name="Freeform 2" id="2"/>
+          <p:cNvPr id="2" name="Freeform 2"/>
           <p:cNvSpPr/>
           <p:nvPr/>
         </p:nvSpPr>
         <p:spPr>
-          <a:xfrm flipH="false" flipV="false" rot="0">
+          <a:xfrm>
             <a:off x="2310233" y="10132980"/>
             <a:ext cx="13861398" cy="154020"/>
           </a:xfrm>
@@ -8029,9 +8340,9 @@
             <a:gdLst/>
             <a:ahLst/>
             <a:cxnLst/>
-            <a:rect r="r" b="b" t="t" l="l"/>
+            <a:rect l="l" t="t" r="r" b="b"/>
             <a:pathLst>
-              <a:path h="154020" w="13861398">
+              <a:path w="13861398" h="154020">
                 <a:moveTo>
                   <a:pt x="0" y="0"/>
                 </a:moveTo>
@@ -8052,7 +8363,66 @@
             </a:pathLst>
           </a:custGeom>
           <a:blipFill>
-            <a:blip r:embed="rId2">
+            <a:blip>
+              <a:extLst>
+                <a:ext uri="{96DAC541-7B7A-43D3-8B79-37D633B846F1}">
+                  <asvg:svgBlip xmlns:asvg="http://schemas.microsoft.com/office/drawing/2016/SVG/main" r:embed="rId2"/>
+                </a:ext>
+              </a:extLst>
+            </a:blip>
+            <a:stretch>
+              <a:fillRect/>
+            </a:stretch>
+          </a:blipFill>
+        </p:spPr>
+        <p:txBody>
+          <a:bodyPr/>
+          <a:lstStyle/>
+          <a:p>
+            <a:endParaRPr lang="en-IN"/>
+          </a:p>
+        </p:txBody>
+      </p:sp>
+      <p:sp>
+        <p:nvSpPr>
+          <p:cNvPr id="3" name="Freeform 3"/>
+          <p:cNvSpPr/>
+          <p:nvPr/>
+        </p:nvSpPr>
+        <p:spPr>
+          <a:xfrm>
+            <a:off x="0" y="10132980"/>
+            <a:ext cx="3939395" cy="154020"/>
+          </a:xfrm>
+          <a:custGeom>
+            <a:avLst/>
+            <a:gdLst/>
+            <a:ahLst/>
+            <a:cxnLst/>
+            <a:rect l="l" t="t" r="r" b="b"/>
+            <a:pathLst>
+              <a:path w="3939395" h="154020">
+                <a:moveTo>
+                  <a:pt x="0" y="0"/>
+                </a:moveTo>
+                <a:lnTo>
+                  <a:pt x="3939395" y="0"/>
+                </a:lnTo>
+                <a:lnTo>
+                  <a:pt x="3939395" y="154020"/>
+                </a:lnTo>
+                <a:lnTo>
+                  <a:pt x="0" y="154020"/>
+                </a:lnTo>
+                <a:lnTo>
+                  <a:pt x="0" y="0"/>
+                </a:lnTo>
+                <a:close/>
+              </a:path>
+            </a:pathLst>
+          </a:custGeom>
+          <a:blipFill>
+            <a:blip>
               <a:extLst>
                 <a:ext uri="{96DAC541-7B7A-43D3-8B79-37D633B846F1}">
                   <asvg:svgBlip xmlns:asvg="http://schemas.microsoft.com/office/drawing/2016/SVG/main" r:embed="rId3"/>
@@ -8060,20 +8430,27 @@
               </a:extLst>
             </a:blip>
             <a:stretch>
-              <a:fillRect l="0" t="0" r="0" b="0"/>
+              <a:fillRect/>
             </a:stretch>
           </a:blipFill>
         </p:spPr>
-      </p:sp>
-      <p:sp>
-        <p:nvSpPr>
-          <p:cNvPr name="Freeform 3" id="3"/>
+        <p:txBody>
+          <a:bodyPr/>
+          <a:lstStyle/>
+          <a:p>
+            <a:endParaRPr lang="en-IN"/>
+          </a:p>
+        </p:txBody>
+      </p:sp>
+      <p:sp>
+        <p:nvSpPr>
+          <p:cNvPr id="4" name="Freeform 4"/>
           <p:cNvSpPr/>
           <p:nvPr/>
         </p:nvSpPr>
         <p:spPr>
-          <a:xfrm flipH="false" flipV="false" rot="0">
-            <a:off x="0" y="10132980"/>
+          <a:xfrm>
+            <a:off x="14542469" y="10132980"/>
             <a:ext cx="3939395" cy="154020"/>
           </a:xfrm>
           <a:custGeom>
@@ -8081,9 +8458,9 @@
             <a:gdLst/>
             <a:ahLst/>
             <a:cxnLst/>
-            <a:rect r="r" b="b" t="t" l="l"/>
+            <a:rect l="l" t="t" r="r" b="b"/>
             <a:pathLst>
-              <a:path h="154020" w="3939395">
+              <a:path w="3939395" h="154020">
                 <a:moveTo>
                   <a:pt x="0" y="0"/>
                 </a:moveTo>
@@ -8104,79 +8481,34 @@
             </a:pathLst>
           </a:custGeom>
           <a:blipFill>
-            <a:blip r:embed="rId4">
+            <a:blip>
               <a:extLst>
                 <a:ext uri="{96DAC541-7B7A-43D3-8B79-37D633B846F1}">
-                  <asvg:svgBlip xmlns:asvg="http://schemas.microsoft.com/office/drawing/2016/SVG/main" r:embed="rId5"/>
+                  <asvg:svgBlip xmlns:asvg="http://schemas.microsoft.com/office/drawing/2016/SVG/main" r:embed="rId4"/>
                 </a:ext>
               </a:extLst>
             </a:blip>
             <a:stretch>
-              <a:fillRect l="0" t="0" r="0" b="0"/>
+              <a:fillRect/>
             </a:stretch>
           </a:blipFill>
         </p:spPr>
-      </p:sp>
-      <p:sp>
-        <p:nvSpPr>
-          <p:cNvPr name="Freeform 4" id="4"/>
-          <p:cNvSpPr/>
-          <p:nvPr/>
-        </p:nvSpPr>
-        <p:spPr>
-          <a:xfrm flipH="false" flipV="false" rot="0">
-            <a:off x="14542469" y="10132980"/>
-            <a:ext cx="3939395" cy="154020"/>
-          </a:xfrm>
-          <a:custGeom>
-            <a:avLst/>
-            <a:gdLst/>
-            <a:ahLst/>
-            <a:cxnLst/>
-            <a:rect r="r" b="b" t="t" l="l"/>
-            <a:pathLst>
-              <a:path h="154020" w="3939395">
-                <a:moveTo>
-                  <a:pt x="0" y="0"/>
-                </a:moveTo>
-                <a:lnTo>
-                  <a:pt x="3939395" y="0"/>
-                </a:lnTo>
-                <a:lnTo>
-                  <a:pt x="3939395" y="154020"/>
-                </a:lnTo>
-                <a:lnTo>
-                  <a:pt x="0" y="154020"/>
-                </a:lnTo>
-                <a:lnTo>
-                  <a:pt x="0" y="0"/>
-                </a:lnTo>
-                <a:close/>
-              </a:path>
-            </a:pathLst>
-          </a:custGeom>
-          <a:blipFill>
-            <a:blip r:embed="rId4">
-              <a:extLst>
-                <a:ext uri="{96DAC541-7B7A-43D3-8B79-37D633B846F1}">
-                  <asvg:svgBlip xmlns:asvg="http://schemas.microsoft.com/office/drawing/2016/SVG/main" r:embed="rId6"/>
-                </a:ext>
-              </a:extLst>
-            </a:blip>
-            <a:stretch>
-              <a:fillRect l="0" t="0" r="0" b="0"/>
-            </a:stretch>
-          </a:blipFill>
-        </p:spPr>
+        <p:txBody>
+          <a:bodyPr/>
+          <a:lstStyle/>
+          <a:p>
+            <a:endParaRPr lang="en-IN"/>
+          </a:p>
+        </p:txBody>
       </p:sp>
       <p:grpSp>
         <p:nvGrpSpPr>
-          <p:cNvPr name="Group 5" id="5"/>
+          <p:cNvPr id="5" name="Group 5"/>
           <p:cNvGrpSpPr/>
           <p:nvPr/>
         </p:nvGrpSpPr>
         <p:grpSpPr>
-          <a:xfrm rot="0">
+          <a:xfrm>
             <a:off x="0" y="10132980"/>
             <a:ext cx="18481864" cy="154020"/>
             <a:chOff x="0" y="0"/>
@@ -8185,12 +8517,12 @@
         </p:grpSpPr>
         <p:sp>
           <p:nvSpPr>
-            <p:cNvPr name="Freeform 6" id="6"/>
+            <p:cNvPr id="6" name="Freeform 6"/>
             <p:cNvSpPr/>
             <p:nvPr/>
           </p:nvSpPr>
           <p:spPr>
-            <a:xfrm flipH="false" flipV="false" rot="0">
+            <a:xfrm>
               <a:off x="0" y="0"/>
               <a:ext cx="16256000" cy="135509"/>
             </a:xfrm>
@@ -8199,9 +8531,9 @@
               <a:gdLst/>
               <a:ahLst/>
               <a:cxnLst/>
-              <a:rect r="r" b="b" t="t" l="l"/>
+              <a:rect l="l" t="t" r="r" b="b"/>
               <a:pathLst>
-                <a:path h="135509" w="16256000">
+                <a:path w="16256000" h="135509">
                   <a:moveTo>
                     <a:pt x="0" y="0"/>
                   </a:moveTo>
@@ -8222,22 +8554,29 @@
               </a:pathLst>
             </a:custGeom>
             <a:blipFill>
-              <a:blip r:embed="rId7"/>
+              <a:blip r:embed="rId5"/>
               <a:stretch>
-                <a:fillRect l="0" t="0" r="0" b="28"/>
+                <a:fillRect b="28"/>
               </a:stretch>
             </a:blipFill>
           </p:spPr>
+          <p:txBody>
+            <a:bodyPr/>
+            <a:lstStyle/>
+            <a:p>
+              <a:endParaRPr lang="en-IN"/>
+            </a:p>
+          </p:txBody>
         </p:sp>
       </p:grpSp>
       <p:sp>
         <p:nvSpPr>
-          <p:cNvPr name="Freeform 7" id="7"/>
+          <p:cNvPr id="7" name="Freeform 7"/>
           <p:cNvSpPr/>
           <p:nvPr/>
         </p:nvSpPr>
         <p:spPr>
-          <a:xfrm flipH="false" flipV="false" rot="0">
+          <a:xfrm>
             <a:off x="543930" y="9045394"/>
             <a:ext cx="2070431" cy="908008"/>
           </a:xfrm>
@@ -8246,9 +8585,9 @@
             <a:gdLst/>
             <a:ahLst/>
             <a:cxnLst/>
-            <a:rect r="r" b="b" t="t" l="l"/>
+            <a:rect l="l" t="t" r="r" b="b"/>
             <a:pathLst>
-              <a:path h="908008" w="2070431">
+              <a:path w="2070431" h="908008">
                 <a:moveTo>
                   <a:pt x="0" y="0"/>
                 </a:moveTo>
@@ -8269,27 +8608,34 @@
             </a:pathLst>
           </a:custGeom>
           <a:blipFill>
-            <a:blip r:embed="rId8">
+            <a:blip>
               <a:extLst>
                 <a:ext uri="{96DAC541-7B7A-43D3-8B79-37D633B846F1}">
-                  <asvg:svgBlip xmlns:asvg="http://schemas.microsoft.com/office/drawing/2016/SVG/main" r:embed="rId9"/>
+                  <asvg:svgBlip xmlns:asvg="http://schemas.microsoft.com/office/drawing/2016/SVG/main" r:embed="rId6"/>
                 </a:ext>
               </a:extLst>
             </a:blip>
             <a:stretch>
-              <a:fillRect l="0" t="0" r="0" b="0"/>
+              <a:fillRect/>
             </a:stretch>
           </a:blipFill>
         </p:spPr>
+        <p:txBody>
+          <a:bodyPr/>
+          <a:lstStyle/>
+          <a:p>
+            <a:endParaRPr lang="en-IN"/>
+          </a:p>
+        </p:txBody>
       </p:sp>
       <p:grpSp>
         <p:nvGrpSpPr>
-          <p:cNvPr name="Group 8" id="8"/>
+          <p:cNvPr id="8" name="Group 8"/>
           <p:cNvGrpSpPr/>
           <p:nvPr/>
         </p:nvGrpSpPr>
         <p:grpSpPr>
-          <a:xfrm rot="0">
+          <a:xfrm>
             <a:off x="543930" y="9045394"/>
             <a:ext cx="2070431" cy="944640"/>
             <a:chOff x="0" y="0"/>
@@ -8298,12 +8644,12 @@
         </p:grpSpPr>
         <p:sp>
           <p:nvSpPr>
-            <p:cNvPr name="Freeform 9" id="9"/>
+            <p:cNvPr id="9" name="Freeform 9"/>
             <p:cNvSpPr/>
             <p:nvPr/>
           </p:nvSpPr>
           <p:spPr>
-            <a:xfrm flipH="false" flipV="false" rot="0">
+            <a:xfrm>
               <a:off x="0" y="0"/>
               <a:ext cx="1821053" cy="830923"/>
             </a:xfrm>
@@ -8312,9 +8658,9 @@
               <a:gdLst/>
               <a:ahLst/>
               <a:cxnLst/>
-              <a:rect r="r" b="b" t="t" l="l"/>
+              <a:rect l="l" t="t" r="r" b="b"/>
               <a:pathLst>
-                <a:path h="830923" w="1821053">
+                <a:path w="1821053" h="830923">
                   <a:moveTo>
                     <a:pt x="0" y="0"/>
                   </a:moveTo>
@@ -8335,22 +8681,29 @@
               </a:pathLst>
             </a:custGeom>
             <a:blipFill>
-              <a:blip r:embed="rId10"/>
+              <a:blip r:embed="rId7"/>
               <a:stretch>
                 <a:fillRect l="-72565" t="-156165" r="-72141" b="-156511"/>
               </a:stretch>
             </a:blipFill>
           </p:spPr>
+          <p:txBody>
+            <a:bodyPr/>
+            <a:lstStyle/>
+            <a:p>
+              <a:endParaRPr lang="en-IN"/>
+            </a:p>
+          </p:txBody>
         </p:sp>
       </p:grpSp>
       <p:sp>
         <p:nvSpPr>
-          <p:cNvPr name="TextBox 10" id="10"/>
-          <p:cNvSpPr txBox="true"/>
+          <p:cNvPr id="10" name="TextBox 10"/>
+          <p:cNvSpPr txBox="1"/>
           <p:nvPr/>
         </p:nvSpPr>
         <p:spPr>
-          <a:xfrm rot="0">
+          <a:xfrm>
             <a:off x="17259300" y="9210675"/>
             <a:ext cx="152400" cy="200025"/>
           </a:xfrm>
@@ -8359,7 +8712,7 @@
           </a:prstGeom>
         </p:spPr>
         <p:txBody>
-          <a:bodyPr anchor="t" rtlCol="false" tIns="0" lIns="0" bIns="0" rIns="0" wrap="none">
+          <a:bodyPr wrap="none" lIns="0" tIns="0" rIns="0" bIns="0" rtlCol="0" anchor="t">
             <a:spAutoFit/>
           </a:bodyPr>
           <a:lstStyle/>
@@ -8382,28 +8735,28 @@
                 <a:cs typeface="Arial"/>
                 <a:sym typeface="Arial"/>
               </a:rPr>
-              <a:t>8</a:t>
-            </a:r>
-          </a:p>
-        </p:txBody>
-      </p:sp>
-      <p:sp>
-        <p:nvSpPr>
-          <p:cNvPr name="TextBox 11" id="11"/>
-          <p:cNvSpPr txBox="true"/>
+              <a:t>7</a:t>
+            </a:r>
+          </a:p>
+        </p:txBody>
+      </p:sp>
+      <p:sp>
+        <p:nvSpPr>
+          <p:cNvPr id="11" name="TextBox 11"/>
+          <p:cNvSpPr txBox="1"/>
           <p:nvPr/>
         </p:nvSpPr>
         <p:spPr>
-          <a:xfrm rot="0">
-            <a:off x="7407890" y="895350"/>
-            <a:ext cx="3472220" cy="1038227"/>
+          <a:xfrm>
+            <a:off x="4667986" y="859669"/>
+            <a:ext cx="8952027" cy="983090"/>
           </a:xfrm>
           <a:prstGeom prst="rect">
             <a:avLst/>
           </a:prstGeom>
         </p:spPr>
         <p:txBody>
-          <a:bodyPr anchor="t" rtlCol="false" tIns="0" lIns="0" bIns="0" rIns="0">
+          <a:bodyPr wrap="square" lIns="0" tIns="0" rIns="0" bIns="0" rtlCol="0" anchor="t">
             <a:spAutoFit/>
           </a:bodyPr>
           <a:lstStyle/>
@@ -8417,7 +8770,7 @@
               </a:spcBef>
             </a:pPr>
             <a:r>
-              <a:rPr lang="en-US" b="true" sz="5999">
+              <a:rPr lang="en-US" sz="5999" b="1" dirty="0">
                 <a:solidFill>
                   <a:srgbClr val="7D1916"/>
                 </a:solidFill>
@@ -8426,39 +8779,42 @@
                 <a:cs typeface="Arial Bold"/>
                 <a:sym typeface="Arial Bold"/>
               </a:rPr>
-              <a:t>Next Plan</a:t>
-            </a:r>
-          </a:p>
-        </p:txBody>
-      </p:sp>
-      <p:sp>
-        <p:nvSpPr>
-          <p:cNvPr name="TextBox 12" id="12"/>
-          <p:cNvSpPr txBox="true"/>
+              <a:t>Pipeline Accuracy</a:t>
+            </a:r>
+          </a:p>
+        </p:txBody>
+      </p:sp>
+      <p:sp>
+        <p:nvSpPr>
+          <p:cNvPr id="12" name="TextBox 12"/>
+          <p:cNvSpPr txBox="1"/>
           <p:nvPr/>
         </p:nvSpPr>
         <p:spPr>
-          <a:xfrm rot="0">
-            <a:off x="3896618" y="3238500"/>
-            <a:ext cx="10494764" cy="3733800"/>
+          <a:xfrm>
+            <a:off x="1028700" y="3111319"/>
+            <a:ext cx="8952027" cy="5753101"/>
           </a:xfrm>
           <a:prstGeom prst="rect">
             <a:avLst/>
           </a:prstGeom>
         </p:spPr>
         <p:txBody>
-          <a:bodyPr anchor="t" rtlCol="false" tIns="0" lIns="0" bIns="0" rIns="0">
+          <a:bodyPr lIns="0" tIns="0" rIns="0" bIns="0" rtlCol="0" anchor="t">
             <a:spAutoFit/>
           </a:bodyPr>
           <a:lstStyle/>
           <a:p>
             <a:pPr algn="l">
               <a:lnSpc>
-                <a:spcPts val="4200"/>
+                <a:spcPts val="4199"/>
               </a:lnSpc>
+              <a:spcBef>
+                <a:spcPct val="0"/>
+              </a:spcBef>
             </a:pPr>
             <a:r>
-              <a:rPr lang="en-US" sz="3000" b="true">
+              <a:rPr lang="en-US" sz="2999" b="1" dirty="0">
                 <a:solidFill>
                   <a:srgbClr val="000000"/>
                 </a:solidFill>
@@ -8467,13 +8823,13 @@
                 <a:cs typeface="Arial Bold"/>
                 <a:sym typeface="Arial Bold"/>
               </a:rPr>
-              <a:t>Next Phase</a:t>
-            </a:r>
-          </a:p>
-          <a:p>
-            <a:pPr algn="l" marL="647700" indent="-323850" lvl="1">
+              <a:t>Key Observations</a:t>
+            </a:r>
+          </a:p>
+          <a:p>
+            <a:pPr marL="647695" lvl="1" indent="-323848" algn="l">
               <a:lnSpc>
-                <a:spcPts val="4200"/>
+                <a:spcPts val="4199"/>
               </a:lnSpc>
               <a:spcBef>
                 <a:spcPct val="0"/>
@@ -8482,7 +8838,7 @@
               <a:buChar char="•"/>
             </a:pPr>
             <a:r>
-              <a:rPr lang="en-US" sz="3000">
+              <a:rPr lang="en-US" sz="2999" dirty="0">
                 <a:solidFill>
                   <a:srgbClr val="000000"/>
                 </a:solidFill>
@@ -8491,25 +8847,13 @@
                 <a:cs typeface="Arial"/>
                 <a:sym typeface="Arial"/>
               </a:rPr>
-              <a:t>Improve v</a:t>
-            </a:r>
-            <a:r>
-              <a:rPr lang="en-US" sz="3000">
-                <a:solidFill>
-                  <a:srgbClr val="000000"/>
-                </a:solidFill>
-                <a:latin typeface="Arial"/>
-                <a:ea typeface="Arial"/>
-                <a:cs typeface="Arial"/>
-                <a:sym typeface="Arial"/>
-              </a:rPr>
-              <a:t>oxel selection</a:t>
-            </a:r>
-          </a:p>
-          <a:p>
-            <a:pPr algn="l" marL="647700" indent="-323850" lvl="1">
+              <a:t>Predicted tumor regions generally match the reference region</a:t>
+            </a:r>
+          </a:p>
+          <a:p>
+            <a:pPr marL="647695" lvl="1" indent="-323848" algn="l">
               <a:lnSpc>
-                <a:spcPts val="4200"/>
+                <a:spcPts val="4199"/>
               </a:lnSpc>
               <a:spcBef>
                 <a:spcPct val="0"/>
@@ -8518,7 +8862,7 @@
               <a:buChar char="•"/>
             </a:pPr>
             <a:r>
-              <a:rPr lang="en-US" sz="3000">
+              <a:rPr lang="en-US" sz="2999" dirty="0">
                 <a:solidFill>
                   <a:srgbClr val="000000"/>
                 </a:solidFill>
@@ -8527,13 +8871,13 @@
                 <a:cs typeface="Arial"/>
                 <a:sym typeface="Arial"/>
               </a:rPr>
-              <a:t>Reduce under-segmentation</a:t>
-            </a:r>
-          </a:p>
-          <a:p>
-            <a:pPr algn="l" marL="647700" indent="-323850" lvl="1">
+              <a:t>Under-segmentation is the main limitation</a:t>
+            </a:r>
+          </a:p>
+          <a:p>
+            <a:pPr marL="647695" lvl="1" indent="-323848" algn="l">
               <a:lnSpc>
-                <a:spcPts val="4200"/>
+                <a:spcPts val="4199"/>
               </a:lnSpc>
               <a:spcBef>
                 <a:spcPct val="0"/>
@@ -8542,7 +8886,7 @@
               <a:buChar char="•"/>
             </a:pPr>
             <a:r>
-              <a:rPr lang="en-US" sz="3000">
+              <a:rPr lang="en-US" sz="2999" dirty="0">
                 <a:solidFill>
                   <a:srgbClr val="000000"/>
                 </a:solidFill>
@@ -8551,13 +8895,13 @@
                 <a:cs typeface="Arial"/>
                 <a:sym typeface="Arial"/>
               </a:rPr>
-              <a:t>Improve boundary accuracy</a:t>
-            </a:r>
-          </a:p>
-          <a:p>
-            <a:pPr algn="l" marL="647700" indent="-323850" lvl="1">
+              <a:t>Mean Precision: 0.787</a:t>
+            </a:r>
+          </a:p>
+          <a:p>
+            <a:pPr marL="647695" lvl="1" indent="-323848" algn="l">
               <a:lnSpc>
-                <a:spcPts val="4200"/>
+                <a:spcPts val="4199"/>
               </a:lnSpc>
               <a:spcBef>
                 <a:spcPct val="0"/>
@@ -8566,7 +8910,7 @@
               <a:buChar char="•"/>
             </a:pPr>
             <a:r>
-              <a:rPr lang="en-US" sz="3000">
+              <a:rPr lang="en-US" sz="2999" dirty="0">
                 <a:solidFill>
                   <a:srgbClr val="000000"/>
                 </a:solidFill>
@@ -8575,13 +8919,13 @@
                 <a:cs typeface="Arial"/>
                 <a:sym typeface="Arial"/>
               </a:rPr>
-              <a:t>Optimize the current segmentation pipeline</a:t>
-            </a:r>
-          </a:p>
-          <a:p>
-            <a:pPr algn="l" marL="647700" indent="-323850" lvl="1">
+              <a:t>Mean Recall: 0.600</a:t>
+            </a:r>
+          </a:p>
+          <a:p>
+            <a:pPr marL="647695" lvl="1" indent="-323848" algn="l">
               <a:lnSpc>
-                <a:spcPts val="4200"/>
+                <a:spcPts val="4199"/>
               </a:lnSpc>
               <a:spcBef>
                 <a:spcPct val="0"/>
@@ -8590,7 +8934,19 @@
               <a:buChar char="•"/>
             </a:pPr>
             <a:r>
-              <a:rPr lang="en-US" sz="3000">
+              <a:rPr lang="en-US" sz="2999" b="1" dirty="0">
+                <a:solidFill>
+                  <a:srgbClr val="000000"/>
+                </a:solidFill>
+                <a:latin typeface="Arial Bold"/>
+                <a:ea typeface="Arial Bold"/>
+                <a:cs typeface="Arial Bold"/>
+                <a:sym typeface="Arial Bold"/>
+              </a:rPr>
+              <a:t>13 cases</a:t>
+            </a:r>
+            <a:r>
+              <a:rPr lang="en-US" sz="2999" dirty="0">
                 <a:solidFill>
                   <a:srgbClr val="000000"/>
                 </a:solidFill>
@@ -8599,13 +8955,13 @@
                 <a:cs typeface="Arial"/>
                 <a:sym typeface="Arial"/>
               </a:rPr>
-              <a:t>Explore more suitable segmentation methods</a:t>
-            </a:r>
-          </a:p>
-          <a:p>
-            <a:pPr algn="l" marL="647700" indent="-323850" lvl="1">
+              <a:t> → under-segmentation</a:t>
+            </a:r>
+          </a:p>
+          <a:p>
+            <a:pPr marL="647695" lvl="1" indent="-323848" algn="l">
               <a:lnSpc>
-                <a:spcPts val="4200"/>
+                <a:spcPts val="4199"/>
               </a:lnSpc>
               <a:spcBef>
                 <a:spcPct val="0"/>
@@ -8614,7 +8970,19 @@
               <a:buChar char="•"/>
             </a:pPr>
             <a:r>
-              <a:rPr lang="en-US" sz="3000">
+              <a:rPr lang="en-US" sz="2999" b="1" dirty="0">
+                <a:solidFill>
+                  <a:srgbClr val="000000"/>
+                </a:solidFill>
+                <a:latin typeface="Arial Bold"/>
+                <a:ea typeface="Arial Bold"/>
+                <a:cs typeface="Arial Bold"/>
+                <a:sym typeface="Arial Bold"/>
+              </a:rPr>
+              <a:t>3 cases</a:t>
+            </a:r>
+            <a:r>
+              <a:rPr lang="en-US" sz="2999" dirty="0">
                 <a:solidFill>
                   <a:srgbClr val="000000"/>
                 </a:solidFill>
@@ -8623,8 +8991,152 @@
                 <a:cs typeface="Arial"/>
                 <a:sym typeface="Arial"/>
               </a:rPr>
-              <a:t>Evaluate improvements using the same metrics and cases</a:t>
-            </a:r>
+              <a:t> → mixed boundary errors</a:t>
+            </a:r>
+          </a:p>
+          <a:p>
+            <a:pPr marL="647695" lvl="1" indent="-323848" algn="l">
+              <a:lnSpc>
+                <a:spcPts val="4199"/>
+              </a:lnSpc>
+              <a:spcBef>
+                <a:spcPct val="0"/>
+              </a:spcBef>
+              <a:buFont typeface="Arial"/>
+              <a:buChar char="•"/>
+            </a:pPr>
+            <a:r>
+              <a:rPr lang="en-US" sz="2999" b="1" dirty="0">
+                <a:solidFill>
+                  <a:srgbClr val="000000"/>
+                </a:solidFill>
+                <a:latin typeface="Arial Bold"/>
+                <a:ea typeface="Arial Bold"/>
+                <a:cs typeface="Arial Bold"/>
+                <a:sym typeface="Arial Bold"/>
+              </a:rPr>
+              <a:t>2 cases</a:t>
+            </a:r>
+            <a:r>
+              <a:rPr lang="en-US" sz="2999" dirty="0">
+                <a:solidFill>
+                  <a:srgbClr val="000000"/>
+                </a:solidFill>
+                <a:latin typeface="Arial"/>
+                <a:ea typeface="Arial"/>
+                <a:cs typeface="Arial"/>
+                <a:sym typeface="Arial"/>
+              </a:rPr>
+              <a:t> → over-segmentation</a:t>
+            </a:r>
+          </a:p>
+          <a:p>
+            <a:pPr marL="647695" lvl="1" indent="-323848" algn="l">
+              <a:lnSpc>
+                <a:spcPts val="4199"/>
+              </a:lnSpc>
+              <a:spcBef>
+                <a:spcPct val="0"/>
+              </a:spcBef>
+              <a:buFont typeface="Arial"/>
+              <a:buChar char="•"/>
+            </a:pPr>
+            <a:r>
+              <a:rPr lang="en-US" sz="2999" b="1" dirty="0">
+                <a:solidFill>
+                  <a:srgbClr val="000000"/>
+                </a:solidFill>
+                <a:latin typeface="Arial Bold"/>
+                <a:ea typeface="Arial Bold"/>
+                <a:cs typeface="Arial Bold"/>
+                <a:sym typeface="Arial Bold"/>
+              </a:rPr>
+              <a:t>2 cases</a:t>
+            </a:r>
+            <a:r>
+              <a:rPr lang="en-US" sz="2999" dirty="0">
+                <a:solidFill>
+                  <a:srgbClr val="000000"/>
+                </a:solidFill>
+                <a:latin typeface="Arial"/>
+                <a:ea typeface="Arial"/>
+                <a:cs typeface="Arial"/>
+                <a:sym typeface="Arial"/>
+              </a:rPr>
+              <a:t> → excellent overlap</a:t>
+            </a:r>
+          </a:p>
+          <a:p>
+            <a:pPr algn="l">
+              <a:lnSpc>
+                <a:spcPts val="4199"/>
+              </a:lnSpc>
+              <a:spcBef>
+                <a:spcPct val="0"/>
+              </a:spcBef>
+            </a:pPr>
+            <a:endParaRPr lang="en-US" sz="2999" dirty="0">
+              <a:solidFill>
+                <a:srgbClr val="000000"/>
+              </a:solidFill>
+              <a:latin typeface="Arial"/>
+              <a:ea typeface="Arial"/>
+              <a:cs typeface="Arial"/>
+              <a:sym typeface="Arial"/>
+            </a:endParaRPr>
+          </a:p>
+        </p:txBody>
+      </p:sp>
+      <p:sp>
+        <p:nvSpPr>
+          <p:cNvPr id="13" name="Freeform 13"/>
+          <p:cNvSpPr/>
+          <p:nvPr/>
+        </p:nvSpPr>
+        <p:spPr>
+          <a:xfrm>
+            <a:off x="9599670" y="2476500"/>
+            <a:ext cx="6912497" cy="6912497"/>
+          </a:xfrm>
+          <a:custGeom>
+            <a:avLst/>
+            <a:gdLst/>
+            <a:ahLst/>
+            <a:cxnLst/>
+            <a:rect l="l" t="t" r="r" b="b"/>
+            <a:pathLst>
+              <a:path w="6912497" h="6912497">
+                <a:moveTo>
+                  <a:pt x="0" y="0"/>
+                </a:moveTo>
+                <a:lnTo>
+                  <a:pt x="6912497" y="0"/>
+                </a:lnTo>
+                <a:lnTo>
+                  <a:pt x="6912497" y="6912497"/>
+                </a:lnTo>
+                <a:lnTo>
+                  <a:pt x="0" y="6912497"/>
+                </a:lnTo>
+                <a:lnTo>
+                  <a:pt x="0" y="0"/>
+                </a:lnTo>
+                <a:close/>
+              </a:path>
+            </a:pathLst>
+          </a:custGeom>
+          <a:blipFill>
+            <a:blip r:embed="rId8"/>
+            <a:stretch>
+              <a:fillRect/>
+            </a:stretch>
+          </a:blipFill>
+        </p:spPr>
+        <p:txBody>
+          <a:bodyPr/>
+          <a:lstStyle/>
+          <a:p>
+            <a:endParaRPr lang="en-IN"/>
           </a:p>
         </p:txBody>
       </p:sp>
@@ -8636,14 +9148,15 @@
 </p:sld>
 </file>
 
-<file path=ppt/slides/slide9.xml><?xml version="1.0" encoding="utf-8"?>
-<p:sld xmlns:p="http://schemas.openxmlformats.org/presentationml/2006/main" xmlns:a="http://schemas.openxmlformats.org/drawingml/2006/main" xmlns:r="http://schemas.openxmlformats.org/officeDocument/2006/relationships">
+<file path=ppt/slides/slide8.xml><?xml version="1.0" encoding="utf-8"?>
+<p:sld xmlns:a="http://schemas.openxmlformats.org/drawingml/2006/main" xmlns:r="http://schemas.openxmlformats.org/officeDocument/2006/relationships" xmlns:p="http://schemas.openxmlformats.org/presentationml/2006/main">
   <p:cSld>
     <p:bg>
       <p:bgPr>
         <a:solidFill>
           <a:srgbClr val="F2F1EE"/>
         </a:solidFill>
+        <a:effectLst/>
       </p:bgPr>
     </p:bg>
     <p:spTree>
@@ -8662,12 +9175,12 @@
       </p:grpSpPr>
       <p:sp>
         <p:nvSpPr>
-          <p:cNvPr name="Freeform 2" id="2"/>
+          <p:cNvPr id="2" name="Freeform 2"/>
           <p:cNvSpPr/>
           <p:nvPr/>
         </p:nvSpPr>
         <p:spPr>
-          <a:xfrm flipH="false" flipV="false" rot="0">
+          <a:xfrm>
             <a:off x="2310233" y="10132980"/>
             <a:ext cx="13861398" cy="154020"/>
           </a:xfrm>
@@ -8676,9 +9189,9 @@
             <a:gdLst/>
             <a:ahLst/>
             <a:cxnLst/>
-            <a:rect r="r" b="b" t="t" l="l"/>
+            <a:rect l="l" t="t" r="r" b="b"/>
             <a:pathLst>
-              <a:path h="154020" w="13861398">
+              <a:path w="13861398" h="154020">
                 <a:moveTo>
                   <a:pt x="0" y="0"/>
                 </a:moveTo>
@@ -8699,7 +9212,66 @@
             </a:pathLst>
           </a:custGeom>
           <a:blipFill>
-            <a:blip r:embed="rId2">
+            <a:blip>
+              <a:extLst>
+                <a:ext uri="{96DAC541-7B7A-43D3-8B79-37D633B846F1}">
+                  <asvg:svgBlip xmlns:asvg="http://schemas.microsoft.com/office/drawing/2016/SVG/main" r:embed="rId2"/>
+                </a:ext>
+              </a:extLst>
+            </a:blip>
+            <a:stretch>
+              <a:fillRect/>
+            </a:stretch>
+          </a:blipFill>
+        </p:spPr>
+        <p:txBody>
+          <a:bodyPr/>
+          <a:lstStyle/>
+          <a:p>
+            <a:endParaRPr lang="en-IN"/>
+          </a:p>
+        </p:txBody>
+      </p:sp>
+      <p:sp>
+        <p:nvSpPr>
+          <p:cNvPr id="3" name="Freeform 3"/>
+          <p:cNvSpPr/>
+          <p:nvPr/>
+        </p:nvSpPr>
+        <p:spPr>
+          <a:xfrm>
+            <a:off x="0" y="10132980"/>
+            <a:ext cx="3939395" cy="154020"/>
+          </a:xfrm>
+          <a:custGeom>
+            <a:avLst/>
+            <a:gdLst/>
+            <a:ahLst/>
+            <a:cxnLst/>
+            <a:rect l="l" t="t" r="r" b="b"/>
+            <a:pathLst>
+              <a:path w="3939395" h="154020">
+                <a:moveTo>
+                  <a:pt x="0" y="0"/>
+                </a:moveTo>
+                <a:lnTo>
+                  <a:pt x="3939395" y="0"/>
+                </a:lnTo>
+                <a:lnTo>
+                  <a:pt x="3939395" y="154020"/>
+                </a:lnTo>
+                <a:lnTo>
+                  <a:pt x="0" y="154020"/>
+                </a:lnTo>
+                <a:lnTo>
+                  <a:pt x="0" y="0"/>
+                </a:lnTo>
+                <a:close/>
+              </a:path>
+            </a:pathLst>
+          </a:custGeom>
+          <a:blipFill>
+            <a:blip>
               <a:extLst>
                 <a:ext uri="{96DAC541-7B7A-43D3-8B79-37D633B846F1}">
                   <asvg:svgBlip xmlns:asvg="http://schemas.microsoft.com/office/drawing/2016/SVG/main" r:embed="rId3"/>
@@ -8707,20 +9279,27 @@
               </a:extLst>
             </a:blip>
             <a:stretch>
-              <a:fillRect l="0" t="0" r="0" b="0"/>
+              <a:fillRect/>
             </a:stretch>
           </a:blipFill>
         </p:spPr>
-      </p:sp>
-      <p:sp>
-        <p:nvSpPr>
-          <p:cNvPr name="Freeform 3" id="3"/>
+        <p:txBody>
+          <a:bodyPr/>
+          <a:lstStyle/>
+          <a:p>
+            <a:endParaRPr lang="en-IN"/>
+          </a:p>
+        </p:txBody>
+      </p:sp>
+      <p:sp>
+        <p:nvSpPr>
+          <p:cNvPr id="4" name="Freeform 4"/>
           <p:cNvSpPr/>
           <p:nvPr/>
         </p:nvSpPr>
         <p:spPr>
-          <a:xfrm flipH="false" flipV="false" rot="0">
-            <a:off x="0" y="10132980"/>
+          <a:xfrm>
+            <a:off x="14542469" y="10132980"/>
             <a:ext cx="3939395" cy="154020"/>
           </a:xfrm>
           <a:custGeom>
@@ -8728,9 +9307,9 @@
             <a:gdLst/>
             <a:ahLst/>
             <a:cxnLst/>
-            <a:rect r="r" b="b" t="t" l="l"/>
+            <a:rect l="l" t="t" r="r" b="b"/>
             <a:pathLst>
-              <a:path h="154020" w="3939395">
+              <a:path w="3939395" h="154020">
                 <a:moveTo>
                   <a:pt x="0" y="0"/>
                 </a:moveTo>
@@ -8751,79 +9330,34 @@
             </a:pathLst>
           </a:custGeom>
           <a:blipFill>
-            <a:blip r:embed="rId4">
+            <a:blip>
               <a:extLst>
                 <a:ext uri="{96DAC541-7B7A-43D3-8B79-37D633B846F1}">
-                  <asvg:svgBlip xmlns:asvg="http://schemas.microsoft.com/office/drawing/2016/SVG/main" r:embed="rId5"/>
+                  <asvg:svgBlip xmlns:asvg="http://schemas.microsoft.com/office/drawing/2016/SVG/main" r:embed="rId4"/>
                 </a:ext>
               </a:extLst>
             </a:blip>
             <a:stretch>
-              <a:fillRect l="0" t="0" r="0" b="0"/>
+              <a:fillRect/>
             </a:stretch>
           </a:blipFill>
         </p:spPr>
-      </p:sp>
-      <p:sp>
-        <p:nvSpPr>
-          <p:cNvPr name="Freeform 4" id="4"/>
-          <p:cNvSpPr/>
-          <p:nvPr/>
-        </p:nvSpPr>
-        <p:spPr>
-          <a:xfrm flipH="false" flipV="false" rot="0">
-            <a:off x="14542469" y="10132980"/>
-            <a:ext cx="3939395" cy="154020"/>
-          </a:xfrm>
-          <a:custGeom>
-            <a:avLst/>
-            <a:gdLst/>
-            <a:ahLst/>
-            <a:cxnLst/>
-            <a:rect r="r" b="b" t="t" l="l"/>
-            <a:pathLst>
-              <a:path h="154020" w="3939395">
-                <a:moveTo>
-                  <a:pt x="0" y="0"/>
-                </a:moveTo>
-                <a:lnTo>
-                  <a:pt x="3939395" y="0"/>
-                </a:lnTo>
-                <a:lnTo>
-                  <a:pt x="3939395" y="154020"/>
-                </a:lnTo>
-                <a:lnTo>
-                  <a:pt x="0" y="154020"/>
-                </a:lnTo>
-                <a:lnTo>
-                  <a:pt x="0" y="0"/>
-                </a:lnTo>
-                <a:close/>
-              </a:path>
-            </a:pathLst>
-          </a:custGeom>
-          <a:blipFill>
-            <a:blip r:embed="rId4">
-              <a:extLst>
-                <a:ext uri="{96DAC541-7B7A-43D3-8B79-37D633B846F1}">
-                  <asvg:svgBlip xmlns:asvg="http://schemas.microsoft.com/office/drawing/2016/SVG/main" r:embed="rId6"/>
-                </a:ext>
-              </a:extLst>
-            </a:blip>
-            <a:stretch>
-              <a:fillRect l="0" t="0" r="0" b="0"/>
-            </a:stretch>
-          </a:blipFill>
-        </p:spPr>
+        <p:txBody>
+          <a:bodyPr/>
+          <a:lstStyle/>
+          <a:p>
+            <a:endParaRPr lang="en-IN"/>
+          </a:p>
+        </p:txBody>
       </p:sp>
       <p:grpSp>
         <p:nvGrpSpPr>
-          <p:cNvPr name="Group 5" id="5"/>
+          <p:cNvPr id="5" name="Group 5"/>
           <p:cNvGrpSpPr/>
           <p:nvPr/>
         </p:nvGrpSpPr>
         <p:grpSpPr>
-          <a:xfrm rot="0">
+          <a:xfrm>
             <a:off x="0" y="10132980"/>
             <a:ext cx="18481864" cy="154020"/>
             <a:chOff x="0" y="0"/>
@@ -8832,12 +9366,12 @@
         </p:grpSpPr>
         <p:sp>
           <p:nvSpPr>
-            <p:cNvPr name="Freeform 6" id="6"/>
+            <p:cNvPr id="6" name="Freeform 6"/>
             <p:cNvSpPr/>
             <p:nvPr/>
           </p:nvSpPr>
           <p:spPr>
-            <a:xfrm flipH="false" flipV="false" rot="0">
+            <a:xfrm>
               <a:off x="0" y="0"/>
               <a:ext cx="16256000" cy="135509"/>
             </a:xfrm>
@@ -8846,9 +9380,9 @@
               <a:gdLst/>
               <a:ahLst/>
               <a:cxnLst/>
-              <a:rect r="r" b="b" t="t" l="l"/>
+              <a:rect l="l" t="t" r="r" b="b"/>
               <a:pathLst>
-                <a:path h="135509" w="16256000">
+                <a:path w="16256000" h="135509">
                   <a:moveTo>
                     <a:pt x="0" y="0"/>
                   </a:moveTo>
@@ -8869,22 +9403,29 @@
               </a:pathLst>
             </a:custGeom>
             <a:blipFill>
-              <a:blip r:embed="rId7"/>
+              <a:blip r:embed="rId5"/>
               <a:stretch>
-                <a:fillRect l="0" t="0" r="0" b="28"/>
+                <a:fillRect b="28"/>
               </a:stretch>
             </a:blipFill>
           </p:spPr>
+          <p:txBody>
+            <a:bodyPr/>
+            <a:lstStyle/>
+            <a:p>
+              <a:endParaRPr lang="en-IN"/>
+            </a:p>
+          </p:txBody>
         </p:sp>
       </p:grpSp>
       <p:sp>
         <p:nvSpPr>
-          <p:cNvPr name="Freeform 7" id="7"/>
+          <p:cNvPr id="7" name="Freeform 7"/>
           <p:cNvSpPr/>
           <p:nvPr/>
         </p:nvSpPr>
         <p:spPr>
-          <a:xfrm flipH="false" flipV="false" rot="0">
+          <a:xfrm>
             <a:off x="543930" y="9045394"/>
             <a:ext cx="2070431" cy="908008"/>
           </a:xfrm>
@@ -8893,9 +9434,9 @@
             <a:gdLst/>
             <a:ahLst/>
             <a:cxnLst/>
-            <a:rect r="r" b="b" t="t" l="l"/>
+            <a:rect l="l" t="t" r="r" b="b"/>
             <a:pathLst>
-              <a:path h="908008" w="2070431">
+              <a:path w="2070431" h="908008">
                 <a:moveTo>
                   <a:pt x="0" y="0"/>
                 </a:moveTo>
@@ -8916,27 +9457,34 @@
             </a:pathLst>
           </a:custGeom>
           <a:blipFill>
-            <a:blip r:embed="rId8">
+            <a:blip>
               <a:extLst>
                 <a:ext uri="{96DAC541-7B7A-43D3-8B79-37D633B846F1}">
-                  <asvg:svgBlip xmlns:asvg="http://schemas.microsoft.com/office/drawing/2016/SVG/main" r:embed="rId9"/>
+                  <asvg:svgBlip xmlns:asvg="http://schemas.microsoft.com/office/drawing/2016/SVG/main" r:embed="rId6"/>
                 </a:ext>
               </a:extLst>
             </a:blip>
             <a:stretch>
-              <a:fillRect l="0" t="0" r="0" b="0"/>
+              <a:fillRect/>
             </a:stretch>
           </a:blipFill>
         </p:spPr>
+        <p:txBody>
+          <a:bodyPr/>
+          <a:lstStyle/>
+          <a:p>
+            <a:endParaRPr lang="en-IN"/>
+          </a:p>
+        </p:txBody>
       </p:sp>
       <p:grpSp>
         <p:nvGrpSpPr>
-          <p:cNvPr name="Group 8" id="8"/>
+          <p:cNvPr id="8" name="Group 8"/>
           <p:cNvGrpSpPr/>
           <p:nvPr/>
         </p:nvGrpSpPr>
         <p:grpSpPr>
-          <a:xfrm rot="0">
+          <a:xfrm>
             <a:off x="543930" y="9045394"/>
             <a:ext cx="2070431" cy="944640"/>
             <a:chOff x="0" y="0"/>
@@ -8945,12 +9493,12 @@
         </p:grpSpPr>
         <p:sp>
           <p:nvSpPr>
-            <p:cNvPr name="Freeform 9" id="9"/>
+            <p:cNvPr id="9" name="Freeform 9"/>
             <p:cNvSpPr/>
             <p:nvPr/>
           </p:nvSpPr>
           <p:spPr>
-            <a:xfrm flipH="false" flipV="false" rot="0">
+            <a:xfrm>
               <a:off x="0" y="0"/>
               <a:ext cx="1821053" cy="830923"/>
             </a:xfrm>
@@ -8959,9 +9507,9 @@
               <a:gdLst/>
               <a:ahLst/>
               <a:cxnLst/>
-              <a:rect r="r" b="b" t="t" l="l"/>
+              <a:rect l="l" t="t" r="r" b="b"/>
               <a:pathLst>
-                <a:path h="830923" w="1821053">
+                <a:path w="1821053" h="830923">
                   <a:moveTo>
                     <a:pt x="0" y="0"/>
                   </a:moveTo>
@@ -8982,22 +9530,29 @@
               </a:pathLst>
             </a:custGeom>
             <a:blipFill>
-              <a:blip r:embed="rId10"/>
+              <a:blip r:embed="rId7"/>
               <a:stretch>
                 <a:fillRect l="-72565" t="-156165" r="-72141" b="-156511"/>
               </a:stretch>
             </a:blipFill>
           </p:spPr>
+          <p:txBody>
+            <a:bodyPr/>
+            <a:lstStyle/>
+            <a:p>
+              <a:endParaRPr lang="en-IN"/>
+            </a:p>
+          </p:txBody>
         </p:sp>
       </p:grpSp>
       <p:sp>
         <p:nvSpPr>
-          <p:cNvPr name="TextBox 10" id="10"/>
-          <p:cNvSpPr txBox="true"/>
+          <p:cNvPr id="10" name="TextBox 10"/>
+          <p:cNvSpPr txBox="1"/>
           <p:nvPr/>
         </p:nvSpPr>
         <p:spPr>
-          <a:xfrm rot="0">
+          <a:xfrm>
             <a:off x="17259300" y="9210675"/>
             <a:ext cx="152400" cy="200025"/>
           </a:xfrm>
@@ -9006,7 +9561,7 @@
           </a:prstGeom>
         </p:spPr>
         <p:txBody>
-          <a:bodyPr anchor="t" rtlCol="false" tIns="0" lIns="0" bIns="0" rIns="0" wrap="none">
+          <a:bodyPr wrap="none" lIns="0" tIns="0" rIns="0" bIns="0" rtlCol="0" anchor="t">
             <a:spAutoFit/>
           </a:bodyPr>
           <a:lstStyle/>
@@ -9029,28 +9584,28 @@
                 <a:cs typeface="Arial"/>
                 <a:sym typeface="Arial"/>
               </a:rPr>
-              <a:t>9</a:t>
-            </a:r>
-          </a:p>
-        </p:txBody>
-      </p:sp>
-      <p:sp>
-        <p:nvSpPr>
-          <p:cNvPr name="TextBox 11" id="11"/>
-          <p:cNvSpPr txBox="true"/>
+              <a:t>8</a:t>
+            </a:r>
+          </a:p>
+        </p:txBody>
+      </p:sp>
+      <p:sp>
+        <p:nvSpPr>
+          <p:cNvPr id="11" name="TextBox 11"/>
+          <p:cNvSpPr txBox="1"/>
           <p:nvPr/>
         </p:nvSpPr>
         <p:spPr>
-          <a:xfrm rot="0">
-            <a:off x="4975145" y="895350"/>
-            <a:ext cx="8337709" cy="1038227"/>
+          <a:xfrm>
+            <a:off x="7407890" y="895350"/>
+            <a:ext cx="3472220" cy="1038227"/>
           </a:xfrm>
           <a:prstGeom prst="rect">
             <a:avLst/>
           </a:prstGeom>
         </p:spPr>
         <p:txBody>
-          <a:bodyPr anchor="t" rtlCol="false" tIns="0" lIns="0" bIns="0" rIns="0">
+          <a:bodyPr lIns="0" tIns="0" rIns="0" bIns="0" rtlCol="0" anchor="t">
             <a:spAutoFit/>
           </a:bodyPr>
           <a:lstStyle/>
@@ -9064,7 +9619,685 @@
               </a:spcBef>
             </a:pPr>
             <a:r>
-              <a:rPr lang="en-US" b="true" sz="5999">
+              <a:rPr lang="en-US" sz="5999" b="1">
+                <a:solidFill>
+                  <a:srgbClr val="7D1916"/>
+                </a:solidFill>
+                <a:latin typeface="Arial Bold"/>
+                <a:ea typeface="Arial Bold"/>
+                <a:cs typeface="Arial Bold"/>
+                <a:sym typeface="Arial Bold"/>
+              </a:rPr>
+              <a:t>Next Plan</a:t>
+            </a:r>
+          </a:p>
+        </p:txBody>
+      </p:sp>
+      <p:sp>
+        <p:nvSpPr>
+          <p:cNvPr id="12" name="TextBox 12"/>
+          <p:cNvSpPr txBox="1"/>
+          <p:nvPr/>
+        </p:nvSpPr>
+        <p:spPr>
+          <a:xfrm>
+            <a:off x="3896618" y="3238500"/>
+            <a:ext cx="10494764" cy="3733800"/>
+          </a:xfrm>
+          <a:prstGeom prst="rect">
+            <a:avLst/>
+          </a:prstGeom>
+        </p:spPr>
+        <p:txBody>
+          <a:bodyPr lIns="0" tIns="0" rIns="0" bIns="0" rtlCol="0" anchor="t">
+            <a:spAutoFit/>
+          </a:bodyPr>
+          <a:lstStyle/>
+          <a:p>
+            <a:pPr algn="l">
+              <a:lnSpc>
+                <a:spcPts val="4200"/>
+              </a:lnSpc>
+            </a:pPr>
+            <a:r>
+              <a:rPr lang="en-US" sz="3000" b="1">
+                <a:solidFill>
+                  <a:srgbClr val="000000"/>
+                </a:solidFill>
+                <a:latin typeface="Arial Bold"/>
+                <a:ea typeface="Arial Bold"/>
+                <a:cs typeface="Arial Bold"/>
+                <a:sym typeface="Arial Bold"/>
+              </a:rPr>
+              <a:t>Next Phase</a:t>
+            </a:r>
+          </a:p>
+          <a:p>
+            <a:pPr marL="647700" lvl="1" indent="-323850" algn="l">
+              <a:lnSpc>
+                <a:spcPts val="4200"/>
+              </a:lnSpc>
+              <a:spcBef>
+                <a:spcPct val="0"/>
+              </a:spcBef>
+              <a:buFont typeface="Arial"/>
+              <a:buChar char="•"/>
+            </a:pPr>
+            <a:r>
+              <a:rPr lang="en-US" sz="3000">
+                <a:solidFill>
+                  <a:srgbClr val="000000"/>
+                </a:solidFill>
+                <a:latin typeface="Arial"/>
+                <a:ea typeface="Arial"/>
+                <a:cs typeface="Arial"/>
+                <a:sym typeface="Arial"/>
+              </a:rPr>
+              <a:t>Improve voxel selection</a:t>
+            </a:r>
+          </a:p>
+          <a:p>
+            <a:pPr marL="647700" lvl="1" indent="-323850" algn="l">
+              <a:lnSpc>
+                <a:spcPts val="4200"/>
+              </a:lnSpc>
+              <a:spcBef>
+                <a:spcPct val="0"/>
+              </a:spcBef>
+              <a:buFont typeface="Arial"/>
+              <a:buChar char="•"/>
+            </a:pPr>
+            <a:r>
+              <a:rPr lang="en-US" sz="3000">
+                <a:solidFill>
+                  <a:srgbClr val="000000"/>
+                </a:solidFill>
+                <a:latin typeface="Arial"/>
+                <a:ea typeface="Arial"/>
+                <a:cs typeface="Arial"/>
+                <a:sym typeface="Arial"/>
+              </a:rPr>
+              <a:t>Reduce under-segmentation</a:t>
+            </a:r>
+          </a:p>
+          <a:p>
+            <a:pPr marL="647700" lvl="1" indent="-323850" algn="l">
+              <a:lnSpc>
+                <a:spcPts val="4200"/>
+              </a:lnSpc>
+              <a:spcBef>
+                <a:spcPct val="0"/>
+              </a:spcBef>
+              <a:buFont typeface="Arial"/>
+              <a:buChar char="•"/>
+            </a:pPr>
+            <a:r>
+              <a:rPr lang="en-US" sz="3000">
+                <a:solidFill>
+                  <a:srgbClr val="000000"/>
+                </a:solidFill>
+                <a:latin typeface="Arial"/>
+                <a:ea typeface="Arial"/>
+                <a:cs typeface="Arial"/>
+                <a:sym typeface="Arial"/>
+              </a:rPr>
+              <a:t>Improve boundary accuracy</a:t>
+            </a:r>
+          </a:p>
+          <a:p>
+            <a:pPr marL="647700" lvl="1" indent="-323850" algn="l">
+              <a:lnSpc>
+                <a:spcPts val="4200"/>
+              </a:lnSpc>
+              <a:spcBef>
+                <a:spcPct val="0"/>
+              </a:spcBef>
+              <a:buFont typeface="Arial"/>
+              <a:buChar char="•"/>
+            </a:pPr>
+            <a:r>
+              <a:rPr lang="en-US" sz="3000">
+                <a:solidFill>
+                  <a:srgbClr val="000000"/>
+                </a:solidFill>
+                <a:latin typeface="Arial"/>
+                <a:ea typeface="Arial"/>
+                <a:cs typeface="Arial"/>
+                <a:sym typeface="Arial"/>
+              </a:rPr>
+              <a:t>Optimize the current segmentation pipeline</a:t>
+            </a:r>
+          </a:p>
+          <a:p>
+            <a:pPr marL="647700" lvl="1" indent="-323850" algn="l">
+              <a:lnSpc>
+                <a:spcPts val="4200"/>
+              </a:lnSpc>
+              <a:spcBef>
+                <a:spcPct val="0"/>
+              </a:spcBef>
+              <a:buFont typeface="Arial"/>
+              <a:buChar char="•"/>
+            </a:pPr>
+            <a:r>
+              <a:rPr lang="en-US" sz="3000">
+                <a:solidFill>
+                  <a:srgbClr val="000000"/>
+                </a:solidFill>
+                <a:latin typeface="Arial"/>
+                <a:ea typeface="Arial"/>
+                <a:cs typeface="Arial"/>
+                <a:sym typeface="Arial"/>
+              </a:rPr>
+              <a:t>Explore more suitable segmentation methods</a:t>
+            </a:r>
+          </a:p>
+          <a:p>
+            <a:pPr marL="647700" lvl="1" indent="-323850" algn="l">
+              <a:lnSpc>
+                <a:spcPts val="4200"/>
+              </a:lnSpc>
+              <a:spcBef>
+                <a:spcPct val="0"/>
+              </a:spcBef>
+              <a:buFont typeface="Arial"/>
+              <a:buChar char="•"/>
+            </a:pPr>
+            <a:r>
+              <a:rPr lang="en-US" sz="3000">
+                <a:solidFill>
+                  <a:srgbClr val="000000"/>
+                </a:solidFill>
+                <a:latin typeface="Arial"/>
+                <a:ea typeface="Arial"/>
+                <a:cs typeface="Arial"/>
+                <a:sym typeface="Arial"/>
+              </a:rPr>
+              <a:t>Evaluate improvements using the same metrics and cases</a:t>
+            </a:r>
+          </a:p>
+        </p:txBody>
+      </p:sp>
+    </p:spTree>
+  </p:cSld>
+  <p:clrMapOvr>
+    <a:masterClrMapping/>
+  </p:clrMapOvr>
+</p:sld>
+</file>
+
+<file path=ppt/slides/slide9.xml><?xml version="1.0" encoding="utf-8"?>
+<p:sld xmlns:a="http://schemas.openxmlformats.org/drawingml/2006/main" xmlns:r="http://schemas.openxmlformats.org/officeDocument/2006/relationships" xmlns:p="http://schemas.openxmlformats.org/presentationml/2006/main">
+  <p:cSld>
+    <p:bg>
+      <p:bgPr>
+        <a:solidFill>
+          <a:srgbClr val="F2F1EE"/>
+        </a:solidFill>
+        <a:effectLst/>
+      </p:bgPr>
+    </p:bg>
+    <p:spTree>
+      <p:nvGrpSpPr>
+        <p:cNvPr id="1" name=""/>
+        <p:cNvGrpSpPr/>
+        <p:nvPr/>
+      </p:nvGrpSpPr>
+      <p:grpSpPr>
+        <a:xfrm>
+          <a:off x="0" y="0"/>
+          <a:ext cx="0" cy="0"/>
+          <a:chOff x="0" y="0"/>
+          <a:chExt cx="0" cy="0"/>
+        </a:xfrm>
+      </p:grpSpPr>
+      <p:sp>
+        <p:nvSpPr>
+          <p:cNvPr id="2" name="Freeform 2"/>
+          <p:cNvSpPr/>
+          <p:nvPr/>
+        </p:nvSpPr>
+        <p:spPr>
+          <a:xfrm>
+            <a:off x="2310233" y="10132980"/>
+            <a:ext cx="13861398" cy="154020"/>
+          </a:xfrm>
+          <a:custGeom>
+            <a:avLst/>
+            <a:gdLst/>
+            <a:ahLst/>
+            <a:cxnLst/>
+            <a:rect l="l" t="t" r="r" b="b"/>
+            <a:pathLst>
+              <a:path w="13861398" h="154020">
+                <a:moveTo>
+                  <a:pt x="0" y="0"/>
+                </a:moveTo>
+                <a:lnTo>
+                  <a:pt x="13861398" y="0"/>
+                </a:lnTo>
+                <a:lnTo>
+                  <a:pt x="13861398" y="154020"/>
+                </a:lnTo>
+                <a:lnTo>
+                  <a:pt x="0" y="154020"/>
+                </a:lnTo>
+                <a:lnTo>
+                  <a:pt x="0" y="0"/>
+                </a:lnTo>
+                <a:close/>
+              </a:path>
+            </a:pathLst>
+          </a:custGeom>
+          <a:blipFill>
+            <a:blip>
+              <a:extLst>
+                <a:ext uri="{96DAC541-7B7A-43D3-8B79-37D633B846F1}">
+                  <asvg:svgBlip xmlns:asvg="http://schemas.microsoft.com/office/drawing/2016/SVG/main" r:embed="rId2"/>
+                </a:ext>
+              </a:extLst>
+            </a:blip>
+            <a:stretch>
+              <a:fillRect/>
+            </a:stretch>
+          </a:blipFill>
+        </p:spPr>
+        <p:txBody>
+          <a:bodyPr/>
+          <a:lstStyle/>
+          <a:p>
+            <a:endParaRPr lang="en-IN"/>
+          </a:p>
+        </p:txBody>
+      </p:sp>
+      <p:sp>
+        <p:nvSpPr>
+          <p:cNvPr id="3" name="Freeform 3"/>
+          <p:cNvSpPr/>
+          <p:nvPr/>
+        </p:nvSpPr>
+        <p:spPr>
+          <a:xfrm>
+            <a:off x="0" y="10132980"/>
+            <a:ext cx="3939395" cy="154020"/>
+          </a:xfrm>
+          <a:custGeom>
+            <a:avLst/>
+            <a:gdLst/>
+            <a:ahLst/>
+            <a:cxnLst/>
+            <a:rect l="l" t="t" r="r" b="b"/>
+            <a:pathLst>
+              <a:path w="3939395" h="154020">
+                <a:moveTo>
+                  <a:pt x="0" y="0"/>
+                </a:moveTo>
+                <a:lnTo>
+                  <a:pt x="3939395" y="0"/>
+                </a:lnTo>
+                <a:lnTo>
+                  <a:pt x="3939395" y="154020"/>
+                </a:lnTo>
+                <a:lnTo>
+                  <a:pt x="0" y="154020"/>
+                </a:lnTo>
+                <a:lnTo>
+                  <a:pt x="0" y="0"/>
+                </a:lnTo>
+                <a:close/>
+              </a:path>
+            </a:pathLst>
+          </a:custGeom>
+          <a:blipFill>
+            <a:blip>
+              <a:extLst>
+                <a:ext uri="{96DAC541-7B7A-43D3-8B79-37D633B846F1}">
+                  <asvg:svgBlip xmlns:asvg="http://schemas.microsoft.com/office/drawing/2016/SVG/main" r:embed="rId3"/>
+                </a:ext>
+              </a:extLst>
+            </a:blip>
+            <a:stretch>
+              <a:fillRect/>
+            </a:stretch>
+          </a:blipFill>
+        </p:spPr>
+        <p:txBody>
+          <a:bodyPr/>
+          <a:lstStyle/>
+          <a:p>
+            <a:endParaRPr lang="en-IN"/>
+          </a:p>
+        </p:txBody>
+      </p:sp>
+      <p:sp>
+        <p:nvSpPr>
+          <p:cNvPr id="4" name="Freeform 4"/>
+          <p:cNvSpPr/>
+          <p:nvPr/>
+        </p:nvSpPr>
+        <p:spPr>
+          <a:xfrm>
+            <a:off x="14542469" y="10132980"/>
+            <a:ext cx="3939395" cy="154020"/>
+          </a:xfrm>
+          <a:custGeom>
+            <a:avLst/>
+            <a:gdLst/>
+            <a:ahLst/>
+            <a:cxnLst/>
+            <a:rect l="l" t="t" r="r" b="b"/>
+            <a:pathLst>
+              <a:path w="3939395" h="154020">
+                <a:moveTo>
+                  <a:pt x="0" y="0"/>
+                </a:moveTo>
+                <a:lnTo>
+                  <a:pt x="3939395" y="0"/>
+                </a:lnTo>
+                <a:lnTo>
+                  <a:pt x="3939395" y="154020"/>
+                </a:lnTo>
+                <a:lnTo>
+                  <a:pt x="0" y="154020"/>
+                </a:lnTo>
+                <a:lnTo>
+                  <a:pt x="0" y="0"/>
+                </a:lnTo>
+                <a:close/>
+              </a:path>
+            </a:pathLst>
+          </a:custGeom>
+          <a:blipFill>
+            <a:blip>
+              <a:extLst>
+                <a:ext uri="{96DAC541-7B7A-43D3-8B79-37D633B846F1}">
+                  <asvg:svgBlip xmlns:asvg="http://schemas.microsoft.com/office/drawing/2016/SVG/main" r:embed="rId4"/>
+                </a:ext>
+              </a:extLst>
+            </a:blip>
+            <a:stretch>
+              <a:fillRect/>
+            </a:stretch>
+          </a:blipFill>
+        </p:spPr>
+        <p:txBody>
+          <a:bodyPr/>
+          <a:lstStyle/>
+          <a:p>
+            <a:endParaRPr lang="en-IN"/>
+          </a:p>
+        </p:txBody>
+      </p:sp>
+      <p:grpSp>
+        <p:nvGrpSpPr>
+          <p:cNvPr id="5" name="Group 5"/>
+          <p:cNvGrpSpPr/>
+          <p:nvPr/>
+        </p:nvGrpSpPr>
+        <p:grpSpPr>
+          <a:xfrm>
+            <a:off x="0" y="10132980"/>
+            <a:ext cx="18481864" cy="154020"/>
+            <a:chOff x="0" y="0"/>
+            <a:chExt cx="16256000" cy="135471"/>
+          </a:xfrm>
+        </p:grpSpPr>
+        <p:sp>
+          <p:nvSpPr>
+            <p:cNvPr id="6" name="Freeform 6"/>
+            <p:cNvSpPr/>
+            <p:nvPr/>
+          </p:nvSpPr>
+          <p:spPr>
+            <a:xfrm>
+              <a:off x="0" y="0"/>
+              <a:ext cx="16256000" cy="135509"/>
+            </a:xfrm>
+            <a:custGeom>
+              <a:avLst/>
+              <a:gdLst/>
+              <a:ahLst/>
+              <a:cxnLst/>
+              <a:rect l="l" t="t" r="r" b="b"/>
+              <a:pathLst>
+                <a:path w="16256000" h="135509">
+                  <a:moveTo>
+                    <a:pt x="0" y="0"/>
+                  </a:moveTo>
+                  <a:lnTo>
+                    <a:pt x="16256000" y="0"/>
+                  </a:lnTo>
+                  <a:lnTo>
+                    <a:pt x="16256000" y="135509"/>
+                  </a:lnTo>
+                  <a:lnTo>
+                    <a:pt x="0" y="135509"/>
+                  </a:lnTo>
+                  <a:lnTo>
+                    <a:pt x="0" y="0"/>
+                  </a:lnTo>
+                  <a:close/>
+                </a:path>
+              </a:pathLst>
+            </a:custGeom>
+            <a:blipFill>
+              <a:blip r:embed="rId5"/>
+              <a:stretch>
+                <a:fillRect b="28"/>
+              </a:stretch>
+            </a:blipFill>
+          </p:spPr>
+          <p:txBody>
+            <a:bodyPr/>
+            <a:lstStyle/>
+            <a:p>
+              <a:endParaRPr lang="en-IN"/>
+            </a:p>
+          </p:txBody>
+        </p:sp>
+      </p:grpSp>
+      <p:sp>
+        <p:nvSpPr>
+          <p:cNvPr id="7" name="Freeform 7"/>
+          <p:cNvSpPr/>
+          <p:nvPr/>
+        </p:nvSpPr>
+        <p:spPr>
+          <a:xfrm>
+            <a:off x="543930" y="9045394"/>
+            <a:ext cx="2070431" cy="908008"/>
+          </a:xfrm>
+          <a:custGeom>
+            <a:avLst/>
+            <a:gdLst/>
+            <a:ahLst/>
+            <a:cxnLst/>
+            <a:rect l="l" t="t" r="r" b="b"/>
+            <a:pathLst>
+              <a:path w="2070431" h="908008">
+                <a:moveTo>
+                  <a:pt x="0" y="0"/>
+                </a:moveTo>
+                <a:lnTo>
+                  <a:pt x="2070431" y="0"/>
+                </a:lnTo>
+                <a:lnTo>
+                  <a:pt x="2070431" y="908008"/>
+                </a:lnTo>
+                <a:lnTo>
+                  <a:pt x="0" y="908008"/>
+                </a:lnTo>
+                <a:lnTo>
+                  <a:pt x="0" y="0"/>
+                </a:lnTo>
+                <a:close/>
+              </a:path>
+            </a:pathLst>
+          </a:custGeom>
+          <a:blipFill>
+            <a:blip>
+              <a:extLst>
+                <a:ext uri="{96DAC541-7B7A-43D3-8B79-37D633B846F1}">
+                  <asvg:svgBlip xmlns:asvg="http://schemas.microsoft.com/office/drawing/2016/SVG/main" r:embed="rId6"/>
+                </a:ext>
+              </a:extLst>
+            </a:blip>
+            <a:stretch>
+              <a:fillRect/>
+            </a:stretch>
+          </a:blipFill>
+        </p:spPr>
+        <p:txBody>
+          <a:bodyPr/>
+          <a:lstStyle/>
+          <a:p>
+            <a:endParaRPr lang="en-IN"/>
+          </a:p>
+        </p:txBody>
+      </p:sp>
+      <p:grpSp>
+        <p:nvGrpSpPr>
+          <p:cNvPr id="8" name="Group 8"/>
+          <p:cNvGrpSpPr/>
+          <p:nvPr/>
+        </p:nvGrpSpPr>
+        <p:grpSpPr>
+          <a:xfrm>
+            <a:off x="543930" y="9045394"/>
+            <a:ext cx="2070431" cy="944640"/>
+            <a:chOff x="0" y="0"/>
+            <a:chExt cx="1821078" cy="830872"/>
+          </a:xfrm>
+        </p:grpSpPr>
+        <p:sp>
+          <p:nvSpPr>
+            <p:cNvPr id="9" name="Freeform 9"/>
+            <p:cNvSpPr/>
+            <p:nvPr/>
+          </p:nvSpPr>
+          <p:spPr>
+            <a:xfrm>
+              <a:off x="0" y="0"/>
+              <a:ext cx="1821053" cy="830923"/>
+            </a:xfrm>
+            <a:custGeom>
+              <a:avLst/>
+              <a:gdLst/>
+              <a:ahLst/>
+              <a:cxnLst/>
+              <a:rect l="l" t="t" r="r" b="b"/>
+              <a:pathLst>
+                <a:path w="1821053" h="830923">
+                  <a:moveTo>
+                    <a:pt x="0" y="0"/>
+                  </a:moveTo>
+                  <a:lnTo>
+                    <a:pt x="1821053" y="0"/>
+                  </a:lnTo>
+                  <a:lnTo>
+                    <a:pt x="1821053" y="830923"/>
+                  </a:lnTo>
+                  <a:lnTo>
+                    <a:pt x="0" y="830923"/>
+                  </a:lnTo>
+                  <a:lnTo>
+                    <a:pt x="0" y="0"/>
+                  </a:lnTo>
+                  <a:close/>
+                </a:path>
+              </a:pathLst>
+            </a:custGeom>
+            <a:blipFill>
+              <a:blip r:embed="rId7"/>
+              <a:stretch>
+                <a:fillRect l="-72565" t="-156165" r="-72141" b="-156511"/>
+              </a:stretch>
+            </a:blipFill>
+          </p:spPr>
+          <p:txBody>
+            <a:bodyPr/>
+            <a:lstStyle/>
+            <a:p>
+              <a:endParaRPr lang="en-IN"/>
+            </a:p>
+          </p:txBody>
+        </p:sp>
+      </p:grpSp>
+      <p:sp>
+        <p:nvSpPr>
+          <p:cNvPr id="10" name="TextBox 10"/>
+          <p:cNvSpPr txBox="1"/>
+          <p:nvPr/>
+        </p:nvSpPr>
+        <p:spPr>
+          <a:xfrm>
+            <a:off x="17259300" y="9210675"/>
+            <a:ext cx="152400" cy="200025"/>
+          </a:xfrm>
+          <a:prstGeom prst="rect">
+            <a:avLst/>
+          </a:prstGeom>
+        </p:spPr>
+        <p:txBody>
+          <a:bodyPr wrap="none" lIns="0" tIns="0" rIns="0" bIns="0" rtlCol="0" anchor="t">
+            <a:spAutoFit/>
+          </a:bodyPr>
+          <a:lstStyle/>
+          <a:p>
+            <a:pPr algn="ctr">
+              <a:lnSpc>
+                <a:spcPts val="2800"/>
+              </a:lnSpc>
+              <a:spcBef>
+                <a:spcPct val="0"/>
+              </a:spcBef>
+            </a:pPr>
+            <a:r>
+              <a:rPr lang="en-US" sz="2000">
+                <a:solidFill>
+                  <a:srgbClr val="000000"/>
+                </a:solidFill>
+                <a:latin typeface="Arial"/>
+                <a:ea typeface="Arial"/>
+                <a:cs typeface="Arial"/>
+                <a:sym typeface="Arial"/>
+              </a:rPr>
+              <a:t>9</a:t>
+            </a:r>
+          </a:p>
+        </p:txBody>
+      </p:sp>
+      <p:sp>
+        <p:nvSpPr>
+          <p:cNvPr id="11" name="TextBox 11"/>
+          <p:cNvSpPr txBox="1"/>
+          <p:nvPr/>
+        </p:nvSpPr>
+        <p:spPr>
+          <a:xfrm>
+            <a:off x="4975145" y="895350"/>
+            <a:ext cx="8337709" cy="1038227"/>
+          </a:xfrm>
+          <a:prstGeom prst="rect">
+            <a:avLst/>
+          </a:prstGeom>
+        </p:spPr>
+        <p:txBody>
+          <a:bodyPr lIns="0" tIns="0" rIns="0" bIns="0" rtlCol="0" anchor="t">
+            <a:spAutoFit/>
+          </a:bodyPr>
+          <a:lstStyle/>
+          <a:p>
+            <a:pPr algn="ctr">
+              <a:lnSpc>
+                <a:spcPts val="8399"/>
+              </a:lnSpc>
+              <a:spcBef>
+                <a:spcPct val="0"/>
+              </a:spcBef>
+            </a:pPr>
+            <a:r>
+              <a:rPr lang="en-US" sz="5999" b="1">
                 <a:solidFill>
                   <a:srgbClr val="7D1916"/>
                 </a:solidFill>
@@ -9080,12 +10313,12 @@
       </p:sp>
       <p:sp>
         <p:nvSpPr>
-          <p:cNvPr name="TextBox 12" id="12"/>
-          <p:cNvSpPr txBox="true"/>
+          <p:cNvPr id="12" name="TextBox 12"/>
+          <p:cNvSpPr txBox="1"/>
           <p:nvPr/>
         </p:nvSpPr>
         <p:spPr>
-          <a:xfrm rot="0">
+          <a:xfrm>
             <a:off x="3122125" y="2337578"/>
             <a:ext cx="12043750" cy="7324726"/>
           </a:xfrm>
@@ -9094,7 +10327,7 @@
           </a:prstGeom>
         </p:spPr>
         <p:txBody>
-          <a:bodyPr anchor="t" rtlCol="false" tIns="0" lIns="0" bIns="0" rIns="0">
+          <a:bodyPr lIns="0" tIns="0" rIns="0" bIns="0" rtlCol="0" anchor="t">
             <a:spAutoFit/>
           </a:bodyPr>
           <a:lstStyle/>
@@ -9105,7 +10338,7 @@
               </a:lnSpc>
             </a:pPr>
             <a:r>
-              <a:rPr lang="en-US" sz="2999" b="true">
+              <a:rPr lang="en-US" sz="2999" b="1" dirty="0">
                 <a:solidFill>
                   <a:srgbClr val="000000"/>
                 </a:solidFill>
@@ -9118,7 +10351,7 @@
             </a:r>
           </a:p>
           <a:p>
-            <a:pPr algn="l" marL="647695" indent="-323848" lvl="1">
+            <a:pPr marL="647695" lvl="1" indent="-323848" algn="l">
               <a:lnSpc>
                 <a:spcPts val="4199"/>
               </a:lnSpc>
@@ -9126,7 +10359,7 @@
               <a:buChar char="•"/>
             </a:pPr>
             <a:r>
-              <a:rPr lang="en-US" sz="2999">
+              <a:rPr lang="en-US" sz="2999" dirty="0">
                 <a:solidFill>
                   <a:srgbClr val="000000"/>
                 </a:solidFill>
@@ -9144,6 +10377,15 @@
                 <a:spcPts val="4199"/>
               </a:lnSpc>
             </a:pPr>
+            <a:endParaRPr lang="en-US" sz="2999" dirty="0">
+              <a:solidFill>
+                <a:srgbClr val="000000"/>
+              </a:solidFill>
+              <a:latin typeface="Arial"/>
+              <a:ea typeface="Arial"/>
+              <a:cs typeface="Arial"/>
+              <a:sym typeface="Arial"/>
+            </a:endParaRPr>
           </a:p>
           <a:p>
             <a:pPr algn="l">
@@ -9152,7 +10394,7 @@
               </a:lnSpc>
             </a:pPr>
             <a:r>
-              <a:rPr lang="en-US" sz="2999" b="true">
+              <a:rPr lang="en-US" sz="2999" b="1" dirty="0">
                 <a:solidFill>
                   <a:srgbClr val="000000"/>
                 </a:solidFill>
@@ -9161,11 +10403,32 @@
                 <a:cs typeface="Arial Bold"/>
                 <a:sym typeface="Arial Bold"/>
               </a:rPr>
-              <a:t>Yash Kyada</a:t>
-            </a:r>
-          </a:p>
-          <a:p>
-            <a:pPr algn="l" marL="647695" indent="-323848" lvl="1">
+              <a:t>Yash </a:t>
+            </a:r>
+            <a:r>
+              <a:rPr lang="en-US" sz="2999" b="1" dirty="0" err="1">
+                <a:solidFill>
+                  <a:srgbClr val="000000"/>
+                </a:solidFill>
+                <a:latin typeface="Arial Bold"/>
+                <a:ea typeface="Arial Bold"/>
+                <a:cs typeface="Arial Bold"/>
+                <a:sym typeface="Arial Bold"/>
+              </a:rPr>
+              <a:t>Kyada</a:t>
+            </a:r>
+            <a:endParaRPr lang="en-US" sz="2999" b="1" dirty="0">
+              <a:solidFill>
+                <a:srgbClr val="000000"/>
+              </a:solidFill>
+              <a:latin typeface="Arial Bold"/>
+              <a:ea typeface="Arial Bold"/>
+              <a:cs typeface="Arial Bold"/>
+              <a:sym typeface="Arial Bold"/>
+            </a:endParaRPr>
+          </a:p>
+          <a:p>
+            <a:pPr marL="647695" lvl="1" indent="-323848" algn="l">
               <a:lnSpc>
                 <a:spcPts val="4199"/>
               </a:lnSpc>
@@ -9173,7 +10436,7 @@
               <a:buChar char="•"/>
             </a:pPr>
             <a:r>
-              <a:rPr lang="en-US" sz="2999">
+              <a:rPr lang="en-US" sz="2999" dirty="0">
                 <a:solidFill>
                   <a:srgbClr val="000000"/>
                 </a:solidFill>
@@ -9194,6 +10457,15 @@
                 <a:spcPct val="0"/>
               </a:spcBef>
             </a:pPr>
+            <a:endParaRPr lang="en-US" sz="2999" dirty="0">
+              <a:solidFill>
+                <a:srgbClr val="000000"/>
+              </a:solidFill>
+              <a:latin typeface="Arial"/>
+              <a:ea typeface="Arial"/>
+              <a:cs typeface="Arial"/>
+              <a:sym typeface="Arial"/>
+            </a:endParaRPr>
           </a:p>
           <a:p>
             <a:pPr algn="l">
@@ -9205,7 +10477,7 @@
               </a:spcBef>
             </a:pPr>
             <a:r>
-              <a:rPr lang="en-US" b="true" sz="2999">
+              <a:rPr lang="en-US" sz="2999" b="1" dirty="0">
                 <a:solidFill>
                   <a:srgbClr val="000000"/>
                 </a:solidFill>
@@ -9214,11 +10486,32 @@
                 <a:cs typeface="Arial Bold"/>
                 <a:sym typeface="Arial Bold"/>
               </a:rPr>
-              <a:t>Srujan Yendugula</a:t>
-            </a:r>
-          </a:p>
-          <a:p>
-            <a:pPr algn="l" marL="647695" indent="-323848" lvl="1">
+              <a:t>Srujan </a:t>
+            </a:r>
+            <a:r>
+              <a:rPr lang="en-US" sz="2999" b="1" dirty="0" err="1">
+                <a:solidFill>
+                  <a:srgbClr val="000000"/>
+                </a:solidFill>
+                <a:latin typeface="Arial Bold"/>
+                <a:ea typeface="Arial Bold"/>
+                <a:cs typeface="Arial Bold"/>
+                <a:sym typeface="Arial Bold"/>
+              </a:rPr>
+              <a:t>Yendugula</a:t>
+            </a:r>
+            <a:endParaRPr lang="en-US" sz="2999" b="1" dirty="0">
+              <a:solidFill>
+                <a:srgbClr val="000000"/>
+              </a:solidFill>
+              <a:latin typeface="Arial Bold"/>
+              <a:ea typeface="Arial Bold"/>
+              <a:cs typeface="Arial Bold"/>
+              <a:sym typeface="Arial Bold"/>
+            </a:endParaRPr>
+          </a:p>
+          <a:p>
+            <a:pPr marL="647695" lvl="1" indent="-323848" algn="l">
               <a:lnSpc>
                 <a:spcPts val="4199"/>
               </a:lnSpc>
@@ -9229,7 +10522,7 @@
               <a:buChar char="•"/>
             </a:pPr>
             <a:r>
-              <a:rPr lang="en-US" sz="2999">
+              <a:rPr lang="en-US" sz="2999" dirty="0">
                 <a:solidFill>
                   <a:srgbClr val="000000"/>
                 </a:solidFill>
@@ -9250,6 +10543,15 @@
                 <a:spcPct val="0"/>
               </a:spcBef>
             </a:pPr>
+            <a:endParaRPr lang="en-US" sz="2999" dirty="0">
+              <a:solidFill>
+                <a:srgbClr val="000000"/>
+              </a:solidFill>
+              <a:latin typeface="Arial"/>
+              <a:ea typeface="Arial"/>
+              <a:cs typeface="Arial"/>
+              <a:sym typeface="Arial"/>
+            </a:endParaRPr>
           </a:p>
           <a:p>
             <a:pPr algn="l">
@@ -9261,7 +10563,7 @@
               </a:spcBef>
             </a:pPr>
             <a:r>
-              <a:rPr lang="en-US" b="true" sz="2999">
+              <a:rPr lang="en-US" sz="2999" b="1" dirty="0" err="1">
                 <a:solidFill>
                   <a:srgbClr val="000000"/>
                 </a:solidFill>
@@ -9270,11 +10572,23 @@
                 <a:cs typeface="Arial Bold"/>
                 <a:sym typeface="Arial Bold"/>
               </a:rPr>
-              <a:t>Harshraj Solanki</a:t>
-            </a:r>
-          </a:p>
-          <a:p>
-            <a:pPr algn="l" marL="647695" indent="-323848" lvl="1">
+              <a:t>Harshraj</a:t>
+            </a:r>
+            <a:r>
+              <a:rPr lang="en-US" sz="2999" b="1" dirty="0">
+                <a:solidFill>
+                  <a:srgbClr val="000000"/>
+                </a:solidFill>
+                <a:latin typeface="Arial Bold"/>
+                <a:ea typeface="Arial Bold"/>
+                <a:cs typeface="Arial Bold"/>
+                <a:sym typeface="Arial Bold"/>
+              </a:rPr>
+              <a:t> Solanki</a:t>
+            </a:r>
+          </a:p>
+          <a:p>
+            <a:pPr marL="647695" lvl="1" indent="-323848" algn="l">
               <a:lnSpc>
                 <a:spcPts val="4199"/>
               </a:lnSpc>
@@ -9285,7 +10599,7 @@
               <a:buChar char="•"/>
             </a:pPr>
             <a:r>
-              <a:rPr lang="en-US" sz="2999">
+              <a:rPr lang="en-US" sz="2999" dirty="0">
                 <a:solidFill>
                   <a:srgbClr val="000000"/>
                 </a:solidFill>
@@ -9306,6 +10620,15 @@
                 <a:spcPct val="0"/>
               </a:spcBef>
             </a:pPr>
+            <a:endParaRPr lang="en-US" sz="2999" dirty="0">
+              <a:solidFill>
+                <a:srgbClr val="000000"/>
+              </a:solidFill>
+              <a:latin typeface="Arial"/>
+              <a:ea typeface="Arial"/>
+              <a:cs typeface="Arial"/>
+              <a:sym typeface="Arial"/>
+            </a:endParaRPr>
           </a:p>
           <a:p>
             <a:pPr algn="l">
@@ -9317,7 +10640,7 @@
               </a:spcBef>
             </a:pPr>
             <a:r>
-              <a:rPr lang="en-US" sz="2999">
+              <a:rPr lang="en-US" sz="2999" dirty="0">
                 <a:solidFill>
                   <a:srgbClr val="000000"/>
                 </a:solidFill>
